--- a/results/domusfm_corpus_fixed/slides/DomusFM_results.pptx
+++ b/results/domusfm_corpus_fixed/slides/DomusFM_results.pptx
@@ -23,9 +23,14 @@
     <p:sldId id="271" r:id="rId17"/>
     <p:sldId id="272" r:id="rId18"/>
     <p:sldId id="273" r:id="rId19"/>
+    <p:sldId id="274" r:id="rId20"/>
+    <p:sldId id="275" r:id="rId21"/>
+    <p:sldId id="276" r:id="rId22"/>
+    <p:sldId id="277" r:id="rId23"/>
+    <p:sldId id="278" r:id="rId24"/>
   </p:sldIdLst>
   <p:notesMasterIdLst>
-    <p:notesMasterId r:id="rId20"/>
+    <p:notesMasterId r:id="rId25"/>
   </p:notesMasterIdLst>
   <p:sldSz cx="12192000" cy="6858000"/>
   <p:notesSz cx="6858000" cy="12192000"/>
@@ -2366,7 +2371,7 @@
           <a:p>
             <a:r>
               <a:rPr lang="en-US" dirty="0"/>
-              <a:t/>
+              <a:t>L1 and L8 share one remedy: linking sensor activity to words. L6 and L7 share another: predicting what happens next and when. Built means implemented and tested on small data; designed means specified in DESIGN.md but not yet built.</a:t>
             </a:r>
             <a:endParaRPr lang="en-US" dirty="0"/>
           </a:p>
@@ -2454,6 +2459,94 @@
           <a:p>
             <a:r>
               <a:rPr lang="en-US" dirty="0"/>
+              <a:t>DomusFM turns every sensor into ON/OFF events and remembers the last 30 events, however long they took. HomeFM keeps real values, reads in 1-minute steps, and adds daily summaries for long-range habits.</a:t>
+            </a:r>
+            <a:endParaRPr lang="en-US" dirty="0"/>
+          </a:p>
+        </p:txBody>
+      </p:sp>
+      <p:sp>
+        <p:nvSpPr>
+          <p:cNvPr id="4" name="Slide Number Placeholder 3"/>
+          <p:cNvSpPr>
+            <a:spLocks noGrp="1"/>
+          </p:cNvSpPr>
+          <p:nvPr>
+            <p:ph type="sldNum" sz="quarter" idx="10"/>
+          </p:nvPr>
+        </p:nvSpPr>
+        <p:spPr/>
+        <p:txBody>
+          <a:bodyPr/>
+          <a:lstStyle/>
+          <a:p>
+            <a:fld id="{F7021451-1387-4CA6-816F-3879F97B5CBC}" type="slidenum">
+              <a:rPr lang="en-US"/>
+              <a:t>18</a:t>
+            </a:fld>
+            <a:endParaRPr lang="en-US"/>
+          </a:p>
+        </p:txBody>
+      </p:sp>
+    </p:spTree>
+    <p:extLst>
+      <p:ext uri="{BB962C8B-B14F-4D97-AF65-F5344CB8AC3E}">
+        <p14:creationId xmlns:p14="http://schemas.microsoft.com/office/powerpoint/2010/main" val="1024086991"/>
+      </p:ext>
+    </p:extLst>
+  </p:cSld>
+  <p:clrMapOvr>
+    <a:masterClrMapping/>
+  </p:clrMapOvr>
+</p:notes>
+</file>
+
+<file path=ppt/notesSlides/notesSlide19.xml><?xml version="1.0" encoding="utf-8"?>
+<p:notes xmlns:a="http://schemas.openxmlformats.org/drawingml/2006/main" xmlns:r="http://schemas.openxmlformats.org/officeDocument/2006/relationships" xmlns:p="http://schemas.openxmlformats.org/presentationml/2006/main">
+  <p:cSld>
+    <p:spTree>
+      <p:nvGrpSpPr>
+        <p:cNvPr id="1" name=""/>
+        <p:cNvGrpSpPr/>
+        <p:nvPr/>
+      </p:nvGrpSpPr>
+      <p:grpSpPr>
+        <a:xfrm>
+          <a:off x="0" y="0"/>
+          <a:ext cx="0" cy="0"/>
+          <a:chOff x="0" y="0"/>
+          <a:chExt cx="0" cy="0"/>
+        </a:xfrm>
+      </p:grpSpPr>
+      <p:sp>
+        <p:nvSpPr>
+          <p:cNvPr id="2" name="Slide Image Placeholder 1"/>
+          <p:cNvSpPr>
+            <a:spLocks noGrp="1" noRot="1" noChangeAspect="1"/>
+          </p:cNvSpPr>
+          <p:nvPr>
+            <p:ph type="sldImg"/>
+          </p:nvPr>
+        </p:nvSpPr>
+        <p:spPr/>
+      </p:sp>
+      <p:sp>
+        <p:nvSpPr>
+          <p:cNvPr id="3" name="Notes Placeholder 2"/>
+          <p:cNvSpPr>
+            <a:spLocks noGrp="1"/>
+          </p:cNvSpPr>
+          <p:nvPr>
+            <p:ph type="body" idx="1"/>
+          </p:nvPr>
+        </p:nvSpPr>
+        <p:spPr/>
+        <p:txBody>
+          <a:bodyPr/>
+          <a:lstStyle/>
+          <a:p>
+            <a:r>
+              <a:rPr lang="en-US" dirty="0"/>
               <a:t/>
             </a:r>
             <a:endParaRPr lang="en-US" dirty="0"/>
@@ -2477,7 +2570,7 @@
           <a:p>
             <a:fld id="{F7021451-1387-4CA6-816F-3879F97B5CBC}" type="slidenum">
               <a:rPr lang="en-US"/>
-              <a:t>18</a:t>
+              <a:t>19</a:t>
             </a:fld>
             <a:endParaRPr lang="en-US"/>
           </a:p>
@@ -2566,6 +2659,358 @@
             <a:fld id="{F7021451-1387-4CA6-816F-3879F97B5CBC}" type="slidenum">
               <a:rPr lang="en-US"/>
               <a:t>2</a:t>
+            </a:fld>
+            <a:endParaRPr lang="en-US"/>
+          </a:p>
+        </p:txBody>
+      </p:sp>
+    </p:spTree>
+    <p:extLst>
+      <p:ext uri="{BB962C8B-B14F-4D97-AF65-F5344CB8AC3E}">
+        <p14:creationId xmlns:p14="http://schemas.microsoft.com/office/powerpoint/2010/main" val="1024086991"/>
+      </p:ext>
+    </p:extLst>
+  </p:cSld>
+  <p:clrMapOvr>
+    <a:masterClrMapping/>
+  </p:clrMapOvr>
+</p:notes>
+</file>
+
+<file path=ppt/notesSlides/notesSlide20.xml><?xml version="1.0" encoding="utf-8"?>
+<p:notes xmlns:a="http://schemas.openxmlformats.org/drawingml/2006/main" xmlns:r="http://schemas.openxmlformats.org/officeDocument/2006/relationships" xmlns:p="http://schemas.openxmlformats.org/presentationml/2006/main">
+  <p:cSld>
+    <p:spTree>
+      <p:nvGrpSpPr>
+        <p:cNvPr id="1" name=""/>
+        <p:cNvGrpSpPr/>
+        <p:nvPr/>
+      </p:nvGrpSpPr>
+      <p:grpSpPr>
+        <a:xfrm>
+          <a:off x="0" y="0"/>
+          <a:ext cx="0" cy="0"/>
+          <a:chOff x="0" y="0"/>
+          <a:chExt cx="0" cy="0"/>
+        </a:xfrm>
+      </p:grpSpPr>
+      <p:sp>
+        <p:nvSpPr>
+          <p:cNvPr id="2" name="Slide Image Placeholder 1"/>
+          <p:cNvSpPr>
+            <a:spLocks noGrp="1" noRot="1" noChangeAspect="1"/>
+          </p:cNvSpPr>
+          <p:nvPr>
+            <p:ph type="sldImg"/>
+          </p:nvPr>
+        </p:nvSpPr>
+        <p:spPr/>
+      </p:sp>
+      <p:sp>
+        <p:nvSpPr>
+          <p:cNvPr id="3" name="Notes Placeholder 2"/>
+          <p:cNvSpPr>
+            <a:spLocks noGrp="1"/>
+          </p:cNvSpPr>
+          <p:nvPr>
+            <p:ph type="body" idx="1"/>
+          </p:nvPr>
+        </p:nvSpPr>
+        <p:spPr/>
+        <p:txBody>
+          <a:bodyPr/>
+          <a:lstStyle/>
+          <a:p>
+            <a:r>
+              <a:rPr lang="en-US" dirty="0"/>
+              <a:t>Paper's game run finished 24 September 2026; harder game run finished 25 September 2026. With the paper's game, pretraining was worse than training from scratch on 6 of 7 homes for activity recognition. Settings where pretraining wins, paper's game: ADL 1 + 1, Next-30 1 + 3 = 6 of 28.</a:t>
+            </a:r>
+            <a:endParaRPr lang="en-US" dirty="0"/>
+          </a:p>
+        </p:txBody>
+      </p:sp>
+      <p:sp>
+        <p:nvSpPr>
+          <p:cNvPr id="4" name="Slide Number Placeholder 3"/>
+          <p:cNvSpPr>
+            <a:spLocks noGrp="1"/>
+          </p:cNvSpPr>
+          <p:nvPr>
+            <p:ph type="sldNum" sz="quarter" idx="10"/>
+          </p:nvPr>
+        </p:nvSpPr>
+        <p:spPr/>
+        <p:txBody>
+          <a:bodyPr/>
+          <a:lstStyle/>
+          <a:p>
+            <a:fld id="{F7021451-1387-4CA6-816F-3879F97B5CBC}" type="slidenum">
+              <a:rPr lang="en-US"/>
+              <a:t>20</a:t>
+            </a:fld>
+            <a:endParaRPr lang="en-US"/>
+          </a:p>
+        </p:txBody>
+      </p:sp>
+    </p:spTree>
+    <p:extLst>
+      <p:ext uri="{BB962C8B-B14F-4D97-AF65-F5344CB8AC3E}">
+        <p14:creationId xmlns:p14="http://schemas.microsoft.com/office/powerpoint/2010/main" val="1024086991"/>
+      </p:ext>
+    </p:extLst>
+  </p:cSld>
+  <p:clrMapOvr>
+    <a:masterClrMapping/>
+  </p:clrMapOvr>
+</p:notes>
+</file>
+
+<file path=ppt/notesSlides/notesSlide21.xml><?xml version="1.0" encoding="utf-8"?>
+<p:notes xmlns:a="http://schemas.openxmlformats.org/drawingml/2006/main" xmlns:r="http://schemas.openxmlformats.org/officeDocument/2006/relationships" xmlns:p="http://schemas.openxmlformats.org/presentationml/2006/main">
+  <p:cSld>
+    <p:spTree>
+      <p:nvGrpSpPr>
+        <p:cNvPr id="1" name=""/>
+        <p:cNvGrpSpPr/>
+        <p:nvPr/>
+      </p:nvGrpSpPr>
+      <p:grpSpPr>
+        <a:xfrm>
+          <a:off x="0" y="0"/>
+          <a:ext cx="0" cy="0"/>
+          <a:chOff x="0" y="0"/>
+          <a:chExt cx="0" cy="0"/>
+        </a:xfrm>
+      </p:grpSpPr>
+      <p:sp>
+        <p:nvSpPr>
+          <p:cNvPr id="2" name="Slide Image Placeholder 1"/>
+          <p:cNvSpPr>
+            <a:spLocks noGrp="1" noRot="1" noChangeAspect="1"/>
+          </p:cNvSpPr>
+          <p:nvPr>
+            <p:ph type="sldImg"/>
+          </p:nvPr>
+        </p:nvSpPr>
+        <p:spPr/>
+      </p:sp>
+      <p:sp>
+        <p:nvSpPr>
+          <p:cNvPr id="3" name="Notes Placeholder 2"/>
+          <p:cNvSpPr>
+            <a:spLocks noGrp="1"/>
+          </p:cNvSpPr>
+          <p:nvPr>
+            <p:ph type="body" idx="1"/>
+          </p:nvPr>
+        </p:nvSpPr>
+        <p:spPr/>
+        <p:txBody>
+          <a:bodyPr/>
+          <a:lstStyle/>
+          <a:p>
+            <a:r>
+              <a:rPr lang="en-US" dirty="0"/>
+              <a:t>Also carried over from the DomusFM fix into HomeFM training: batches drawn from a few homes at a time, gentler fine-tuning, and loss health checks. HomeFM must now beat the fixed DomusFM: mean activity F1 0.517 / 0.529 and Next-30 F1 0.649 / 0.613 at 5 % / 30 % labels.</a:t>
+            </a:r>
+            <a:endParaRPr lang="en-US" dirty="0"/>
+          </a:p>
+        </p:txBody>
+      </p:sp>
+      <p:sp>
+        <p:nvSpPr>
+          <p:cNvPr id="4" name="Slide Number Placeholder 3"/>
+          <p:cNvSpPr>
+            <a:spLocks noGrp="1"/>
+          </p:cNvSpPr>
+          <p:nvPr>
+            <p:ph type="sldNum" sz="quarter" idx="10"/>
+          </p:nvPr>
+        </p:nvSpPr>
+        <p:spPr/>
+        <p:txBody>
+          <a:bodyPr/>
+          <a:lstStyle/>
+          <a:p>
+            <a:fld id="{F7021451-1387-4CA6-816F-3879F97B5CBC}" type="slidenum">
+              <a:rPr lang="en-US"/>
+              <a:t>21</a:t>
+            </a:fld>
+            <a:endParaRPr lang="en-US"/>
+          </a:p>
+        </p:txBody>
+      </p:sp>
+    </p:spTree>
+    <p:extLst>
+      <p:ext uri="{BB962C8B-B14F-4D97-AF65-F5344CB8AC3E}">
+        <p14:creationId xmlns:p14="http://schemas.microsoft.com/office/powerpoint/2010/main" val="1024086991"/>
+      </p:ext>
+    </p:extLst>
+  </p:cSld>
+  <p:clrMapOvr>
+    <a:masterClrMapping/>
+  </p:clrMapOvr>
+</p:notes>
+</file>
+
+<file path=ppt/notesSlides/notesSlide22.xml><?xml version="1.0" encoding="utf-8"?>
+<p:notes xmlns:a="http://schemas.openxmlformats.org/drawingml/2006/main" xmlns:r="http://schemas.openxmlformats.org/officeDocument/2006/relationships" xmlns:p="http://schemas.openxmlformats.org/presentationml/2006/main">
+  <p:cSld>
+    <p:spTree>
+      <p:nvGrpSpPr>
+        <p:cNvPr id="1" name=""/>
+        <p:cNvGrpSpPr/>
+        <p:nvPr/>
+      </p:nvGrpSpPr>
+      <p:grpSpPr>
+        <a:xfrm>
+          <a:off x="0" y="0"/>
+          <a:ext cx="0" cy="0"/>
+          <a:chOff x="0" y="0"/>
+          <a:chExt cx="0" cy="0"/>
+        </a:xfrm>
+      </p:grpSpPr>
+      <p:sp>
+        <p:nvSpPr>
+          <p:cNvPr id="2" name="Slide Image Placeholder 1"/>
+          <p:cNvSpPr>
+            <a:spLocks noGrp="1" noRot="1" noChangeAspect="1"/>
+          </p:cNvSpPr>
+          <p:nvPr>
+            <p:ph type="sldImg"/>
+          </p:nvPr>
+        </p:nvSpPr>
+        <p:spPr/>
+      </p:sp>
+      <p:sp>
+        <p:nvSpPr>
+          <p:cNvPr id="3" name="Notes Placeholder 2"/>
+          <p:cNvSpPr>
+            <a:spLocks noGrp="1"/>
+          </p:cNvSpPr>
+          <p:nvPr>
+            <p:ph type="body" idx="1"/>
+          </p:nvPr>
+        </p:nvSpPr>
+        <p:spPr/>
+        <p:txBody>
+          <a:bodyPr/>
+          <a:lstStyle/>
+          <a:p>
+            <a:r>
+              <a:rPr lang="en-US" dirty="0"/>
+              <a:t/>
+            </a:r>
+            <a:endParaRPr lang="en-US" dirty="0"/>
+          </a:p>
+        </p:txBody>
+      </p:sp>
+      <p:sp>
+        <p:nvSpPr>
+          <p:cNvPr id="4" name="Slide Number Placeholder 3"/>
+          <p:cNvSpPr>
+            <a:spLocks noGrp="1"/>
+          </p:cNvSpPr>
+          <p:nvPr>
+            <p:ph type="sldNum" sz="quarter" idx="10"/>
+          </p:nvPr>
+        </p:nvSpPr>
+        <p:spPr/>
+        <p:txBody>
+          <a:bodyPr/>
+          <a:lstStyle/>
+          <a:p>
+            <a:fld id="{F7021451-1387-4CA6-816F-3879F97B5CBC}" type="slidenum">
+              <a:rPr lang="en-US"/>
+              <a:t>22</a:t>
+            </a:fld>
+            <a:endParaRPr lang="en-US"/>
+          </a:p>
+        </p:txBody>
+      </p:sp>
+    </p:spTree>
+    <p:extLst>
+      <p:ext uri="{BB962C8B-B14F-4D97-AF65-F5344CB8AC3E}">
+        <p14:creationId xmlns:p14="http://schemas.microsoft.com/office/powerpoint/2010/main" val="1024086991"/>
+      </p:ext>
+    </p:extLst>
+  </p:cSld>
+  <p:clrMapOvr>
+    <a:masterClrMapping/>
+  </p:clrMapOvr>
+</p:notes>
+</file>
+
+<file path=ppt/notesSlides/notesSlide23.xml><?xml version="1.0" encoding="utf-8"?>
+<p:notes xmlns:a="http://schemas.openxmlformats.org/drawingml/2006/main" xmlns:r="http://schemas.openxmlformats.org/officeDocument/2006/relationships" xmlns:p="http://schemas.openxmlformats.org/presentationml/2006/main">
+  <p:cSld>
+    <p:spTree>
+      <p:nvGrpSpPr>
+        <p:cNvPr id="1" name=""/>
+        <p:cNvGrpSpPr/>
+        <p:nvPr/>
+      </p:nvGrpSpPr>
+      <p:grpSpPr>
+        <a:xfrm>
+          <a:off x="0" y="0"/>
+          <a:ext cx="0" cy="0"/>
+          <a:chOff x="0" y="0"/>
+          <a:chExt cx="0" cy="0"/>
+        </a:xfrm>
+      </p:grpSpPr>
+      <p:sp>
+        <p:nvSpPr>
+          <p:cNvPr id="2" name="Slide Image Placeholder 1"/>
+          <p:cNvSpPr>
+            <a:spLocks noGrp="1" noRot="1" noChangeAspect="1"/>
+          </p:cNvSpPr>
+          <p:nvPr>
+            <p:ph type="sldImg"/>
+          </p:nvPr>
+        </p:nvSpPr>
+        <p:spPr/>
+      </p:sp>
+      <p:sp>
+        <p:nvSpPr>
+          <p:cNvPr id="3" name="Notes Placeholder 2"/>
+          <p:cNvSpPr>
+            <a:spLocks noGrp="1"/>
+          </p:cNvSpPr>
+          <p:nvPr>
+            <p:ph type="body" idx="1"/>
+          </p:nvPr>
+        </p:nvSpPr>
+        <p:spPr/>
+        <p:txBody>
+          <a:bodyPr/>
+          <a:lstStyle/>
+          <a:p>
+            <a:r>
+              <a:rPr lang="en-US" dirty="0"/>
+              <a:t/>
+            </a:r>
+            <a:endParaRPr lang="en-US" dirty="0"/>
+          </a:p>
+        </p:txBody>
+      </p:sp>
+      <p:sp>
+        <p:nvSpPr>
+          <p:cNvPr id="4" name="Slide Number Placeholder 3"/>
+          <p:cNvSpPr>
+            <a:spLocks noGrp="1"/>
+          </p:cNvSpPr>
+          <p:nvPr>
+            <p:ph type="sldNum" sz="quarter" idx="10"/>
+          </p:nvPr>
+        </p:nvSpPr>
+        <p:spPr/>
+        <p:txBody>
+          <a:bodyPr/>
+          <a:lstStyle/>
+          <a:p>
+            <a:fld id="{F7021451-1387-4CA6-816F-3879F97B5CBC}" type="slidenum">
+              <a:rPr lang="en-US"/>
+              <a:t>23</a:t>
             </a:fld>
             <a:endParaRPr lang="en-US"/>
           </a:p>
@@ -3642,7 +4087,7 @@
                 <a:ea typeface="Calibri" pitchFamily="34" charset="-122"/>
                 <a:cs typeface="Calibri" pitchFamily="34" charset="-120"/>
               </a:rPr>
-              <a:t>Setup, parameters, results and limitations of our DomusFM pretraining experiment</a:t>
+              <a:t>Setup, results and limitations of our DomusFM pretraining experiment, and how HomeFM addresses DomusFM's limitations</a:t>
             </a:r>
             <a:endParaRPr lang="en-US" sz="2200" dirty="0"/>
           </a:p>
@@ -17277,6 +17722,7030 @@
                 <a:ea typeface="Calibri" pitchFamily="34" charset="-122"/>
                 <a:cs typeface="Calibri" pitchFamily="34" charset="-120"/>
               </a:rPr>
+              <a:t>DOMUSFM LIMITATIONS → HOMEFM REMEDIES · 1 OF 3</a:t>
+            </a:r>
+            <a:endParaRPr lang="en-US" sz="1200" dirty="0"/>
+          </a:p>
+        </p:txBody>
+      </p:sp>
+      <p:sp>
+        <p:nvSpPr>
+          <p:cNvPr id="3" name="Text 1"/>
+          <p:cNvSpPr txBox="1"/>
+          <p:nvPr/>
+        </p:nvSpPr>
+        <p:spPr>
+          <a:xfrm>
+            <a:off x="640080" y="749808"/>
+            <a:ext cx="10911535" cy="685800"/>
+          </a:xfrm>
+          <a:prstGeom prst="rect">
+            <a:avLst/>
+          </a:prstGeom>
+          <a:noFill/>
+          <a:ln/>
+        </p:spPr>
+        <p:txBody>
+          <a:bodyPr wrap="square" lIns="0" tIns="0" rIns="0" bIns="0" rtlCol="0" anchor="ctr"/>
+          <a:lstStyle/>
+          <a:p>
+            <a:pPr indent="0" marL="0">
+              <a:buNone/>
+            </a:pPr>
+            <a:r>
+              <a:rPr lang="en-US" sz="3600" b="1" dirty="0">
+                <a:solidFill>
+                  <a:srgbClr val="14213D"/>
+                </a:solidFill>
+                <a:latin typeface="Cambria" pitchFamily="34" charset="0"/>
+                <a:ea typeface="Cambria" pitchFamily="34" charset="-122"/>
+                <a:cs typeface="Cambria" pitchFamily="34" charset="-120"/>
+              </a:rPr>
+              <a:t>Limits on what it can answer</a:t>
+            </a:r>
+            <a:endParaRPr lang="en-US" sz="3600" dirty="0"/>
+          </a:p>
+        </p:txBody>
+      </p:sp>
+      <p:graphicFrame>
+        <p:nvGraphicFramePr>
+          <p:cNvPr id="18" name="Table 0"/>
+          <p:cNvGraphicFramePr>
+            <a:graphicFrameLocks noGrp="1"/>
+          </p:cNvGraphicFramePr>
+          <p:nvPr>
+            <p:extLst>
+              <p:ext uri="{D42A27DB-BD31-4B8C-83A1-F6EECF244321}">
+                <p14:modId xmlns:p14="http://schemas.microsoft.com/office/powerpoint/2010/main" val="1579011935"/>
+              </p:ext>
+            </p:extLst>
+          </p:nvPr>
+        </p:nvGraphicFramePr>
+        <p:xfrm>
+          <a:off x="640080" y="1691640"/>
+          <a:ext cx="10911535" cy="914400"/>
+        </p:xfrm>
+        <a:graphic>
+          <a:graphicData uri="http://schemas.openxmlformats.org/drawingml/2006/table">
+            <a:tbl>
+              <a:tblPr/>
+              <a:tblGrid>
+                <a:gridCol w="2331720"/>
+                <a:gridCol w="3154680"/>
+                <a:gridCol w="3383280"/>
+                <a:gridCol w="2039112"/>
+              </a:tblGrid>
+              <a:tr h="566928">
+                <a:tc>
+                  <a:txBody>
+                    <a:bodyPr/>
+                    <a:lstStyle/>
+                    <a:p>
+                      <a:pPr algn="l" indent="0" marL="0">
+                        <a:buNone/>
+                      </a:pPr>
+                      <a:r>
+                        <a:rPr lang="en-US" sz="1400" b="1" dirty="0">
+                          <a:solidFill>
+                            <a:srgbClr val="14213D"/>
+                          </a:solidFill>
+                          <a:latin typeface="Calibri" pitchFamily="34" charset="0"/>
+                          <a:ea typeface="Calibri" pitchFamily="34" charset="-122"/>
+                          <a:cs typeface="Calibri" pitchFamily="34" charset="-120"/>
+                        </a:rPr>
+                        <a:t>Limitation</a:t>
+                      </a:r>
+                      <a:endParaRPr lang="en-US" sz="1400" dirty="0">
+                        <a:latin typeface="Calibri" charset="0"/>
+                        <a:ea typeface="Calibri" charset="0"/>
+                        <a:cs typeface="Calibri" charset="0"/>
+                      </a:endParaRPr>
+                    </a:p>
+                  </a:txBody>
+                  <a:tcPr marL="73152" marR="73152" marT="36576" marB="36576" anchor="ctr">
+                    <a:lnL w="9525" cap="flat" cmpd="sng" algn="ctr">
+                      <a:solidFill>
+                        <a:srgbClr val="C9CFD8"/>
+                      </a:solidFill>
+                      <a:prstDash val="solid"/>
+                      <a:round/>
+                      <a:headEnd type="none" w="med" len="med"/>
+                      <a:tailEnd type="none" w="med" len="med"/>
+                    </a:lnL>
+                    <a:lnR w="9525" cap="flat" cmpd="sng" algn="ctr">
+                      <a:solidFill>
+                        <a:srgbClr val="C9CFD8"/>
+                      </a:solidFill>
+                      <a:prstDash val="solid"/>
+                      <a:round/>
+                      <a:headEnd type="none" w="med" len="med"/>
+                      <a:tailEnd type="none" w="med" len="med"/>
+                    </a:lnR>
+                    <a:lnT w="9525" cap="flat" cmpd="sng" algn="ctr">
+                      <a:solidFill>
+                        <a:srgbClr val="C9CFD8"/>
+                      </a:solidFill>
+                      <a:prstDash val="solid"/>
+                      <a:round/>
+                      <a:headEnd type="none" w="med" len="med"/>
+                      <a:tailEnd type="none" w="med" len="med"/>
+                    </a:lnT>
+                    <a:lnB w="9525" cap="flat" cmpd="sng" algn="ctr">
+                      <a:solidFill>
+                        <a:srgbClr val="C9CFD8"/>
+                      </a:solidFill>
+                      <a:prstDash val="solid"/>
+                      <a:round/>
+                      <a:headEnd type="none" w="med" len="med"/>
+                      <a:tailEnd type="none" w="med" len="med"/>
+                    </a:lnB>
+                    <a:solidFill>
+                      <a:srgbClr val="DDE3EC"/>
+                    </a:solidFill>
+                  </a:tcPr>
+                </a:tc>
+                <a:tc>
+                  <a:txBody>
+                    <a:bodyPr/>
+                    <a:lstStyle/>
+                    <a:p>
+                      <a:pPr algn="l" indent="0" marL="0">
+                        <a:buNone/>
+                      </a:pPr>
+                      <a:r>
+                        <a:rPr lang="en-US" sz="1400" b="1" dirty="0">
+                          <a:solidFill>
+                            <a:srgbClr val="14213D"/>
+                          </a:solidFill>
+                          <a:latin typeface="Calibri" pitchFamily="34" charset="0"/>
+                          <a:ea typeface="Calibri" pitchFamily="34" charset="-122"/>
+                          <a:cs typeface="Calibri" pitchFamily="34" charset="-120"/>
+                        </a:rPr>
+                        <a:t>What goes wrong</a:t>
+                      </a:r>
+                      <a:endParaRPr lang="en-US" sz="1400" dirty="0">
+                        <a:latin typeface="Calibri" charset="0"/>
+                        <a:ea typeface="Calibri" charset="0"/>
+                        <a:cs typeface="Calibri" charset="0"/>
+                      </a:endParaRPr>
+                    </a:p>
+                  </a:txBody>
+                  <a:tcPr marL="73152" marR="73152" marT="36576" marB="36576" anchor="ctr">
+                    <a:lnL w="9525" cap="flat" cmpd="sng" algn="ctr">
+                      <a:solidFill>
+                        <a:srgbClr val="C9CFD8"/>
+                      </a:solidFill>
+                      <a:prstDash val="solid"/>
+                      <a:round/>
+                      <a:headEnd type="none" w="med" len="med"/>
+                      <a:tailEnd type="none" w="med" len="med"/>
+                    </a:lnL>
+                    <a:lnR w="9525" cap="flat" cmpd="sng" algn="ctr">
+                      <a:solidFill>
+                        <a:srgbClr val="C9CFD8"/>
+                      </a:solidFill>
+                      <a:prstDash val="solid"/>
+                      <a:round/>
+                      <a:headEnd type="none" w="med" len="med"/>
+                      <a:tailEnd type="none" w="med" len="med"/>
+                    </a:lnR>
+                    <a:lnT w="9525" cap="flat" cmpd="sng" algn="ctr">
+                      <a:solidFill>
+                        <a:srgbClr val="C9CFD8"/>
+                      </a:solidFill>
+                      <a:prstDash val="solid"/>
+                      <a:round/>
+                      <a:headEnd type="none" w="med" len="med"/>
+                      <a:tailEnd type="none" w="med" len="med"/>
+                    </a:lnT>
+                    <a:lnB w="9525" cap="flat" cmpd="sng" algn="ctr">
+                      <a:solidFill>
+                        <a:srgbClr val="C9CFD8"/>
+                      </a:solidFill>
+                      <a:prstDash val="solid"/>
+                      <a:round/>
+                      <a:headEnd type="none" w="med" len="med"/>
+                      <a:tailEnd type="none" w="med" len="med"/>
+                    </a:lnB>
+                    <a:solidFill>
+                      <a:srgbClr val="DDE3EC"/>
+                    </a:solidFill>
+                  </a:tcPr>
+                </a:tc>
+                <a:tc>
+                  <a:txBody>
+                    <a:bodyPr/>
+                    <a:lstStyle/>
+                    <a:p>
+                      <a:pPr algn="l" indent="0" marL="0">
+                        <a:buNone/>
+                      </a:pPr>
+                      <a:r>
+                        <a:rPr lang="en-US" sz="1400" b="1" dirty="0">
+                          <a:solidFill>
+                            <a:srgbClr val="14213D"/>
+                          </a:solidFill>
+                          <a:latin typeface="Calibri" pitchFamily="34" charset="0"/>
+                          <a:ea typeface="Calibri" pitchFamily="34" charset="-122"/>
+                          <a:cs typeface="Calibri" pitchFamily="34" charset="-120"/>
+                        </a:rPr>
+                        <a:t>HomeFM remedy</a:t>
+                      </a:r>
+                      <a:endParaRPr lang="en-US" sz="1400" dirty="0">
+                        <a:latin typeface="Calibri" charset="0"/>
+                        <a:ea typeface="Calibri" charset="0"/>
+                        <a:cs typeface="Calibri" charset="0"/>
+                      </a:endParaRPr>
+                    </a:p>
+                  </a:txBody>
+                  <a:tcPr marL="73152" marR="73152" marT="36576" marB="36576" anchor="ctr">
+                    <a:lnL w="9525" cap="flat" cmpd="sng" algn="ctr">
+                      <a:solidFill>
+                        <a:srgbClr val="C9CFD8"/>
+                      </a:solidFill>
+                      <a:prstDash val="solid"/>
+                      <a:round/>
+                      <a:headEnd type="none" w="med" len="med"/>
+                      <a:tailEnd type="none" w="med" len="med"/>
+                    </a:lnL>
+                    <a:lnR w="9525" cap="flat" cmpd="sng" algn="ctr">
+                      <a:solidFill>
+                        <a:srgbClr val="C9CFD8"/>
+                      </a:solidFill>
+                      <a:prstDash val="solid"/>
+                      <a:round/>
+                      <a:headEnd type="none" w="med" len="med"/>
+                      <a:tailEnd type="none" w="med" len="med"/>
+                    </a:lnR>
+                    <a:lnT w="9525" cap="flat" cmpd="sng" algn="ctr">
+                      <a:solidFill>
+                        <a:srgbClr val="C9CFD8"/>
+                      </a:solidFill>
+                      <a:prstDash val="solid"/>
+                      <a:round/>
+                      <a:headEnd type="none" w="med" len="med"/>
+                      <a:tailEnd type="none" w="med" len="med"/>
+                    </a:lnT>
+                    <a:lnB w="9525" cap="flat" cmpd="sng" algn="ctr">
+                      <a:solidFill>
+                        <a:srgbClr val="C9CFD8"/>
+                      </a:solidFill>
+                      <a:prstDash val="solid"/>
+                      <a:round/>
+                      <a:headEnd type="none" w="med" len="med"/>
+                      <a:tailEnd type="none" w="med" len="med"/>
+                    </a:lnB>
+                    <a:solidFill>
+                      <a:srgbClr val="DDE3EC"/>
+                    </a:solidFill>
+                  </a:tcPr>
+                </a:tc>
+                <a:tc>
+                  <a:txBody>
+                    <a:bodyPr/>
+                    <a:lstStyle/>
+                    <a:p>
+                      <a:pPr algn="l" indent="0" marL="0">
+                        <a:buNone/>
+                      </a:pPr>
+                      <a:r>
+                        <a:rPr lang="en-US" sz="1400" b="1" dirty="0">
+                          <a:solidFill>
+                            <a:srgbClr val="14213D"/>
+                          </a:solidFill>
+                          <a:latin typeface="Calibri" pitchFamily="34" charset="0"/>
+                          <a:ea typeface="Calibri" pitchFamily="34" charset="-122"/>
+                          <a:cs typeface="Calibri" pitchFamily="34" charset="-120"/>
+                        </a:rPr>
+                        <a:t>Status</a:t>
+                      </a:r>
+                      <a:endParaRPr lang="en-US" sz="1400" dirty="0">
+                        <a:latin typeface="Calibri" charset="0"/>
+                        <a:ea typeface="Calibri" charset="0"/>
+                        <a:cs typeface="Calibri" charset="0"/>
+                      </a:endParaRPr>
+                    </a:p>
+                  </a:txBody>
+                  <a:tcPr marL="73152" marR="73152" marT="36576" marB="36576" anchor="ctr">
+                    <a:lnL w="9525" cap="flat" cmpd="sng" algn="ctr">
+                      <a:solidFill>
+                        <a:srgbClr val="C9CFD8"/>
+                      </a:solidFill>
+                      <a:prstDash val="solid"/>
+                      <a:round/>
+                      <a:headEnd type="none" w="med" len="med"/>
+                      <a:tailEnd type="none" w="med" len="med"/>
+                    </a:lnL>
+                    <a:lnR w="9525" cap="flat" cmpd="sng" algn="ctr">
+                      <a:solidFill>
+                        <a:srgbClr val="C9CFD8"/>
+                      </a:solidFill>
+                      <a:prstDash val="solid"/>
+                      <a:round/>
+                      <a:headEnd type="none" w="med" len="med"/>
+                      <a:tailEnd type="none" w="med" len="med"/>
+                    </a:lnR>
+                    <a:lnT w="9525" cap="flat" cmpd="sng" algn="ctr">
+                      <a:solidFill>
+                        <a:srgbClr val="C9CFD8"/>
+                      </a:solidFill>
+                      <a:prstDash val="solid"/>
+                      <a:round/>
+                      <a:headEnd type="none" w="med" len="med"/>
+                      <a:tailEnd type="none" w="med" len="med"/>
+                    </a:lnT>
+                    <a:lnB w="9525" cap="flat" cmpd="sng" algn="ctr">
+                      <a:solidFill>
+                        <a:srgbClr val="C9CFD8"/>
+                      </a:solidFill>
+                      <a:prstDash val="solid"/>
+                      <a:round/>
+                      <a:headEnd type="none" w="med" len="med"/>
+                      <a:tailEnd type="none" w="med" len="med"/>
+                    </a:lnB>
+                    <a:solidFill>
+                      <a:srgbClr val="DDE3EC"/>
+                    </a:solidFill>
+                  </a:tcPr>
+                </a:tc>
+              </a:tr>
+              <a:tr h="566928">
+                <a:tc>
+                  <a:txBody>
+                    <a:bodyPr/>
+                    <a:lstStyle/>
+                    <a:p>
+                      <a:pPr indent="0" marL="0">
+                        <a:buNone/>
+                      </a:pPr>
+                      <a:r>
+                        <a:rPr lang="en-US" sz="1400" b="1" dirty="0">
+                          <a:solidFill>
+                            <a:srgbClr val="14213D"/>
+                          </a:solidFill>
+                          <a:latin typeface="Calibri" pitchFamily="34" charset="0"/>
+                          <a:ea typeface="Calibri" pitchFamily="34" charset="-122"/>
+                          <a:cs typeface="Calibri" pitchFamily="34" charset="-120"/>
+                        </a:rPr>
+                        <a:t>L1 · Closed label set</a:t>
+                      </a:r>
+                      <a:endParaRPr lang="en-US" sz="1400" dirty="0">
+                        <a:latin typeface="Calibri" charset="0"/>
+                        <a:ea typeface="Calibri" charset="0"/>
+                        <a:cs typeface="Calibri" charset="0"/>
+                      </a:endParaRPr>
+                    </a:p>
+                  </a:txBody>
+                  <a:tcPr marL="73152" marR="73152" marT="36576" marB="36576" anchor="ctr">
+                    <a:lnL w="9525" cap="flat" cmpd="sng" algn="ctr">
+                      <a:solidFill>
+                        <a:srgbClr val="C9CFD8"/>
+                      </a:solidFill>
+                      <a:prstDash val="solid"/>
+                      <a:round/>
+                      <a:headEnd type="none" w="med" len="med"/>
+                      <a:tailEnd type="none" w="med" len="med"/>
+                    </a:lnL>
+                    <a:lnR w="9525" cap="flat" cmpd="sng" algn="ctr">
+                      <a:solidFill>
+                        <a:srgbClr val="C9CFD8"/>
+                      </a:solidFill>
+                      <a:prstDash val="solid"/>
+                      <a:round/>
+                      <a:headEnd type="none" w="med" len="med"/>
+                      <a:tailEnd type="none" w="med" len="med"/>
+                    </a:lnR>
+                    <a:lnT w="9525" cap="flat" cmpd="sng" algn="ctr">
+                      <a:solidFill>
+                        <a:srgbClr val="C9CFD8"/>
+                      </a:solidFill>
+                      <a:prstDash val="solid"/>
+                      <a:round/>
+                      <a:headEnd type="none" w="med" len="med"/>
+                      <a:tailEnd type="none" w="med" len="med"/>
+                    </a:lnT>
+                    <a:lnB w="9525" cap="flat" cmpd="sng" algn="ctr">
+                      <a:solidFill>
+                        <a:srgbClr val="C9CFD8"/>
+                      </a:solidFill>
+                      <a:prstDash val="solid"/>
+                      <a:round/>
+                      <a:headEnd type="none" w="med" len="med"/>
+                      <a:tailEnd type="none" w="med" len="med"/>
+                    </a:lnB>
+                  </a:tcPr>
+                </a:tc>
+                <a:tc>
+                  <a:txBody>
+                    <a:bodyPr/>
+                    <a:lstStyle/>
+                    <a:p>
+                      <a:pPr indent="0" marL="0">
+                        <a:buNone/>
+                      </a:pPr>
+                      <a:r>
+                        <a:rPr lang="en-US" sz="1400" dirty="0">
+                          <a:solidFill>
+                            <a:srgbClr val="14213D"/>
+                          </a:solidFill>
+                          <a:latin typeface="Calibri" pitchFamily="34" charset="0"/>
+                          <a:ea typeface="Calibri" pitchFamily="34" charset="-122"/>
+                          <a:cs typeface="Calibri" pitchFamily="34" charset="-120"/>
+                        </a:rPr>
+                        <a:t>Can only name activities it was shown examples of</a:t>
+                      </a:r>
+                      <a:endParaRPr lang="en-US" sz="1400" dirty="0">
+                        <a:latin typeface="Calibri" charset="0"/>
+                        <a:ea typeface="Calibri" charset="0"/>
+                        <a:cs typeface="Calibri" charset="0"/>
+                      </a:endParaRPr>
+                    </a:p>
+                  </a:txBody>
+                  <a:tcPr marL="73152" marR="73152" marT="36576" marB="36576" anchor="ctr">
+                    <a:lnL w="9525" cap="flat" cmpd="sng" algn="ctr">
+                      <a:solidFill>
+                        <a:srgbClr val="C9CFD8"/>
+                      </a:solidFill>
+                      <a:prstDash val="solid"/>
+                      <a:round/>
+                      <a:headEnd type="none" w="med" len="med"/>
+                      <a:tailEnd type="none" w="med" len="med"/>
+                    </a:lnL>
+                    <a:lnR w="9525" cap="flat" cmpd="sng" algn="ctr">
+                      <a:solidFill>
+                        <a:srgbClr val="C9CFD8"/>
+                      </a:solidFill>
+                      <a:prstDash val="solid"/>
+                      <a:round/>
+                      <a:headEnd type="none" w="med" len="med"/>
+                      <a:tailEnd type="none" w="med" len="med"/>
+                    </a:lnR>
+                    <a:lnT w="9525" cap="flat" cmpd="sng" algn="ctr">
+                      <a:solidFill>
+                        <a:srgbClr val="C9CFD8"/>
+                      </a:solidFill>
+                      <a:prstDash val="solid"/>
+                      <a:round/>
+                      <a:headEnd type="none" w="med" len="med"/>
+                      <a:tailEnd type="none" w="med" len="med"/>
+                    </a:lnT>
+                    <a:lnB w="9525" cap="flat" cmpd="sng" algn="ctr">
+                      <a:solidFill>
+                        <a:srgbClr val="C9CFD8"/>
+                      </a:solidFill>
+                      <a:prstDash val="solid"/>
+                      <a:round/>
+                      <a:headEnd type="none" w="med" len="med"/>
+                      <a:tailEnd type="none" w="med" len="med"/>
+                    </a:lnB>
+                  </a:tcPr>
+                </a:tc>
+                <a:tc>
+                  <a:txBody>
+                    <a:bodyPr/>
+                    <a:lstStyle/>
+                    <a:p>
+                      <a:pPr indent="0" marL="0">
+                        <a:buNone/>
+                      </a:pPr>
+                      <a:r>
+                        <a:rPr lang="en-US" sz="1400" dirty="0">
+                          <a:solidFill>
+                            <a:srgbClr val="14213D"/>
+                          </a:solidFill>
+                          <a:latin typeface="Calibri" pitchFamily="34" charset="0"/>
+                          <a:ea typeface="Calibri" pitchFamily="34" charset="-122"/>
+                          <a:cs typeface="Calibri" pitchFamily="34" charset="-120"/>
+                        </a:rPr>
+                        <a:t>Link sensor activity to words, so any activity can be described</a:t>
+                      </a:r>
+                      <a:endParaRPr lang="en-US" sz="1400" dirty="0">
+                        <a:latin typeface="Calibri" charset="0"/>
+                        <a:ea typeface="Calibri" charset="0"/>
+                        <a:cs typeface="Calibri" charset="0"/>
+                      </a:endParaRPr>
+                    </a:p>
+                  </a:txBody>
+                  <a:tcPr marL="73152" marR="73152" marT="36576" marB="36576" anchor="ctr">
+                    <a:lnL w="9525" cap="flat" cmpd="sng" algn="ctr">
+                      <a:solidFill>
+                        <a:srgbClr val="C9CFD8"/>
+                      </a:solidFill>
+                      <a:prstDash val="solid"/>
+                      <a:round/>
+                      <a:headEnd type="none" w="med" len="med"/>
+                      <a:tailEnd type="none" w="med" len="med"/>
+                    </a:lnL>
+                    <a:lnR w="9525" cap="flat" cmpd="sng" algn="ctr">
+                      <a:solidFill>
+                        <a:srgbClr val="C9CFD8"/>
+                      </a:solidFill>
+                      <a:prstDash val="solid"/>
+                      <a:round/>
+                      <a:headEnd type="none" w="med" len="med"/>
+                      <a:tailEnd type="none" w="med" len="med"/>
+                    </a:lnR>
+                    <a:lnT w="9525" cap="flat" cmpd="sng" algn="ctr">
+                      <a:solidFill>
+                        <a:srgbClr val="C9CFD8"/>
+                      </a:solidFill>
+                      <a:prstDash val="solid"/>
+                      <a:round/>
+                      <a:headEnd type="none" w="med" len="med"/>
+                      <a:tailEnd type="none" w="med" len="med"/>
+                    </a:lnT>
+                    <a:lnB w="9525" cap="flat" cmpd="sng" algn="ctr">
+                      <a:solidFill>
+                        <a:srgbClr val="C9CFD8"/>
+                      </a:solidFill>
+                      <a:prstDash val="solid"/>
+                      <a:round/>
+                      <a:headEnd type="none" w="med" len="med"/>
+                      <a:tailEnd type="none" w="med" len="med"/>
+                    </a:lnB>
+                  </a:tcPr>
+                </a:tc>
+                <a:tc>
+                  <a:txBody>
+                    <a:bodyPr/>
+                    <a:lstStyle/>
+                    <a:p>
+                      <a:pPr indent="0" marL="0">
+                        <a:buNone/>
+                      </a:pPr>
+                      <a:r>
+                        <a:rPr lang="en-US" sz="1400" dirty="0">
+                          <a:solidFill>
+                            <a:srgbClr val="5F6B7A"/>
+                          </a:solidFill>
+                          <a:latin typeface="Calibri" pitchFamily="34" charset="0"/>
+                          <a:ea typeface="Calibri" pitchFamily="34" charset="-122"/>
+                          <a:cs typeface="Calibri" pitchFamily="34" charset="-120"/>
+                        </a:rPr>
+                        <a:t>Designed; text alignment built</a:t>
+                      </a:r>
+                      <a:endParaRPr lang="en-US" sz="1400" dirty="0">
+                        <a:latin typeface="Calibri" charset="0"/>
+                        <a:ea typeface="Calibri" charset="0"/>
+                        <a:cs typeface="Calibri" charset="0"/>
+                      </a:endParaRPr>
+                    </a:p>
+                  </a:txBody>
+                  <a:tcPr marL="73152" marR="73152" marT="36576" marB="36576" anchor="ctr">
+                    <a:lnL w="9525" cap="flat" cmpd="sng" algn="ctr">
+                      <a:solidFill>
+                        <a:srgbClr val="C9CFD8"/>
+                      </a:solidFill>
+                      <a:prstDash val="solid"/>
+                      <a:round/>
+                      <a:headEnd type="none" w="med" len="med"/>
+                      <a:tailEnd type="none" w="med" len="med"/>
+                    </a:lnL>
+                    <a:lnR w="9525" cap="flat" cmpd="sng" algn="ctr">
+                      <a:solidFill>
+                        <a:srgbClr val="C9CFD8"/>
+                      </a:solidFill>
+                      <a:prstDash val="solid"/>
+                      <a:round/>
+                      <a:headEnd type="none" w="med" len="med"/>
+                      <a:tailEnd type="none" w="med" len="med"/>
+                    </a:lnR>
+                    <a:lnT w="9525" cap="flat" cmpd="sng" algn="ctr">
+                      <a:solidFill>
+                        <a:srgbClr val="C9CFD8"/>
+                      </a:solidFill>
+                      <a:prstDash val="solid"/>
+                      <a:round/>
+                      <a:headEnd type="none" w="med" len="med"/>
+                      <a:tailEnd type="none" w="med" len="med"/>
+                    </a:lnT>
+                    <a:lnB w="9525" cap="flat" cmpd="sng" algn="ctr">
+                      <a:solidFill>
+                        <a:srgbClr val="C9CFD8"/>
+                      </a:solidFill>
+                      <a:prstDash val="solid"/>
+                      <a:round/>
+                      <a:headEnd type="none" w="med" len="med"/>
+                      <a:tailEnd type="none" w="med" len="med"/>
+                    </a:lnB>
+                  </a:tcPr>
+                </a:tc>
+              </a:tr>
+              <a:tr h="566928">
+                <a:tc>
+                  <a:txBody>
+                    <a:bodyPr/>
+                    <a:lstStyle/>
+                    <a:p>
+                      <a:pPr indent="0" marL="0">
+                        <a:buNone/>
+                      </a:pPr>
+                      <a:r>
+                        <a:rPr lang="en-US" sz="1400" b="1" dirty="0">
+                          <a:solidFill>
+                            <a:srgbClr val="14213D"/>
+                          </a:solidFill>
+                          <a:latin typeface="Calibri" pitchFamily="34" charset="0"/>
+                          <a:ea typeface="Calibri" pitchFamily="34" charset="-122"/>
+                          <a:cs typeface="Calibri" pitchFamily="34" charset="-120"/>
+                        </a:rPr>
+                        <a:t>L5 · No start or end</a:t>
+                      </a:r>
+                      <a:endParaRPr lang="en-US" sz="1400" dirty="0">
+                        <a:latin typeface="Calibri" charset="0"/>
+                        <a:ea typeface="Calibri" charset="0"/>
+                        <a:cs typeface="Calibri" charset="0"/>
+                      </a:endParaRPr>
+                    </a:p>
+                  </a:txBody>
+                  <a:tcPr marL="73152" marR="73152" marT="36576" marB="36576" anchor="ctr">
+                    <a:lnL w="9525" cap="flat" cmpd="sng" algn="ctr">
+                      <a:solidFill>
+                        <a:srgbClr val="C9CFD8"/>
+                      </a:solidFill>
+                      <a:prstDash val="solid"/>
+                      <a:round/>
+                      <a:headEnd type="none" w="med" len="med"/>
+                      <a:tailEnd type="none" w="med" len="med"/>
+                    </a:lnL>
+                    <a:lnR w="9525" cap="flat" cmpd="sng" algn="ctr">
+                      <a:solidFill>
+                        <a:srgbClr val="C9CFD8"/>
+                      </a:solidFill>
+                      <a:prstDash val="solid"/>
+                      <a:round/>
+                      <a:headEnd type="none" w="med" len="med"/>
+                      <a:tailEnd type="none" w="med" len="med"/>
+                    </a:lnR>
+                    <a:lnT w="9525" cap="flat" cmpd="sng" algn="ctr">
+                      <a:solidFill>
+                        <a:srgbClr val="C9CFD8"/>
+                      </a:solidFill>
+                      <a:prstDash val="solid"/>
+                      <a:round/>
+                      <a:headEnd type="none" w="med" len="med"/>
+                      <a:tailEnd type="none" w="med" len="med"/>
+                    </a:lnT>
+                    <a:lnB w="9525" cap="flat" cmpd="sng" algn="ctr">
+                      <a:solidFill>
+                        <a:srgbClr val="C9CFD8"/>
+                      </a:solidFill>
+                      <a:prstDash val="solid"/>
+                      <a:round/>
+                      <a:headEnd type="none" w="med" len="med"/>
+                      <a:tailEnd type="none" w="med" len="med"/>
+                    </a:lnB>
+                  </a:tcPr>
+                </a:tc>
+                <a:tc>
+                  <a:txBody>
+                    <a:bodyPr/>
+                    <a:lstStyle/>
+                    <a:p>
+                      <a:pPr indent="0" marL="0">
+                        <a:buNone/>
+                      </a:pPr>
+                      <a:r>
+                        <a:rPr lang="en-US" sz="1400" dirty="0">
+                          <a:solidFill>
+                            <a:srgbClr val="14213D"/>
+                          </a:solidFill>
+                          <a:latin typeface="Calibri" pitchFamily="34" charset="0"/>
+                          <a:ea typeface="Calibri" pitchFamily="34" charset="-122"/>
+                          <a:cs typeface="Calibri" pitchFamily="34" charset="-120"/>
+                        </a:rPr>
+                        <a:t>Cannot count "cooked 3 times" or see two things at once</a:t>
+                      </a:r>
+                      <a:endParaRPr lang="en-US" sz="1400" dirty="0">
+                        <a:latin typeface="Calibri" charset="0"/>
+                        <a:ea typeface="Calibri" charset="0"/>
+                        <a:cs typeface="Calibri" charset="0"/>
+                      </a:endParaRPr>
+                    </a:p>
+                  </a:txBody>
+                  <a:tcPr marL="73152" marR="73152" marT="36576" marB="36576" anchor="ctr">
+                    <a:lnL w="9525" cap="flat" cmpd="sng" algn="ctr">
+                      <a:solidFill>
+                        <a:srgbClr val="C9CFD8"/>
+                      </a:solidFill>
+                      <a:prstDash val="solid"/>
+                      <a:round/>
+                      <a:headEnd type="none" w="med" len="med"/>
+                      <a:tailEnd type="none" w="med" len="med"/>
+                    </a:lnL>
+                    <a:lnR w="9525" cap="flat" cmpd="sng" algn="ctr">
+                      <a:solidFill>
+                        <a:srgbClr val="C9CFD8"/>
+                      </a:solidFill>
+                      <a:prstDash val="solid"/>
+                      <a:round/>
+                      <a:headEnd type="none" w="med" len="med"/>
+                      <a:tailEnd type="none" w="med" len="med"/>
+                    </a:lnR>
+                    <a:lnT w="9525" cap="flat" cmpd="sng" algn="ctr">
+                      <a:solidFill>
+                        <a:srgbClr val="C9CFD8"/>
+                      </a:solidFill>
+                      <a:prstDash val="solid"/>
+                      <a:round/>
+                      <a:headEnd type="none" w="med" len="med"/>
+                      <a:tailEnd type="none" w="med" len="med"/>
+                    </a:lnT>
+                    <a:lnB w="9525" cap="flat" cmpd="sng" algn="ctr">
+                      <a:solidFill>
+                        <a:srgbClr val="C9CFD8"/>
+                      </a:solidFill>
+                      <a:prstDash val="solid"/>
+                      <a:round/>
+                      <a:headEnd type="none" w="med" len="med"/>
+                      <a:tailEnd type="none" w="med" len="med"/>
+                    </a:lnB>
+                  </a:tcPr>
+                </a:tc>
+                <a:tc>
+                  <a:txBody>
+                    <a:bodyPr/>
+                    <a:lstStyle/>
+                    <a:p>
+                      <a:pPr indent="0" marL="0">
+                        <a:buNone/>
+                      </a:pPr>
+                      <a:r>
+                        <a:rPr lang="en-US" sz="1400" dirty="0">
+                          <a:solidFill>
+                            <a:srgbClr val="14213D"/>
+                          </a:solidFill>
+                          <a:latin typeface="Calibri" pitchFamily="34" charset="0"/>
+                          <a:ea typeface="Calibri" pitchFamily="34" charset="-122"/>
+                          <a:cs typeface="Calibri" pitchFamily="34" charset="-120"/>
+                        </a:rPr>
+                        <a:t>Several tags at once, start and end detection, counting rules</a:t>
+                      </a:r>
+                      <a:endParaRPr lang="en-US" sz="1400" dirty="0">
+                        <a:latin typeface="Calibri" charset="0"/>
+                        <a:ea typeface="Calibri" charset="0"/>
+                        <a:cs typeface="Calibri" charset="0"/>
+                      </a:endParaRPr>
+                    </a:p>
+                  </a:txBody>
+                  <a:tcPr marL="73152" marR="73152" marT="36576" marB="36576" anchor="ctr">
+                    <a:lnL w="9525" cap="flat" cmpd="sng" algn="ctr">
+                      <a:solidFill>
+                        <a:srgbClr val="C9CFD8"/>
+                      </a:solidFill>
+                      <a:prstDash val="solid"/>
+                      <a:round/>
+                      <a:headEnd type="none" w="med" len="med"/>
+                      <a:tailEnd type="none" w="med" len="med"/>
+                    </a:lnL>
+                    <a:lnR w="9525" cap="flat" cmpd="sng" algn="ctr">
+                      <a:solidFill>
+                        <a:srgbClr val="C9CFD8"/>
+                      </a:solidFill>
+                      <a:prstDash val="solid"/>
+                      <a:round/>
+                      <a:headEnd type="none" w="med" len="med"/>
+                      <a:tailEnd type="none" w="med" len="med"/>
+                    </a:lnR>
+                    <a:lnT w="9525" cap="flat" cmpd="sng" algn="ctr">
+                      <a:solidFill>
+                        <a:srgbClr val="C9CFD8"/>
+                      </a:solidFill>
+                      <a:prstDash val="solid"/>
+                      <a:round/>
+                      <a:headEnd type="none" w="med" len="med"/>
+                      <a:tailEnd type="none" w="med" len="med"/>
+                    </a:lnT>
+                    <a:lnB w="9525" cap="flat" cmpd="sng" algn="ctr">
+                      <a:solidFill>
+                        <a:srgbClr val="C9CFD8"/>
+                      </a:solidFill>
+                      <a:prstDash val="solid"/>
+                      <a:round/>
+                      <a:headEnd type="none" w="med" len="med"/>
+                      <a:tailEnd type="none" w="med" len="med"/>
+                    </a:lnB>
+                  </a:tcPr>
+                </a:tc>
+                <a:tc>
+                  <a:txBody>
+                    <a:bodyPr/>
+                    <a:lstStyle/>
+                    <a:p>
+                      <a:pPr indent="0" marL="0">
+                        <a:buNone/>
+                      </a:pPr>
+                      <a:r>
+                        <a:rPr lang="en-US" sz="1400" dirty="0">
+                          <a:solidFill>
+                            <a:srgbClr val="5F6B7A"/>
+                          </a:solidFill>
+                          <a:latin typeface="Calibri" pitchFamily="34" charset="0"/>
+                          <a:ea typeface="Calibri" pitchFamily="34" charset="-122"/>
+                          <a:cs typeface="Calibri" pitchFamily="34" charset="-120"/>
+                        </a:rPr>
+                        <a:t>Designed</a:t>
+                      </a:r>
+                      <a:endParaRPr lang="en-US" sz="1400" dirty="0">
+                        <a:latin typeface="Calibri" charset="0"/>
+                        <a:ea typeface="Calibri" charset="0"/>
+                        <a:cs typeface="Calibri" charset="0"/>
+                      </a:endParaRPr>
+                    </a:p>
+                  </a:txBody>
+                  <a:tcPr marL="73152" marR="73152" marT="36576" marB="36576" anchor="ctr">
+                    <a:lnL w="9525" cap="flat" cmpd="sng" algn="ctr">
+                      <a:solidFill>
+                        <a:srgbClr val="C9CFD8"/>
+                      </a:solidFill>
+                      <a:prstDash val="solid"/>
+                      <a:round/>
+                      <a:headEnd type="none" w="med" len="med"/>
+                      <a:tailEnd type="none" w="med" len="med"/>
+                    </a:lnL>
+                    <a:lnR w="9525" cap="flat" cmpd="sng" algn="ctr">
+                      <a:solidFill>
+                        <a:srgbClr val="C9CFD8"/>
+                      </a:solidFill>
+                      <a:prstDash val="solid"/>
+                      <a:round/>
+                      <a:headEnd type="none" w="med" len="med"/>
+                      <a:tailEnd type="none" w="med" len="med"/>
+                    </a:lnR>
+                    <a:lnT w="9525" cap="flat" cmpd="sng" algn="ctr">
+                      <a:solidFill>
+                        <a:srgbClr val="C9CFD8"/>
+                      </a:solidFill>
+                      <a:prstDash val="solid"/>
+                      <a:round/>
+                      <a:headEnd type="none" w="med" len="med"/>
+                      <a:tailEnd type="none" w="med" len="med"/>
+                    </a:lnT>
+                    <a:lnB w="9525" cap="flat" cmpd="sng" algn="ctr">
+                      <a:solidFill>
+                        <a:srgbClr val="C9CFD8"/>
+                      </a:solidFill>
+                      <a:prstDash val="solid"/>
+                      <a:round/>
+                      <a:headEnd type="none" w="med" len="med"/>
+                      <a:tailEnd type="none" w="med" len="med"/>
+                    </a:lnB>
+                  </a:tcPr>
+                </a:tc>
+              </a:tr>
+              <a:tr h="566928">
+                <a:tc>
+                  <a:txBody>
+                    <a:bodyPr/>
+                    <a:lstStyle/>
+                    <a:p>
+                      <a:pPr indent="0" marL="0">
+                        <a:buNone/>
+                      </a:pPr>
+                      <a:r>
+                        <a:rPr lang="en-US" sz="1400" b="1" dirty="0">
+                          <a:solidFill>
+                            <a:srgbClr val="14213D"/>
+                          </a:solidFill>
+                          <a:latin typeface="Calibri" pitchFamily="34" charset="0"/>
+                          <a:ea typeface="Calibri" pitchFamily="34" charset="-122"/>
+                          <a:cs typeface="Calibri" pitchFamily="34" charset="-120"/>
+                        </a:rPr>
+                        <a:t>L6 · No anomaly output</a:t>
+                      </a:r>
+                      <a:endParaRPr lang="en-US" sz="1400" dirty="0">
+                        <a:latin typeface="Calibri" charset="0"/>
+                        <a:ea typeface="Calibri" charset="0"/>
+                        <a:cs typeface="Calibri" charset="0"/>
+                      </a:endParaRPr>
+                    </a:p>
+                  </a:txBody>
+                  <a:tcPr marL="73152" marR="73152" marT="36576" marB="36576" anchor="ctr">
+                    <a:lnL w="9525" cap="flat" cmpd="sng" algn="ctr">
+                      <a:solidFill>
+                        <a:srgbClr val="C9CFD8"/>
+                      </a:solidFill>
+                      <a:prstDash val="solid"/>
+                      <a:round/>
+                      <a:headEnd type="none" w="med" len="med"/>
+                      <a:tailEnd type="none" w="med" len="med"/>
+                    </a:lnL>
+                    <a:lnR w="9525" cap="flat" cmpd="sng" algn="ctr">
+                      <a:solidFill>
+                        <a:srgbClr val="C9CFD8"/>
+                      </a:solidFill>
+                      <a:prstDash val="solid"/>
+                      <a:round/>
+                      <a:headEnd type="none" w="med" len="med"/>
+                      <a:tailEnd type="none" w="med" len="med"/>
+                    </a:lnR>
+                    <a:lnT w="9525" cap="flat" cmpd="sng" algn="ctr">
+                      <a:solidFill>
+                        <a:srgbClr val="C9CFD8"/>
+                      </a:solidFill>
+                      <a:prstDash val="solid"/>
+                      <a:round/>
+                      <a:headEnd type="none" w="med" len="med"/>
+                      <a:tailEnd type="none" w="med" len="med"/>
+                    </a:lnT>
+                    <a:lnB w="9525" cap="flat" cmpd="sng" algn="ctr">
+                      <a:solidFill>
+                        <a:srgbClr val="C9CFD8"/>
+                      </a:solidFill>
+                      <a:prstDash val="solid"/>
+                      <a:round/>
+                      <a:headEnd type="none" w="med" len="med"/>
+                      <a:tailEnd type="none" w="med" len="med"/>
+                    </a:lnB>
+                  </a:tcPr>
+                </a:tc>
+                <a:tc>
+                  <a:txBody>
+                    <a:bodyPr/>
+                    <a:lstStyle/>
+                    <a:p>
+                      <a:pPr indent="0" marL="0">
+                        <a:buNone/>
+                      </a:pPr>
+                      <a:r>
+                        <a:rPr lang="en-US" sz="1400" dirty="0">
+                          <a:solidFill>
+                            <a:srgbClr val="14213D"/>
+                          </a:solidFill>
+                          <a:latin typeface="Calibri" pitchFamily="34" charset="0"/>
+                          <a:ea typeface="Calibri" pitchFamily="34" charset="-122"/>
+                          <a:cs typeface="Calibri" pitchFamily="34" charset="-120"/>
+                        </a:rPr>
+                        <a:t>Cannot say "this is unusual" or "this sensor is broken"</a:t>
+                      </a:r>
+                      <a:endParaRPr lang="en-US" sz="1400" dirty="0">
+                        <a:latin typeface="Calibri" charset="0"/>
+                        <a:ea typeface="Calibri" charset="0"/>
+                        <a:cs typeface="Calibri" charset="0"/>
+                      </a:endParaRPr>
+                    </a:p>
+                  </a:txBody>
+                  <a:tcPr marL="73152" marR="73152" marT="36576" marB="36576" anchor="ctr">
+                    <a:lnL w="9525" cap="flat" cmpd="sng" algn="ctr">
+                      <a:solidFill>
+                        <a:srgbClr val="C9CFD8"/>
+                      </a:solidFill>
+                      <a:prstDash val="solid"/>
+                      <a:round/>
+                      <a:headEnd type="none" w="med" len="med"/>
+                      <a:tailEnd type="none" w="med" len="med"/>
+                    </a:lnL>
+                    <a:lnR w="9525" cap="flat" cmpd="sng" algn="ctr">
+                      <a:solidFill>
+                        <a:srgbClr val="C9CFD8"/>
+                      </a:solidFill>
+                      <a:prstDash val="solid"/>
+                      <a:round/>
+                      <a:headEnd type="none" w="med" len="med"/>
+                      <a:tailEnd type="none" w="med" len="med"/>
+                    </a:lnR>
+                    <a:lnT w="9525" cap="flat" cmpd="sng" algn="ctr">
+                      <a:solidFill>
+                        <a:srgbClr val="C9CFD8"/>
+                      </a:solidFill>
+                      <a:prstDash val="solid"/>
+                      <a:round/>
+                      <a:headEnd type="none" w="med" len="med"/>
+                      <a:tailEnd type="none" w="med" len="med"/>
+                    </a:lnT>
+                    <a:lnB w="9525" cap="flat" cmpd="sng" algn="ctr">
+                      <a:solidFill>
+                        <a:srgbClr val="C9CFD8"/>
+                      </a:solidFill>
+                      <a:prstDash val="solid"/>
+                      <a:round/>
+                      <a:headEnd type="none" w="med" len="med"/>
+                      <a:tailEnd type="none" w="med" len="med"/>
+                    </a:lnB>
+                  </a:tcPr>
+                </a:tc>
+                <a:tc>
+                  <a:txBody>
+                    <a:bodyPr/>
+                    <a:lstStyle/>
+                    <a:p>
+                      <a:pPr indent="0" marL="0">
+                        <a:buNone/>
+                      </a:pPr>
+                      <a:r>
+                        <a:rPr lang="en-US" sz="1400" dirty="0">
+                          <a:solidFill>
+                            <a:srgbClr val="14213D"/>
+                          </a:solidFill>
+                          <a:latin typeface="Calibri" pitchFamily="34" charset="0"/>
+                          <a:ea typeface="Calibri" pitchFamily="34" charset="-122"/>
+                          <a:cs typeface="Calibri" pitchFamily="34" charset="-120"/>
+                        </a:rPr>
+                        <a:t>Surprise score, anomaly and device-health engines</a:t>
+                      </a:r>
+                      <a:endParaRPr lang="en-US" sz="1400" dirty="0">
+                        <a:latin typeface="Calibri" charset="0"/>
+                        <a:ea typeface="Calibri" charset="0"/>
+                        <a:cs typeface="Calibri" charset="0"/>
+                      </a:endParaRPr>
+                    </a:p>
+                  </a:txBody>
+                  <a:tcPr marL="73152" marR="73152" marT="36576" marB="36576" anchor="ctr">
+                    <a:lnL w="9525" cap="flat" cmpd="sng" algn="ctr">
+                      <a:solidFill>
+                        <a:srgbClr val="C9CFD8"/>
+                      </a:solidFill>
+                      <a:prstDash val="solid"/>
+                      <a:round/>
+                      <a:headEnd type="none" w="med" len="med"/>
+                      <a:tailEnd type="none" w="med" len="med"/>
+                    </a:lnL>
+                    <a:lnR w="9525" cap="flat" cmpd="sng" algn="ctr">
+                      <a:solidFill>
+                        <a:srgbClr val="C9CFD8"/>
+                      </a:solidFill>
+                      <a:prstDash val="solid"/>
+                      <a:round/>
+                      <a:headEnd type="none" w="med" len="med"/>
+                      <a:tailEnd type="none" w="med" len="med"/>
+                    </a:lnR>
+                    <a:lnT w="9525" cap="flat" cmpd="sng" algn="ctr">
+                      <a:solidFill>
+                        <a:srgbClr val="C9CFD8"/>
+                      </a:solidFill>
+                      <a:prstDash val="solid"/>
+                      <a:round/>
+                      <a:headEnd type="none" w="med" len="med"/>
+                      <a:tailEnd type="none" w="med" len="med"/>
+                    </a:lnT>
+                    <a:lnB w="9525" cap="flat" cmpd="sng" algn="ctr">
+                      <a:solidFill>
+                        <a:srgbClr val="C9CFD8"/>
+                      </a:solidFill>
+                      <a:prstDash val="solid"/>
+                      <a:round/>
+                      <a:headEnd type="none" w="med" len="med"/>
+                      <a:tailEnd type="none" w="med" len="med"/>
+                    </a:lnB>
+                  </a:tcPr>
+                </a:tc>
+                <a:tc>
+                  <a:txBody>
+                    <a:bodyPr/>
+                    <a:lstStyle/>
+                    <a:p>
+                      <a:pPr indent="0" marL="0">
+                        <a:buNone/>
+                      </a:pPr>
+                      <a:r>
+                        <a:rPr lang="en-US" sz="1400" dirty="0">
+                          <a:solidFill>
+                            <a:srgbClr val="5F6B7A"/>
+                          </a:solidFill>
+                          <a:latin typeface="Calibri" pitchFamily="34" charset="0"/>
+                          <a:ea typeface="Calibri" pitchFamily="34" charset="-122"/>
+                          <a:cs typeface="Calibri" pitchFamily="34" charset="-120"/>
+                        </a:rPr>
+                        <a:t>Surprise score built; engines designed</a:t>
+                      </a:r>
+                      <a:endParaRPr lang="en-US" sz="1400" dirty="0">
+                        <a:latin typeface="Calibri" charset="0"/>
+                        <a:ea typeface="Calibri" charset="0"/>
+                        <a:cs typeface="Calibri" charset="0"/>
+                      </a:endParaRPr>
+                    </a:p>
+                  </a:txBody>
+                  <a:tcPr marL="73152" marR="73152" marT="36576" marB="36576" anchor="ctr">
+                    <a:lnL w="9525" cap="flat" cmpd="sng" algn="ctr">
+                      <a:solidFill>
+                        <a:srgbClr val="C9CFD8"/>
+                      </a:solidFill>
+                      <a:prstDash val="solid"/>
+                      <a:round/>
+                      <a:headEnd type="none" w="med" len="med"/>
+                      <a:tailEnd type="none" w="med" len="med"/>
+                    </a:lnL>
+                    <a:lnR w="9525" cap="flat" cmpd="sng" algn="ctr">
+                      <a:solidFill>
+                        <a:srgbClr val="C9CFD8"/>
+                      </a:solidFill>
+                      <a:prstDash val="solid"/>
+                      <a:round/>
+                      <a:headEnd type="none" w="med" len="med"/>
+                      <a:tailEnd type="none" w="med" len="med"/>
+                    </a:lnR>
+                    <a:lnT w="9525" cap="flat" cmpd="sng" algn="ctr">
+                      <a:solidFill>
+                        <a:srgbClr val="C9CFD8"/>
+                      </a:solidFill>
+                      <a:prstDash val="solid"/>
+                      <a:round/>
+                      <a:headEnd type="none" w="med" len="med"/>
+                      <a:tailEnd type="none" w="med" len="med"/>
+                    </a:lnT>
+                    <a:lnB w="9525" cap="flat" cmpd="sng" algn="ctr">
+                      <a:solidFill>
+                        <a:srgbClr val="C9CFD8"/>
+                      </a:solidFill>
+                      <a:prstDash val="solid"/>
+                      <a:round/>
+                      <a:headEnd type="none" w="med" len="med"/>
+                      <a:tailEnd type="none" w="med" len="med"/>
+                    </a:lnB>
+                  </a:tcPr>
+                </a:tc>
+              </a:tr>
+              <a:tr h="566928">
+                <a:tc>
+                  <a:txBody>
+                    <a:bodyPr/>
+                    <a:lstStyle/>
+                    <a:p>
+                      <a:pPr indent="0" marL="0">
+                        <a:buNone/>
+                      </a:pPr>
+                      <a:r>
+                        <a:rPr lang="en-US" sz="1400" b="1" dirty="0">
+                          <a:solidFill>
+                            <a:srgbClr val="14213D"/>
+                          </a:solidFill>
+                          <a:latin typeface="Calibri" pitchFamily="34" charset="0"/>
+                          <a:ea typeface="Calibri" pitchFamily="34" charset="-122"/>
+                          <a:cs typeface="Calibri" pitchFamily="34" charset="-120"/>
+                        </a:rPr>
+                        <a:t>L7 · No timing</a:t>
+                      </a:r>
+                      <a:endParaRPr lang="en-US" sz="1400" dirty="0">
+                        <a:latin typeface="Calibri" charset="0"/>
+                        <a:ea typeface="Calibri" charset="0"/>
+                        <a:cs typeface="Calibri" charset="0"/>
+                      </a:endParaRPr>
+                    </a:p>
+                  </a:txBody>
+                  <a:tcPr marL="73152" marR="73152" marT="36576" marB="36576" anchor="ctr">
+                    <a:lnL w="9525" cap="flat" cmpd="sng" algn="ctr">
+                      <a:solidFill>
+                        <a:srgbClr val="C9CFD8"/>
+                      </a:solidFill>
+                      <a:prstDash val="solid"/>
+                      <a:round/>
+                      <a:headEnd type="none" w="med" len="med"/>
+                      <a:tailEnd type="none" w="med" len="med"/>
+                    </a:lnL>
+                    <a:lnR w="9525" cap="flat" cmpd="sng" algn="ctr">
+                      <a:solidFill>
+                        <a:srgbClr val="C9CFD8"/>
+                      </a:solidFill>
+                      <a:prstDash val="solid"/>
+                      <a:round/>
+                      <a:headEnd type="none" w="med" len="med"/>
+                      <a:tailEnd type="none" w="med" len="med"/>
+                    </a:lnR>
+                    <a:lnT w="9525" cap="flat" cmpd="sng" algn="ctr">
+                      <a:solidFill>
+                        <a:srgbClr val="C9CFD8"/>
+                      </a:solidFill>
+                      <a:prstDash val="solid"/>
+                      <a:round/>
+                      <a:headEnd type="none" w="med" len="med"/>
+                      <a:tailEnd type="none" w="med" len="med"/>
+                    </a:lnT>
+                    <a:lnB w="9525" cap="flat" cmpd="sng" algn="ctr">
+                      <a:solidFill>
+                        <a:srgbClr val="C9CFD8"/>
+                      </a:solidFill>
+                      <a:prstDash val="solid"/>
+                      <a:round/>
+                      <a:headEnd type="none" w="med" len="med"/>
+                      <a:tailEnd type="none" w="med" len="med"/>
+                    </a:lnB>
+                  </a:tcPr>
+                </a:tc>
+                <a:tc>
+                  <a:txBody>
+                    <a:bodyPr/>
+                    <a:lstStyle/>
+                    <a:p>
+                      <a:pPr indent="0" marL="0">
+                        <a:buNone/>
+                      </a:pPr>
+                      <a:r>
+                        <a:rPr lang="en-US" sz="1400" dirty="0">
+                          <a:solidFill>
+                            <a:srgbClr val="14213D"/>
+                          </a:solidFill>
+                          <a:latin typeface="Calibri" pitchFamily="34" charset="0"/>
+                          <a:ea typeface="Calibri" pitchFamily="34" charset="-122"/>
+                          <a:cs typeface="Calibri" pitchFamily="34" charset="-120"/>
+                        </a:rPr>
+                        <a:t>Knows what comes next, not when</a:t>
+                      </a:r>
+                      <a:endParaRPr lang="en-US" sz="1400" dirty="0">
+                        <a:latin typeface="Calibri" charset="0"/>
+                        <a:ea typeface="Calibri" charset="0"/>
+                        <a:cs typeface="Calibri" charset="0"/>
+                      </a:endParaRPr>
+                    </a:p>
+                  </a:txBody>
+                  <a:tcPr marL="73152" marR="73152" marT="36576" marB="36576" anchor="ctr">
+                    <a:lnL w="9525" cap="flat" cmpd="sng" algn="ctr">
+                      <a:solidFill>
+                        <a:srgbClr val="C9CFD8"/>
+                      </a:solidFill>
+                      <a:prstDash val="solid"/>
+                      <a:round/>
+                      <a:headEnd type="none" w="med" len="med"/>
+                      <a:tailEnd type="none" w="med" len="med"/>
+                    </a:lnL>
+                    <a:lnR w="9525" cap="flat" cmpd="sng" algn="ctr">
+                      <a:solidFill>
+                        <a:srgbClr val="C9CFD8"/>
+                      </a:solidFill>
+                      <a:prstDash val="solid"/>
+                      <a:round/>
+                      <a:headEnd type="none" w="med" len="med"/>
+                      <a:tailEnd type="none" w="med" len="med"/>
+                    </a:lnR>
+                    <a:lnT w="9525" cap="flat" cmpd="sng" algn="ctr">
+                      <a:solidFill>
+                        <a:srgbClr val="C9CFD8"/>
+                      </a:solidFill>
+                      <a:prstDash val="solid"/>
+                      <a:round/>
+                      <a:headEnd type="none" w="med" len="med"/>
+                      <a:tailEnd type="none" w="med" len="med"/>
+                    </a:lnT>
+                    <a:lnB w="9525" cap="flat" cmpd="sng" algn="ctr">
+                      <a:solidFill>
+                        <a:srgbClr val="C9CFD8"/>
+                      </a:solidFill>
+                      <a:prstDash val="solid"/>
+                      <a:round/>
+                      <a:headEnd type="none" w="med" len="med"/>
+                      <a:tailEnd type="none" w="med" len="med"/>
+                    </a:lnB>
+                  </a:tcPr>
+                </a:tc>
+                <a:tc>
+                  <a:txBody>
+                    <a:bodyPr/>
+                    <a:lstStyle/>
+                    <a:p>
+                      <a:pPr indent="0" marL="0">
+                        <a:buNone/>
+                      </a:pPr>
+                      <a:r>
+                        <a:rPr lang="en-US" sz="1400" dirty="0">
+                          <a:solidFill>
+                            <a:srgbClr val="14213D"/>
+                          </a:solidFill>
+                          <a:latin typeface="Calibri" pitchFamily="34" charset="0"/>
+                          <a:ea typeface="Calibri" pitchFamily="34" charset="-122"/>
+                          <a:cs typeface="Calibri" pitchFamily="34" charset="-120"/>
+                        </a:rPr>
+                        <a:t>Predicts each next event with a range of likely times</a:t>
+                      </a:r>
+                      <a:endParaRPr lang="en-US" sz="1400" dirty="0">
+                        <a:latin typeface="Calibri" charset="0"/>
+                        <a:ea typeface="Calibri" charset="0"/>
+                        <a:cs typeface="Calibri" charset="0"/>
+                      </a:endParaRPr>
+                    </a:p>
+                  </a:txBody>
+                  <a:tcPr marL="73152" marR="73152" marT="36576" marB="36576" anchor="ctr">
+                    <a:lnL w="9525" cap="flat" cmpd="sng" algn="ctr">
+                      <a:solidFill>
+                        <a:srgbClr val="C9CFD8"/>
+                      </a:solidFill>
+                      <a:prstDash val="solid"/>
+                      <a:round/>
+                      <a:headEnd type="none" w="med" len="med"/>
+                      <a:tailEnd type="none" w="med" len="med"/>
+                    </a:lnL>
+                    <a:lnR w="9525" cap="flat" cmpd="sng" algn="ctr">
+                      <a:solidFill>
+                        <a:srgbClr val="C9CFD8"/>
+                      </a:solidFill>
+                      <a:prstDash val="solid"/>
+                      <a:round/>
+                      <a:headEnd type="none" w="med" len="med"/>
+                      <a:tailEnd type="none" w="med" len="med"/>
+                    </a:lnR>
+                    <a:lnT w="9525" cap="flat" cmpd="sng" algn="ctr">
+                      <a:solidFill>
+                        <a:srgbClr val="C9CFD8"/>
+                      </a:solidFill>
+                      <a:prstDash val="solid"/>
+                      <a:round/>
+                      <a:headEnd type="none" w="med" len="med"/>
+                      <a:tailEnd type="none" w="med" len="med"/>
+                    </a:lnT>
+                    <a:lnB w="9525" cap="flat" cmpd="sng" algn="ctr">
+                      <a:solidFill>
+                        <a:srgbClr val="C9CFD8"/>
+                      </a:solidFill>
+                      <a:prstDash val="solid"/>
+                      <a:round/>
+                      <a:headEnd type="none" w="med" len="med"/>
+                      <a:tailEnd type="none" w="med" len="med"/>
+                    </a:lnB>
+                  </a:tcPr>
+                </a:tc>
+                <a:tc>
+                  <a:txBody>
+                    <a:bodyPr/>
+                    <a:lstStyle/>
+                    <a:p>
+                      <a:pPr indent="0" marL="0">
+                        <a:buNone/>
+                      </a:pPr>
+                      <a:r>
+                        <a:rPr lang="en-US" sz="1400" dirty="0">
+                          <a:solidFill>
+                            <a:srgbClr val="5F6B7A"/>
+                          </a:solidFill>
+                          <a:latin typeface="Calibri" pitchFamily="34" charset="0"/>
+                          <a:ea typeface="Calibri" pitchFamily="34" charset="-122"/>
+                          <a:cs typeface="Calibri" pitchFamily="34" charset="-120"/>
+                        </a:rPr>
+                        <a:t>Head built; overdue checks designed</a:t>
+                      </a:r>
+                      <a:endParaRPr lang="en-US" sz="1400" dirty="0">
+                        <a:latin typeface="Calibri" charset="0"/>
+                        <a:ea typeface="Calibri" charset="0"/>
+                        <a:cs typeface="Calibri" charset="0"/>
+                      </a:endParaRPr>
+                    </a:p>
+                  </a:txBody>
+                  <a:tcPr marL="73152" marR="73152" marT="36576" marB="36576" anchor="ctr">
+                    <a:lnL w="9525" cap="flat" cmpd="sng" algn="ctr">
+                      <a:solidFill>
+                        <a:srgbClr val="C9CFD8"/>
+                      </a:solidFill>
+                      <a:prstDash val="solid"/>
+                      <a:round/>
+                      <a:headEnd type="none" w="med" len="med"/>
+                      <a:tailEnd type="none" w="med" len="med"/>
+                    </a:lnL>
+                    <a:lnR w="9525" cap="flat" cmpd="sng" algn="ctr">
+                      <a:solidFill>
+                        <a:srgbClr val="C9CFD8"/>
+                      </a:solidFill>
+                      <a:prstDash val="solid"/>
+                      <a:round/>
+                      <a:headEnd type="none" w="med" len="med"/>
+                      <a:tailEnd type="none" w="med" len="med"/>
+                    </a:lnR>
+                    <a:lnT w="9525" cap="flat" cmpd="sng" algn="ctr">
+                      <a:solidFill>
+                        <a:srgbClr val="C9CFD8"/>
+                      </a:solidFill>
+                      <a:prstDash val="solid"/>
+                      <a:round/>
+                      <a:headEnd type="none" w="med" len="med"/>
+                      <a:tailEnd type="none" w="med" len="med"/>
+                    </a:lnT>
+                    <a:lnB w="9525" cap="flat" cmpd="sng" algn="ctr">
+                      <a:solidFill>
+                        <a:srgbClr val="C9CFD8"/>
+                      </a:solidFill>
+                      <a:prstDash val="solid"/>
+                      <a:round/>
+                      <a:headEnd type="none" w="med" len="med"/>
+                      <a:tailEnd type="none" w="med" len="med"/>
+                    </a:lnB>
+                  </a:tcPr>
+                </a:tc>
+              </a:tr>
+              <a:tr h="566928">
+                <a:tc>
+                  <a:txBody>
+                    <a:bodyPr/>
+                    <a:lstStyle/>
+                    <a:p>
+                      <a:pPr indent="0" marL="0">
+                        <a:buNone/>
+                      </a:pPr>
+                      <a:r>
+                        <a:rPr lang="en-US" sz="1400" b="1" dirty="0">
+                          <a:solidFill>
+                            <a:srgbClr val="14213D"/>
+                          </a:solidFill>
+                          <a:latin typeface="Calibri" pitchFamily="34" charset="0"/>
+                          <a:ea typeface="Calibri" pitchFamily="34" charset="-122"/>
+                          <a:cs typeface="Calibri" pitchFamily="34" charset="-120"/>
+                        </a:rPr>
+                        <a:t>L8 · Not searchable</a:t>
+                      </a:r>
+                      <a:endParaRPr lang="en-US" sz="1400" dirty="0">
+                        <a:latin typeface="Calibri" charset="0"/>
+                        <a:ea typeface="Calibri" charset="0"/>
+                        <a:cs typeface="Calibri" charset="0"/>
+                      </a:endParaRPr>
+                    </a:p>
+                  </a:txBody>
+                  <a:tcPr marL="73152" marR="73152" marT="36576" marB="36576" anchor="ctr">
+                    <a:lnL w="9525" cap="flat" cmpd="sng" algn="ctr">
+                      <a:solidFill>
+                        <a:srgbClr val="C9CFD8"/>
+                      </a:solidFill>
+                      <a:prstDash val="solid"/>
+                      <a:round/>
+                      <a:headEnd type="none" w="med" len="med"/>
+                      <a:tailEnd type="none" w="med" len="med"/>
+                    </a:lnL>
+                    <a:lnR w="9525" cap="flat" cmpd="sng" algn="ctr">
+                      <a:solidFill>
+                        <a:srgbClr val="C9CFD8"/>
+                      </a:solidFill>
+                      <a:prstDash val="solid"/>
+                      <a:round/>
+                      <a:headEnd type="none" w="med" len="med"/>
+                      <a:tailEnd type="none" w="med" len="med"/>
+                    </a:lnR>
+                    <a:lnT w="9525" cap="flat" cmpd="sng" algn="ctr">
+                      <a:solidFill>
+                        <a:srgbClr val="C9CFD8"/>
+                      </a:solidFill>
+                      <a:prstDash val="solid"/>
+                      <a:round/>
+                      <a:headEnd type="none" w="med" len="med"/>
+                      <a:tailEnd type="none" w="med" len="med"/>
+                    </a:lnT>
+                    <a:lnB w="9525" cap="flat" cmpd="sng" algn="ctr">
+                      <a:solidFill>
+                        <a:srgbClr val="C9CFD8"/>
+                      </a:solidFill>
+                      <a:prstDash val="solid"/>
+                      <a:round/>
+                      <a:headEnd type="none" w="med" len="med"/>
+                      <a:tailEnd type="none" w="med" len="med"/>
+                    </a:lnB>
+                  </a:tcPr>
+                </a:tc>
+                <a:tc>
+                  <a:txBody>
+                    <a:bodyPr/>
+                    <a:lstStyle/>
+                    <a:p>
+                      <a:pPr indent="0" marL="0">
+                        <a:buNone/>
+                      </a:pPr>
+                      <a:r>
+                        <a:rPr lang="en-US" sz="1400" dirty="0">
+                          <a:solidFill>
+                            <a:srgbClr val="14213D"/>
+                          </a:solidFill>
+                          <a:latin typeface="Calibri" pitchFamily="34" charset="0"/>
+                          <a:ea typeface="Calibri" pitchFamily="34" charset="-122"/>
+                          <a:cs typeface="Calibri" pitchFamily="34" charset="-120"/>
+                        </a:rPr>
+                        <a:t>Its knowledge cannot be searched with a question</a:t>
+                      </a:r>
+                      <a:endParaRPr lang="en-US" sz="1400" dirty="0">
+                        <a:latin typeface="Calibri" charset="0"/>
+                        <a:ea typeface="Calibri" charset="0"/>
+                        <a:cs typeface="Calibri" charset="0"/>
+                      </a:endParaRPr>
+                    </a:p>
+                  </a:txBody>
+                  <a:tcPr marL="73152" marR="73152" marT="36576" marB="36576" anchor="ctr">
+                    <a:lnL w="9525" cap="flat" cmpd="sng" algn="ctr">
+                      <a:solidFill>
+                        <a:srgbClr val="C9CFD8"/>
+                      </a:solidFill>
+                      <a:prstDash val="solid"/>
+                      <a:round/>
+                      <a:headEnd type="none" w="med" len="med"/>
+                      <a:tailEnd type="none" w="med" len="med"/>
+                    </a:lnL>
+                    <a:lnR w="9525" cap="flat" cmpd="sng" algn="ctr">
+                      <a:solidFill>
+                        <a:srgbClr val="C9CFD8"/>
+                      </a:solidFill>
+                      <a:prstDash val="solid"/>
+                      <a:round/>
+                      <a:headEnd type="none" w="med" len="med"/>
+                      <a:tailEnd type="none" w="med" len="med"/>
+                    </a:lnR>
+                    <a:lnT w="9525" cap="flat" cmpd="sng" algn="ctr">
+                      <a:solidFill>
+                        <a:srgbClr val="C9CFD8"/>
+                      </a:solidFill>
+                      <a:prstDash val="solid"/>
+                      <a:round/>
+                      <a:headEnd type="none" w="med" len="med"/>
+                      <a:tailEnd type="none" w="med" len="med"/>
+                    </a:lnT>
+                    <a:lnB w="9525" cap="flat" cmpd="sng" algn="ctr">
+                      <a:solidFill>
+                        <a:srgbClr val="C9CFD8"/>
+                      </a:solidFill>
+                      <a:prstDash val="solid"/>
+                      <a:round/>
+                      <a:headEnd type="none" w="med" len="med"/>
+                      <a:tailEnd type="none" w="med" len="med"/>
+                    </a:lnB>
+                  </a:tcPr>
+                </a:tc>
+                <a:tc>
+                  <a:txBody>
+                    <a:bodyPr/>
+                    <a:lstStyle/>
+                    <a:p>
+                      <a:pPr indent="0" marL="0">
+                        <a:buNone/>
+                      </a:pPr>
+                      <a:r>
+                        <a:rPr lang="en-US" sz="1400" dirty="0">
+                          <a:solidFill>
+                            <a:srgbClr val="14213D"/>
+                          </a:solidFill>
+                          <a:latin typeface="Calibri" pitchFamily="34" charset="0"/>
+                          <a:ea typeface="Calibri" pitchFamily="34" charset="-122"/>
+                          <a:cs typeface="Calibri" pitchFamily="34" charset="-120"/>
+                        </a:rPr>
+                        <a:t>A "map of meanings" shared by minutes and sentences</a:t>
+                      </a:r>
+                      <a:endParaRPr lang="en-US" sz="1400" dirty="0">
+                        <a:latin typeface="Calibri" charset="0"/>
+                        <a:ea typeface="Calibri" charset="0"/>
+                        <a:cs typeface="Calibri" charset="0"/>
+                      </a:endParaRPr>
+                    </a:p>
+                  </a:txBody>
+                  <a:tcPr marL="73152" marR="73152" marT="36576" marB="36576" anchor="ctr">
+                    <a:lnL w="9525" cap="flat" cmpd="sng" algn="ctr">
+                      <a:solidFill>
+                        <a:srgbClr val="C9CFD8"/>
+                      </a:solidFill>
+                      <a:prstDash val="solid"/>
+                      <a:round/>
+                      <a:headEnd type="none" w="med" len="med"/>
+                      <a:tailEnd type="none" w="med" len="med"/>
+                    </a:lnL>
+                    <a:lnR w="9525" cap="flat" cmpd="sng" algn="ctr">
+                      <a:solidFill>
+                        <a:srgbClr val="C9CFD8"/>
+                      </a:solidFill>
+                      <a:prstDash val="solid"/>
+                      <a:round/>
+                      <a:headEnd type="none" w="med" len="med"/>
+                      <a:tailEnd type="none" w="med" len="med"/>
+                    </a:lnR>
+                    <a:lnT w="9525" cap="flat" cmpd="sng" algn="ctr">
+                      <a:solidFill>
+                        <a:srgbClr val="C9CFD8"/>
+                      </a:solidFill>
+                      <a:prstDash val="solid"/>
+                      <a:round/>
+                      <a:headEnd type="none" w="med" len="med"/>
+                      <a:tailEnd type="none" w="med" len="med"/>
+                    </a:lnT>
+                    <a:lnB w="9525" cap="flat" cmpd="sng" algn="ctr">
+                      <a:solidFill>
+                        <a:srgbClr val="C9CFD8"/>
+                      </a:solidFill>
+                      <a:prstDash val="solid"/>
+                      <a:round/>
+                      <a:headEnd type="none" w="med" len="med"/>
+                      <a:tailEnd type="none" w="med" len="med"/>
+                    </a:lnB>
+                  </a:tcPr>
+                </a:tc>
+                <a:tc>
+                  <a:txBody>
+                    <a:bodyPr/>
+                    <a:lstStyle/>
+                    <a:p>
+                      <a:pPr indent="0" marL="0">
+                        <a:buNone/>
+                      </a:pPr>
+                      <a:r>
+                        <a:rPr lang="en-US" sz="1400" dirty="0">
+                          <a:solidFill>
+                            <a:srgbClr val="5F6B7A"/>
+                          </a:solidFill>
+                          <a:latin typeface="Calibri" pitchFamily="34" charset="0"/>
+                          <a:ea typeface="Calibri" pitchFamily="34" charset="-122"/>
+                          <a:cs typeface="Calibri" pitchFamily="34" charset="-120"/>
+                        </a:rPr>
+                        <a:t>Designed</a:t>
+                      </a:r>
+                      <a:endParaRPr lang="en-US" sz="1400" dirty="0">
+                        <a:latin typeface="Calibri" charset="0"/>
+                        <a:ea typeface="Calibri" charset="0"/>
+                        <a:cs typeface="Calibri" charset="0"/>
+                      </a:endParaRPr>
+                    </a:p>
+                  </a:txBody>
+                  <a:tcPr marL="73152" marR="73152" marT="36576" marB="36576" anchor="ctr">
+                    <a:lnL w="9525" cap="flat" cmpd="sng" algn="ctr">
+                      <a:solidFill>
+                        <a:srgbClr val="C9CFD8"/>
+                      </a:solidFill>
+                      <a:prstDash val="solid"/>
+                      <a:round/>
+                      <a:headEnd type="none" w="med" len="med"/>
+                      <a:tailEnd type="none" w="med" len="med"/>
+                    </a:lnL>
+                    <a:lnR w="9525" cap="flat" cmpd="sng" algn="ctr">
+                      <a:solidFill>
+                        <a:srgbClr val="C9CFD8"/>
+                      </a:solidFill>
+                      <a:prstDash val="solid"/>
+                      <a:round/>
+                      <a:headEnd type="none" w="med" len="med"/>
+                      <a:tailEnd type="none" w="med" len="med"/>
+                    </a:lnR>
+                    <a:lnT w="9525" cap="flat" cmpd="sng" algn="ctr">
+                      <a:solidFill>
+                        <a:srgbClr val="C9CFD8"/>
+                      </a:solidFill>
+                      <a:prstDash val="solid"/>
+                      <a:round/>
+                      <a:headEnd type="none" w="med" len="med"/>
+                      <a:tailEnd type="none" w="med" len="med"/>
+                    </a:lnT>
+                    <a:lnB w="9525" cap="flat" cmpd="sng" algn="ctr">
+                      <a:solidFill>
+                        <a:srgbClr val="C9CFD8"/>
+                      </a:solidFill>
+                      <a:prstDash val="solid"/>
+                      <a:round/>
+                      <a:headEnd type="none" w="med" len="med"/>
+                      <a:tailEnd type="none" w="med" len="med"/>
+                    </a:lnB>
+                  </a:tcPr>
+                </a:tc>
+              </a:tr>
+            </a:tbl>
+          </a:graphicData>
+        </a:graphic>
+      </p:graphicFrame>
+      <p:sp>
+        <p:nvSpPr>
+          <p:cNvPr id="5" name="Text 2"/>
+          <p:cNvSpPr txBox="1"/>
+          <p:nvPr/>
+        </p:nvSpPr>
+        <p:spPr>
+          <a:xfrm>
+            <a:off x="640080" y="6355080"/>
+            <a:ext cx="10911535" cy="274320"/>
+          </a:xfrm>
+          <a:prstGeom prst="rect">
+            <a:avLst/>
+          </a:prstGeom>
+          <a:noFill/>
+          <a:ln/>
+        </p:spPr>
+        <p:txBody>
+          <a:bodyPr wrap="square" lIns="0" tIns="0" rIns="0" bIns="0" rtlCol="0" anchor="ctr"/>
+          <a:lstStyle/>
+          <a:p>
+            <a:pPr indent="0" marL="0">
+              <a:buNone/>
+            </a:pPr>
+            <a:r>
+              <a:rPr lang="en-US" sz="1100" dirty="0">
+                <a:solidFill>
+                  <a:srgbClr val="5F6B7A"/>
+                </a:solidFill>
+                <a:latin typeface="Calibri" pitchFamily="34" charset="0"/>
+                <a:ea typeface="Calibri" pitchFamily="34" charset="-122"/>
+                <a:cs typeface="Calibri" pitchFamily="34" charset="-120"/>
+              </a:rPr>
+              <a:t>DomusFM reproduction · 17 · Source: docs/LIMITATIONS_AND_REMEDIES.md</a:t>
+            </a:r>
+            <a:endParaRPr lang="en-US" sz="1100" dirty="0"/>
+          </a:p>
+        </p:txBody>
+      </p:sp>
+    </p:spTree>
+  </p:cSld>
+  <p:clrMapOvr>
+    <a:masterClrMapping/>
+  </p:clrMapOvr>
+</p:sld>
+</file>
+
+<file path=ppt/slides/slide18.xml><?xml version="1.0" encoding="utf-8"?>
+<p:sld xmlns:a="http://schemas.openxmlformats.org/drawingml/2006/main" xmlns:r="http://schemas.openxmlformats.org/officeDocument/2006/relationships" xmlns:p="http://schemas.openxmlformats.org/presentationml/2006/main">
+  <p:cSld name="Slide 18">
+    <p:bg>
+      <p:bgPr>
+        <a:solidFill>
+          <a:srgbClr val="FFFFFF"/>
+        </a:solidFill>
+      </p:bgPr>
+    </p:bg>
+    <p:spTree>
+      <p:nvGrpSpPr>
+        <p:cNvPr id="1" name=""/>
+        <p:cNvGrpSpPr/>
+        <p:nvPr/>
+      </p:nvGrpSpPr>
+      <p:grpSpPr>
+        <a:xfrm>
+          <a:off x="0" y="0"/>
+          <a:ext cx="0" cy="0"/>
+          <a:chOff x="0" y="0"/>
+          <a:chExt cx="0" cy="0"/>
+        </a:xfrm>
+      </p:grpSpPr>
+      <p:sp>
+        <p:nvSpPr>
+          <p:cNvPr id="2" name="Text 0"/>
+          <p:cNvSpPr txBox="1"/>
+          <p:nvPr/>
+        </p:nvSpPr>
+        <p:spPr>
+          <a:xfrm>
+            <a:off x="640080" y="457200"/>
+            <a:ext cx="10911535" cy="274320"/>
+          </a:xfrm>
+          <a:prstGeom prst="rect">
+            <a:avLst/>
+          </a:prstGeom>
+          <a:noFill/>
+          <a:ln/>
+        </p:spPr>
+        <p:txBody>
+          <a:bodyPr wrap="square" lIns="0" tIns="0" rIns="0" bIns="0" rtlCol="0" anchor="ctr"/>
+          <a:lstStyle/>
+          <a:p>
+            <a:pPr indent="0" marL="0">
+              <a:buNone/>
+            </a:pPr>
+            <a:r>
+              <a:rPr lang="en-US" sz="1200" b="1" spc="200" kern="0" dirty="0">
+                <a:solidFill>
+                  <a:srgbClr val="2F6FB0"/>
+                </a:solidFill>
+                <a:latin typeface="Calibri" pitchFamily="34" charset="0"/>
+                <a:ea typeface="Calibri" pitchFamily="34" charset="-122"/>
+                <a:cs typeface="Calibri" pitchFamily="34" charset="-120"/>
+              </a:rPr>
+              <a:t>DOMUSFM LIMITATIONS → HOMEFM REMEDIES · 2 OF 3</a:t>
+            </a:r>
+            <a:endParaRPr lang="en-US" sz="1200" dirty="0"/>
+          </a:p>
+        </p:txBody>
+      </p:sp>
+      <p:sp>
+        <p:nvSpPr>
+          <p:cNvPr id="3" name="Text 1"/>
+          <p:cNvSpPr txBox="1"/>
+          <p:nvPr/>
+        </p:nvSpPr>
+        <p:spPr>
+          <a:xfrm>
+            <a:off x="640080" y="749808"/>
+            <a:ext cx="10911535" cy="685800"/>
+          </a:xfrm>
+          <a:prstGeom prst="rect">
+            <a:avLst/>
+          </a:prstGeom>
+          <a:noFill/>
+          <a:ln/>
+        </p:spPr>
+        <p:txBody>
+          <a:bodyPr wrap="square" lIns="0" tIns="0" rIns="0" bIns="0" rtlCol="0" anchor="ctr"/>
+          <a:lstStyle/>
+          <a:p>
+            <a:pPr indent="0" marL="0">
+              <a:buNone/>
+            </a:pPr>
+            <a:r>
+              <a:rPr lang="en-US" sz="3600" b="1" dirty="0">
+                <a:solidFill>
+                  <a:srgbClr val="14213D"/>
+                </a:solidFill>
+                <a:latin typeface="Cambria" pitchFamily="34" charset="0"/>
+                <a:ea typeface="Cambria" pitchFamily="34" charset="-122"/>
+                <a:cs typeface="Cambria" pitchFamily="34" charset="-120"/>
+              </a:rPr>
+              <a:t>Limits on what it can see</a:t>
+            </a:r>
+            <a:endParaRPr lang="en-US" sz="3600" dirty="0"/>
+          </a:p>
+        </p:txBody>
+      </p:sp>
+      <p:graphicFrame>
+        <p:nvGraphicFramePr>
+          <p:cNvPr id="19" name="Table 0"/>
+          <p:cNvGraphicFramePr>
+            <a:graphicFrameLocks noGrp="1"/>
+          </p:cNvGraphicFramePr>
+          <p:nvPr>
+            <p:extLst>
+              <p:ext uri="{D42A27DB-BD31-4B8C-83A1-F6EECF244321}">
+                <p14:modId xmlns:p14="http://schemas.microsoft.com/office/powerpoint/2010/main" val="1579011935"/>
+              </p:ext>
+            </p:extLst>
+          </p:nvPr>
+        </p:nvGraphicFramePr>
+        <p:xfrm>
+          <a:off x="640080" y="1691640"/>
+          <a:ext cx="10911535" cy="914400"/>
+        </p:xfrm>
+        <a:graphic>
+          <a:graphicData uri="http://schemas.openxmlformats.org/drawingml/2006/table">
+            <a:tbl>
+              <a:tblPr/>
+              <a:tblGrid>
+                <a:gridCol w="2331720"/>
+                <a:gridCol w="3154680"/>
+                <a:gridCol w="3383280"/>
+                <a:gridCol w="2039112"/>
+              </a:tblGrid>
+              <a:tr h="566928">
+                <a:tc>
+                  <a:txBody>
+                    <a:bodyPr/>
+                    <a:lstStyle/>
+                    <a:p>
+                      <a:pPr algn="l" indent="0" marL="0">
+                        <a:buNone/>
+                      </a:pPr>
+                      <a:r>
+                        <a:rPr lang="en-US" sz="1400" b="1" dirty="0">
+                          <a:solidFill>
+                            <a:srgbClr val="14213D"/>
+                          </a:solidFill>
+                          <a:latin typeface="Calibri" pitchFamily="34" charset="0"/>
+                          <a:ea typeface="Calibri" pitchFamily="34" charset="-122"/>
+                          <a:cs typeface="Calibri" pitchFamily="34" charset="-120"/>
+                        </a:rPr>
+                        <a:t>Limitation</a:t>
+                      </a:r>
+                      <a:endParaRPr lang="en-US" sz="1400" dirty="0">
+                        <a:latin typeface="Calibri" charset="0"/>
+                        <a:ea typeface="Calibri" charset="0"/>
+                        <a:cs typeface="Calibri" charset="0"/>
+                      </a:endParaRPr>
+                    </a:p>
+                  </a:txBody>
+                  <a:tcPr marL="73152" marR="73152" marT="36576" marB="36576" anchor="ctr">
+                    <a:lnL w="9525" cap="flat" cmpd="sng" algn="ctr">
+                      <a:solidFill>
+                        <a:srgbClr val="C9CFD8"/>
+                      </a:solidFill>
+                      <a:prstDash val="solid"/>
+                      <a:round/>
+                      <a:headEnd type="none" w="med" len="med"/>
+                      <a:tailEnd type="none" w="med" len="med"/>
+                    </a:lnL>
+                    <a:lnR w="9525" cap="flat" cmpd="sng" algn="ctr">
+                      <a:solidFill>
+                        <a:srgbClr val="C9CFD8"/>
+                      </a:solidFill>
+                      <a:prstDash val="solid"/>
+                      <a:round/>
+                      <a:headEnd type="none" w="med" len="med"/>
+                      <a:tailEnd type="none" w="med" len="med"/>
+                    </a:lnR>
+                    <a:lnT w="9525" cap="flat" cmpd="sng" algn="ctr">
+                      <a:solidFill>
+                        <a:srgbClr val="C9CFD8"/>
+                      </a:solidFill>
+                      <a:prstDash val="solid"/>
+                      <a:round/>
+                      <a:headEnd type="none" w="med" len="med"/>
+                      <a:tailEnd type="none" w="med" len="med"/>
+                    </a:lnT>
+                    <a:lnB w="9525" cap="flat" cmpd="sng" algn="ctr">
+                      <a:solidFill>
+                        <a:srgbClr val="C9CFD8"/>
+                      </a:solidFill>
+                      <a:prstDash val="solid"/>
+                      <a:round/>
+                      <a:headEnd type="none" w="med" len="med"/>
+                      <a:tailEnd type="none" w="med" len="med"/>
+                    </a:lnB>
+                    <a:solidFill>
+                      <a:srgbClr val="DDE3EC"/>
+                    </a:solidFill>
+                  </a:tcPr>
+                </a:tc>
+                <a:tc>
+                  <a:txBody>
+                    <a:bodyPr/>
+                    <a:lstStyle/>
+                    <a:p>
+                      <a:pPr algn="l" indent="0" marL="0">
+                        <a:buNone/>
+                      </a:pPr>
+                      <a:r>
+                        <a:rPr lang="en-US" sz="1400" b="1" dirty="0">
+                          <a:solidFill>
+                            <a:srgbClr val="14213D"/>
+                          </a:solidFill>
+                          <a:latin typeface="Calibri" pitchFamily="34" charset="0"/>
+                          <a:ea typeface="Calibri" pitchFamily="34" charset="-122"/>
+                          <a:cs typeface="Calibri" pitchFamily="34" charset="-120"/>
+                        </a:rPr>
+                        <a:t>What goes wrong</a:t>
+                      </a:r>
+                      <a:endParaRPr lang="en-US" sz="1400" dirty="0">
+                        <a:latin typeface="Calibri" charset="0"/>
+                        <a:ea typeface="Calibri" charset="0"/>
+                        <a:cs typeface="Calibri" charset="0"/>
+                      </a:endParaRPr>
+                    </a:p>
+                  </a:txBody>
+                  <a:tcPr marL="73152" marR="73152" marT="36576" marB="36576" anchor="ctr">
+                    <a:lnL w="9525" cap="flat" cmpd="sng" algn="ctr">
+                      <a:solidFill>
+                        <a:srgbClr val="C9CFD8"/>
+                      </a:solidFill>
+                      <a:prstDash val="solid"/>
+                      <a:round/>
+                      <a:headEnd type="none" w="med" len="med"/>
+                      <a:tailEnd type="none" w="med" len="med"/>
+                    </a:lnL>
+                    <a:lnR w="9525" cap="flat" cmpd="sng" algn="ctr">
+                      <a:solidFill>
+                        <a:srgbClr val="C9CFD8"/>
+                      </a:solidFill>
+                      <a:prstDash val="solid"/>
+                      <a:round/>
+                      <a:headEnd type="none" w="med" len="med"/>
+                      <a:tailEnd type="none" w="med" len="med"/>
+                    </a:lnR>
+                    <a:lnT w="9525" cap="flat" cmpd="sng" algn="ctr">
+                      <a:solidFill>
+                        <a:srgbClr val="C9CFD8"/>
+                      </a:solidFill>
+                      <a:prstDash val="solid"/>
+                      <a:round/>
+                      <a:headEnd type="none" w="med" len="med"/>
+                      <a:tailEnd type="none" w="med" len="med"/>
+                    </a:lnT>
+                    <a:lnB w="9525" cap="flat" cmpd="sng" algn="ctr">
+                      <a:solidFill>
+                        <a:srgbClr val="C9CFD8"/>
+                      </a:solidFill>
+                      <a:prstDash val="solid"/>
+                      <a:round/>
+                      <a:headEnd type="none" w="med" len="med"/>
+                      <a:tailEnd type="none" w="med" len="med"/>
+                    </a:lnB>
+                    <a:solidFill>
+                      <a:srgbClr val="DDE3EC"/>
+                    </a:solidFill>
+                  </a:tcPr>
+                </a:tc>
+                <a:tc>
+                  <a:txBody>
+                    <a:bodyPr/>
+                    <a:lstStyle/>
+                    <a:p>
+                      <a:pPr algn="l" indent="0" marL="0">
+                        <a:buNone/>
+                      </a:pPr>
+                      <a:r>
+                        <a:rPr lang="en-US" sz="1400" b="1" dirty="0">
+                          <a:solidFill>
+                            <a:srgbClr val="14213D"/>
+                          </a:solidFill>
+                          <a:latin typeface="Calibri" pitchFamily="34" charset="0"/>
+                          <a:ea typeface="Calibri" pitchFamily="34" charset="-122"/>
+                          <a:cs typeface="Calibri" pitchFamily="34" charset="-120"/>
+                        </a:rPr>
+                        <a:t>HomeFM remedy</a:t>
+                      </a:r>
+                      <a:endParaRPr lang="en-US" sz="1400" dirty="0">
+                        <a:latin typeface="Calibri" charset="0"/>
+                        <a:ea typeface="Calibri" charset="0"/>
+                        <a:cs typeface="Calibri" charset="0"/>
+                      </a:endParaRPr>
+                    </a:p>
+                  </a:txBody>
+                  <a:tcPr marL="73152" marR="73152" marT="36576" marB="36576" anchor="ctr">
+                    <a:lnL w="9525" cap="flat" cmpd="sng" algn="ctr">
+                      <a:solidFill>
+                        <a:srgbClr val="C9CFD8"/>
+                      </a:solidFill>
+                      <a:prstDash val="solid"/>
+                      <a:round/>
+                      <a:headEnd type="none" w="med" len="med"/>
+                      <a:tailEnd type="none" w="med" len="med"/>
+                    </a:lnL>
+                    <a:lnR w="9525" cap="flat" cmpd="sng" algn="ctr">
+                      <a:solidFill>
+                        <a:srgbClr val="C9CFD8"/>
+                      </a:solidFill>
+                      <a:prstDash val="solid"/>
+                      <a:round/>
+                      <a:headEnd type="none" w="med" len="med"/>
+                      <a:tailEnd type="none" w="med" len="med"/>
+                    </a:lnR>
+                    <a:lnT w="9525" cap="flat" cmpd="sng" algn="ctr">
+                      <a:solidFill>
+                        <a:srgbClr val="C9CFD8"/>
+                      </a:solidFill>
+                      <a:prstDash val="solid"/>
+                      <a:round/>
+                      <a:headEnd type="none" w="med" len="med"/>
+                      <a:tailEnd type="none" w="med" len="med"/>
+                    </a:lnT>
+                    <a:lnB w="9525" cap="flat" cmpd="sng" algn="ctr">
+                      <a:solidFill>
+                        <a:srgbClr val="C9CFD8"/>
+                      </a:solidFill>
+                      <a:prstDash val="solid"/>
+                      <a:round/>
+                      <a:headEnd type="none" w="med" len="med"/>
+                      <a:tailEnd type="none" w="med" len="med"/>
+                    </a:lnB>
+                    <a:solidFill>
+                      <a:srgbClr val="DDE3EC"/>
+                    </a:solidFill>
+                  </a:tcPr>
+                </a:tc>
+                <a:tc>
+                  <a:txBody>
+                    <a:bodyPr/>
+                    <a:lstStyle/>
+                    <a:p>
+                      <a:pPr algn="l" indent="0" marL="0">
+                        <a:buNone/>
+                      </a:pPr>
+                      <a:r>
+                        <a:rPr lang="en-US" sz="1400" b="1" dirty="0">
+                          <a:solidFill>
+                            <a:srgbClr val="14213D"/>
+                          </a:solidFill>
+                          <a:latin typeface="Calibri" pitchFamily="34" charset="0"/>
+                          <a:ea typeface="Calibri" pitchFamily="34" charset="-122"/>
+                          <a:cs typeface="Calibri" pitchFamily="34" charset="-120"/>
+                        </a:rPr>
+                        <a:t>Status</a:t>
+                      </a:r>
+                      <a:endParaRPr lang="en-US" sz="1400" dirty="0">
+                        <a:latin typeface="Calibri" charset="0"/>
+                        <a:ea typeface="Calibri" charset="0"/>
+                        <a:cs typeface="Calibri" charset="0"/>
+                      </a:endParaRPr>
+                    </a:p>
+                  </a:txBody>
+                  <a:tcPr marL="73152" marR="73152" marT="36576" marB="36576" anchor="ctr">
+                    <a:lnL w="9525" cap="flat" cmpd="sng" algn="ctr">
+                      <a:solidFill>
+                        <a:srgbClr val="C9CFD8"/>
+                      </a:solidFill>
+                      <a:prstDash val="solid"/>
+                      <a:round/>
+                      <a:headEnd type="none" w="med" len="med"/>
+                      <a:tailEnd type="none" w="med" len="med"/>
+                    </a:lnL>
+                    <a:lnR w="9525" cap="flat" cmpd="sng" algn="ctr">
+                      <a:solidFill>
+                        <a:srgbClr val="C9CFD8"/>
+                      </a:solidFill>
+                      <a:prstDash val="solid"/>
+                      <a:round/>
+                      <a:headEnd type="none" w="med" len="med"/>
+                      <a:tailEnd type="none" w="med" len="med"/>
+                    </a:lnR>
+                    <a:lnT w="9525" cap="flat" cmpd="sng" algn="ctr">
+                      <a:solidFill>
+                        <a:srgbClr val="C9CFD8"/>
+                      </a:solidFill>
+                      <a:prstDash val="solid"/>
+                      <a:round/>
+                      <a:headEnd type="none" w="med" len="med"/>
+                      <a:tailEnd type="none" w="med" len="med"/>
+                    </a:lnT>
+                    <a:lnB w="9525" cap="flat" cmpd="sng" algn="ctr">
+                      <a:solidFill>
+                        <a:srgbClr val="C9CFD8"/>
+                      </a:solidFill>
+                      <a:prstDash val="solid"/>
+                      <a:round/>
+                      <a:headEnd type="none" w="med" len="med"/>
+                      <a:tailEnd type="none" w="med" len="med"/>
+                    </a:lnB>
+                    <a:solidFill>
+                      <a:srgbClr val="DDE3EC"/>
+                    </a:solidFill>
+                  </a:tcPr>
+                </a:tc>
+              </a:tr>
+              <a:tr h="566928">
+                <a:tc>
+                  <a:txBody>
+                    <a:bodyPr/>
+                    <a:lstStyle/>
+                    <a:p>
+                      <a:pPr indent="0" marL="0">
+                        <a:buNone/>
+                      </a:pPr>
+                      <a:r>
+                        <a:rPr lang="en-US" sz="1400" b="1" dirty="0">
+                          <a:solidFill>
+                            <a:srgbClr val="14213D"/>
+                          </a:solidFill>
+                          <a:latin typeface="Calibri" pitchFamily="34" charset="0"/>
+                          <a:ea typeface="Calibri" pitchFamily="34" charset="-122"/>
+                          <a:cs typeface="Calibri" pitchFamily="34" charset="-120"/>
+                        </a:rPr>
+                        <a:t>L2 · On/off only</a:t>
+                      </a:r>
+                      <a:endParaRPr lang="en-US" sz="1400" dirty="0">
+                        <a:latin typeface="Calibri" charset="0"/>
+                        <a:ea typeface="Calibri" charset="0"/>
+                        <a:cs typeface="Calibri" charset="0"/>
+                      </a:endParaRPr>
+                    </a:p>
+                  </a:txBody>
+                  <a:tcPr marL="73152" marR="73152" marT="36576" marB="36576" anchor="ctr">
+                    <a:lnL w="9525" cap="flat" cmpd="sng" algn="ctr">
+                      <a:solidFill>
+                        <a:srgbClr val="C9CFD8"/>
+                      </a:solidFill>
+                      <a:prstDash val="solid"/>
+                      <a:round/>
+                      <a:headEnd type="none" w="med" len="med"/>
+                      <a:tailEnd type="none" w="med" len="med"/>
+                    </a:lnL>
+                    <a:lnR w="9525" cap="flat" cmpd="sng" algn="ctr">
+                      <a:solidFill>
+                        <a:srgbClr val="C9CFD8"/>
+                      </a:solidFill>
+                      <a:prstDash val="solid"/>
+                      <a:round/>
+                      <a:headEnd type="none" w="med" len="med"/>
+                      <a:tailEnd type="none" w="med" len="med"/>
+                    </a:lnR>
+                    <a:lnT w="9525" cap="flat" cmpd="sng" algn="ctr">
+                      <a:solidFill>
+                        <a:srgbClr val="C9CFD8"/>
+                      </a:solidFill>
+                      <a:prstDash val="solid"/>
+                      <a:round/>
+                      <a:headEnd type="none" w="med" len="med"/>
+                      <a:tailEnd type="none" w="med" len="med"/>
+                    </a:lnT>
+                    <a:lnB w="9525" cap="flat" cmpd="sng" algn="ctr">
+                      <a:solidFill>
+                        <a:srgbClr val="C9CFD8"/>
+                      </a:solidFill>
+                      <a:prstDash val="solid"/>
+                      <a:round/>
+                      <a:headEnd type="none" w="med" len="med"/>
+                      <a:tailEnd type="none" w="med" len="med"/>
+                    </a:lnB>
+                  </a:tcPr>
+                </a:tc>
+                <a:tc>
+                  <a:txBody>
+                    <a:bodyPr/>
+                    <a:lstStyle/>
+                    <a:p>
+                      <a:pPr indent="0" marL="0">
+                        <a:buNone/>
+                      </a:pPr>
+                      <a:r>
+                        <a:rPr lang="en-US" sz="1400" dirty="0">
+                          <a:solidFill>
+                            <a:srgbClr val="14213D"/>
+                          </a:solidFill>
+                          <a:latin typeface="Calibri" pitchFamily="34" charset="0"/>
+                          <a:ea typeface="Calibri" pitchFamily="34" charset="-122"/>
+                          <a:cs typeface="Calibri" pitchFamily="34" charset="-120"/>
+                        </a:rPr>
+                        <a:t>Sees "fridge ON", not "fridge draws 180 W"</a:t>
+                      </a:r>
+                      <a:endParaRPr lang="en-US" sz="1400" dirty="0">
+                        <a:latin typeface="Calibri" charset="0"/>
+                        <a:ea typeface="Calibri" charset="0"/>
+                        <a:cs typeface="Calibri" charset="0"/>
+                      </a:endParaRPr>
+                    </a:p>
+                  </a:txBody>
+                  <a:tcPr marL="73152" marR="73152" marT="36576" marB="36576" anchor="ctr">
+                    <a:lnL w="9525" cap="flat" cmpd="sng" algn="ctr">
+                      <a:solidFill>
+                        <a:srgbClr val="C9CFD8"/>
+                      </a:solidFill>
+                      <a:prstDash val="solid"/>
+                      <a:round/>
+                      <a:headEnd type="none" w="med" len="med"/>
+                      <a:tailEnd type="none" w="med" len="med"/>
+                    </a:lnL>
+                    <a:lnR w="9525" cap="flat" cmpd="sng" algn="ctr">
+                      <a:solidFill>
+                        <a:srgbClr val="C9CFD8"/>
+                      </a:solidFill>
+                      <a:prstDash val="solid"/>
+                      <a:round/>
+                      <a:headEnd type="none" w="med" len="med"/>
+                      <a:tailEnd type="none" w="med" len="med"/>
+                    </a:lnR>
+                    <a:lnT w="9525" cap="flat" cmpd="sng" algn="ctr">
+                      <a:solidFill>
+                        <a:srgbClr val="C9CFD8"/>
+                      </a:solidFill>
+                      <a:prstDash val="solid"/>
+                      <a:round/>
+                      <a:headEnd type="none" w="med" len="med"/>
+                      <a:tailEnd type="none" w="med" len="med"/>
+                    </a:lnT>
+                    <a:lnB w="9525" cap="flat" cmpd="sng" algn="ctr">
+                      <a:solidFill>
+                        <a:srgbClr val="C9CFD8"/>
+                      </a:solidFill>
+                      <a:prstDash val="solid"/>
+                      <a:round/>
+                      <a:headEnd type="none" w="med" len="med"/>
+                      <a:tailEnd type="none" w="med" len="med"/>
+                    </a:lnB>
+                  </a:tcPr>
+                </a:tc>
+                <a:tc>
+                  <a:txBody>
+                    <a:bodyPr/>
+                    <a:lstStyle/>
+                    <a:p>
+                      <a:pPr indent="0" marL="0">
+                        <a:buNone/>
+                      </a:pPr>
+                      <a:r>
+                        <a:rPr lang="en-US" sz="1400" dirty="0">
+                          <a:solidFill>
+                            <a:srgbClr val="14213D"/>
+                          </a:solidFill>
+                          <a:latin typeface="Calibri" pitchFamily="34" charset="0"/>
+                          <a:ea typeface="Calibri" pitchFamily="34" charset="-122"/>
+                          <a:cs typeface="Calibri" pitchFamily="34" charset="-120"/>
+                        </a:rPr>
+                        <a:t>Keep real numbers as input</a:t>
+                      </a:r>
+                      <a:endParaRPr lang="en-US" sz="1400" dirty="0">
+                        <a:latin typeface="Calibri" charset="0"/>
+                        <a:ea typeface="Calibri" charset="0"/>
+                        <a:cs typeface="Calibri" charset="0"/>
+                      </a:endParaRPr>
+                    </a:p>
+                  </a:txBody>
+                  <a:tcPr marL="73152" marR="73152" marT="36576" marB="36576" anchor="ctr">
+                    <a:lnL w="9525" cap="flat" cmpd="sng" algn="ctr">
+                      <a:solidFill>
+                        <a:srgbClr val="C9CFD8"/>
+                      </a:solidFill>
+                      <a:prstDash val="solid"/>
+                      <a:round/>
+                      <a:headEnd type="none" w="med" len="med"/>
+                      <a:tailEnd type="none" w="med" len="med"/>
+                    </a:lnL>
+                    <a:lnR w="9525" cap="flat" cmpd="sng" algn="ctr">
+                      <a:solidFill>
+                        <a:srgbClr val="C9CFD8"/>
+                      </a:solidFill>
+                      <a:prstDash val="solid"/>
+                      <a:round/>
+                      <a:headEnd type="none" w="med" len="med"/>
+                      <a:tailEnd type="none" w="med" len="med"/>
+                    </a:lnR>
+                    <a:lnT w="9525" cap="flat" cmpd="sng" algn="ctr">
+                      <a:solidFill>
+                        <a:srgbClr val="C9CFD8"/>
+                      </a:solidFill>
+                      <a:prstDash val="solid"/>
+                      <a:round/>
+                      <a:headEnd type="none" w="med" len="med"/>
+                      <a:tailEnd type="none" w="med" len="med"/>
+                    </a:lnT>
+                    <a:lnB w="9525" cap="flat" cmpd="sng" algn="ctr">
+                      <a:solidFill>
+                        <a:srgbClr val="C9CFD8"/>
+                      </a:solidFill>
+                      <a:prstDash val="solid"/>
+                      <a:round/>
+                      <a:headEnd type="none" w="med" len="med"/>
+                      <a:tailEnd type="none" w="med" len="med"/>
+                    </a:lnB>
+                  </a:tcPr>
+                </a:tc>
+                <a:tc>
+                  <a:txBody>
+                    <a:bodyPr/>
+                    <a:lstStyle/>
+                    <a:p>
+                      <a:pPr indent="0" marL="0">
+                        <a:buNone/>
+                      </a:pPr>
+                      <a:r>
+                        <a:rPr lang="en-US" sz="1400" dirty="0">
+                          <a:solidFill>
+                            <a:srgbClr val="5F6B7A"/>
+                          </a:solidFill>
+                          <a:latin typeface="Calibri" pitchFamily="34" charset="0"/>
+                          <a:ea typeface="Calibri" pitchFamily="34" charset="-122"/>
+                          <a:cs typeface="Calibri" pitchFamily="34" charset="-120"/>
+                        </a:rPr>
+                        <a:t>Input built; device health designed</a:t>
+                      </a:r>
+                      <a:endParaRPr lang="en-US" sz="1400" dirty="0">
+                        <a:latin typeface="Calibri" charset="0"/>
+                        <a:ea typeface="Calibri" charset="0"/>
+                        <a:cs typeface="Calibri" charset="0"/>
+                      </a:endParaRPr>
+                    </a:p>
+                  </a:txBody>
+                  <a:tcPr marL="73152" marR="73152" marT="36576" marB="36576" anchor="ctr">
+                    <a:lnL w="9525" cap="flat" cmpd="sng" algn="ctr">
+                      <a:solidFill>
+                        <a:srgbClr val="C9CFD8"/>
+                      </a:solidFill>
+                      <a:prstDash val="solid"/>
+                      <a:round/>
+                      <a:headEnd type="none" w="med" len="med"/>
+                      <a:tailEnd type="none" w="med" len="med"/>
+                    </a:lnL>
+                    <a:lnR w="9525" cap="flat" cmpd="sng" algn="ctr">
+                      <a:solidFill>
+                        <a:srgbClr val="C9CFD8"/>
+                      </a:solidFill>
+                      <a:prstDash val="solid"/>
+                      <a:round/>
+                      <a:headEnd type="none" w="med" len="med"/>
+                      <a:tailEnd type="none" w="med" len="med"/>
+                    </a:lnR>
+                    <a:lnT w="9525" cap="flat" cmpd="sng" algn="ctr">
+                      <a:solidFill>
+                        <a:srgbClr val="C9CFD8"/>
+                      </a:solidFill>
+                      <a:prstDash val="solid"/>
+                      <a:round/>
+                      <a:headEnd type="none" w="med" len="med"/>
+                      <a:tailEnd type="none" w="med" len="med"/>
+                    </a:lnT>
+                    <a:lnB w="9525" cap="flat" cmpd="sng" algn="ctr">
+                      <a:solidFill>
+                        <a:srgbClr val="C9CFD8"/>
+                      </a:solidFill>
+                      <a:prstDash val="solid"/>
+                      <a:round/>
+                      <a:headEnd type="none" w="med" len="med"/>
+                      <a:tailEnd type="none" w="med" len="med"/>
+                    </a:lnB>
+                  </a:tcPr>
+                </a:tc>
+              </a:tr>
+              <a:tr h="566928">
+                <a:tc>
+                  <a:txBody>
+                    <a:bodyPr/>
+                    <a:lstStyle/>
+                    <a:p>
+                      <a:pPr indent="0" marL="0">
+                        <a:buNone/>
+                      </a:pPr>
+                      <a:r>
+                        <a:rPr lang="en-US" sz="1400" b="1" dirty="0">
+                          <a:solidFill>
+                            <a:srgbClr val="14213D"/>
+                          </a:solidFill>
+                          <a:latin typeface="Calibri" pitchFamily="34" charset="0"/>
+                          <a:ea typeface="Calibri" pitchFamily="34" charset="-122"/>
+                          <a:cs typeface="Calibri" pitchFamily="34" charset="-120"/>
+                        </a:rPr>
+                        <a:t>L3 · 30-event window</a:t>
+                      </a:r>
+                      <a:endParaRPr lang="en-US" sz="1400" dirty="0">
+                        <a:latin typeface="Calibri" charset="0"/>
+                        <a:ea typeface="Calibri" charset="0"/>
+                        <a:cs typeface="Calibri" charset="0"/>
+                      </a:endParaRPr>
+                    </a:p>
+                  </a:txBody>
+                  <a:tcPr marL="73152" marR="73152" marT="36576" marB="36576" anchor="ctr">
+                    <a:lnL w="9525" cap="flat" cmpd="sng" algn="ctr">
+                      <a:solidFill>
+                        <a:srgbClr val="C9CFD8"/>
+                      </a:solidFill>
+                      <a:prstDash val="solid"/>
+                      <a:round/>
+                      <a:headEnd type="none" w="med" len="med"/>
+                      <a:tailEnd type="none" w="med" len="med"/>
+                    </a:lnL>
+                    <a:lnR w="9525" cap="flat" cmpd="sng" algn="ctr">
+                      <a:solidFill>
+                        <a:srgbClr val="C9CFD8"/>
+                      </a:solidFill>
+                      <a:prstDash val="solid"/>
+                      <a:round/>
+                      <a:headEnd type="none" w="med" len="med"/>
+                      <a:tailEnd type="none" w="med" len="med"/>
+                    </a:lnR>
+                    <a:lnT w="9525" cap="flat" cmpd="sng" algn="ctr">
+                      <a:solidFill>
+                        <a:srgbClr val="C9CFD8"/>
+                      </a:solidFill>
+                      <a:prstDash val="solid"/>
+                      <a:round/>
+                      <a:headEnd type="none" w="med" len="med"/>
+                      <a:tailEnd type="none" w="med" len="med"/>
+                    </a:lnT>
+                    <a:lnB w="9525" cap="flat" cmpd="sng" algn="ctr">
+                      <a:solidFill>
+                        <a:srgbClr val="C9CFD8"/>
+                      </a:solidFill>
+                      <a:prstDash val="solid"/>
+                      <a:round/>
+                      <a:headEnd type="none" w="med" len="med"/>
+                      <a:tailEnd type="none" w="med" len="med"/>
+                    </a:lnB>
+                  </a:tcPr>
+                </a:tc>
+                <a:tc>
+                  <a:txBody>
+                    <a:bodyPr/>
+                    <a:lstStyle/>
+                    <a:p>
+                      <a:pPr indent="0" marL="0">
+                        <a:buNone/>
+                      </a:pPr>
+                      <a:r>
+                        <a:rPr lang="en-US" sz="1400" dirty="0">
+                          <a:solidFill>
+                            <a:srgbClr val="14213D"/>
+                          </a:solidFill>
+                          <a:latin typeface="Calibri" pitchFamily="34" charset="0"/>
+                          <a:ea typeface="Calibri" pitchFamily="34" charset="-122"/>
+                          <a:cs typeface="Calibri" pitchFamily="34" charset="-120"/>
+                        </a:rPr>
+                        <a:t>Memory is sometimes 2 minutes, sometimes 6 hours, never weeks</a:t>
+                      </a:r>
+                      <a:endParaRPr lang="en-US" sz="1400" dirty="0">
+                        <a:latin typeface="Calibri" charset="0"/>
+                        <a:ea typeface="Calibri" charset="0"/>
+                        <a:cs typeface="Calibri" charset="0"/>
+                      </a:endParaRPr>
+                    </a:p>
+                  </a:txBody>
+                  <a:tcPr marL="73152" marR="73152" marT="36576" marB="36576" anchor="ctr">
+                    <a:lnL w="9525" cap="flat" cmpd="sng" algn="ctr">
+                      <a:solidFill>
+                        <a:srgbClr val="C9CFD8"/>
+                      </a:solidFill>
+                      <a:prstDash val="solid"/>
+                      <a:round/>
+                      <a:headEnd type="none" w="med" len="med"/>
+                      <a:tailEnd type="none" w="med" len="med"/>
+                    </a:lnL>
+                    <a:lnR w="9525" cap="flat" cmpd="sng" algn="ctr">
+                      <a:solidFill>
+                        <a:srgbClr val="C9CFD8"/>
+                      </a:solidFill>
+                      <a:prstDash val="solid"/>
+                      <a:round/>
+                      <a:headEnd type="none" w="med" len="med"/>
+                      <a:tailEnd type="none" w="med" len="med"/>
+                    </a:lnR>
+                    <a:lnT w="9525" cap="flat" cmpd="sng" algn="ctr">
+                      <a:solidFill>
+                        <a:srgbClr val="C9CFD8"/>
+                      </a:solidFill>
+                      <a:prstDash val="solid"/>
+                      <a:round/>
+                      <a:headEnd type="none" w="med" len="med"/>
+                      <a:tailEnd type="none" w="med" len="med"/>
+                    </a:lnT>
+                    <a:lnB w="9525" cap="flat" cmpd="sng" algn="ctr">
+                      <a:solidFill>
+                        <a:srgbClr val="C9CFD8"/>
+                      </a:solidFill>
+                      <a:prstDash val="solid"/>
+                      <a:round/>
+                      <a:headEnd type="none" w="med" len="med"/>
+                      <a:tailEnd type="none" w="med" len="med"/>
+                    </a:lnB>
+                  </a:tcPr>
+                </a:tc>
+                <a:tc>
+                  <a:txBody>
+                    <a:bodyPr/>
+                    <a:lstStyle/>
+                    <a:p>
+                      <a:pPr indent="0" marL="0">
+                        <a:buNone/>
+                      </a:pPr>
+                      <a:r>
+                        <a:rPr lang="en-US" sz="1400" dirty="0">
+                          <a:solidFill>
+                            <a:srgbClr val="14213D"/>
+                          </a:solidFill>
+                          <a:latin typeface="Calibri" pitchFamily="34" charset="0"/>
+                          <a:ea typeface="Calibri" pitchFamily="34" charset="-122"/>
+                          <a:cs typeface="Calibri" pitchFamily="34" charset="-120"/>
+                        </a:rPr>
+                        <a:t>1-minute steps, hours of context, daily summaries</a:t>
+                      </a:r>
+                      <a:endParaRPr lang="en-US" sz="1400" dirty="0">
+                        <a:latin typeface="Calibri" charset="0"/>
+                        <a:ea typeface="Calibri" charset="0"/>
+                        <a:cs typeface="Calibri" charset="0"/>
+                      </a:endParaRPr>
+                    </a:p>
+                  </a:txBody>
+                  <a:tcPr marL="73152" marR="73152" marT="36576" marB="36576" anchor="ctr">
+                    <a:lnL w="9525" cap="flat" cmpd="sng" algn="ctr">
+                      <a:solidFill>
+                        <a:srgbClr val="C9CFD8"/>
+                      </a:solidFill>
+                      <a:prstDash val="solid"/>
+                      <a:round/>
+                      <a:headEnd type="none" w="med" len="med"/>
+                      <a:tailEnd type="none" w="med" len="med"/>
+                    </a:lnL>
+                    <a:lnR w="9525" cap="flat" cmpd="sng" algn="ctr">
+                      <a:solidFill>
+                        <a:srgbClr val="C9CFD8"/>
+                      </a:solidFill>
+                      <a:prstDash val="solid"/>
+                      <a:round/>
+                      <a:headEnd type="none" w="med" len="med"/>
+                      <a:tailEnd type="none" w="med" len="med"/>
+                    </a:lnR>
+                    <a:lnT w="9525" cap="flat" cmpd="sng" algn="ctr">
+                      <a:solidFill>
+                        <a:srgbClr val="C9CFD8"/>
+                      </a:solidFill>
+                      <a:prstDash val="solid"/>
+                      <a:round/>
+                      <a:headEnd type="none" w="med" len="med"/>
+                      <a:tailEnd type="none" w="med" len="med"/>
+                    </a:lnT>
+                    <a:lnB w="9525" cap="flat" cmpd="sng" algn="ctr">
+                      <a:solidFill>
+                        <a:srgbClr val="C9CFD8"/>
+                      </a:solidFill>
+                      <a:prstDash val="solid"/>
+                      <a:round/>
+                      <a:headEnd type="none" w="med" len="med"/>
+                      <a:tailEnd type="none" w="med" len="med"/>
+                    </a:lnB>
+                  </a:tcPr>
+                </a:tc>
+                <a:tc>
+                  <a:txBody>
+                    <a:bodyPr/>
+                    <a:lstStyle/>
+                    <a:p>
+                      <a:pPr indent="0" marL="0">
+                        <a:buNone/>
+                      </a:pPr>
+                      <a:r>
+                        <a:rPr lang="en-US" sz="1400" dirty="0">
+                          <a:solidFill>
+                            <a:srgbClr val="5F6B7A"/>
+                          </a:solidFill>
+                          <a:latin typeface="Calibri" pitchFamily="34" charset="0"/>
+                          <a:ea typeface="Calibri" pitchFamily="34" charset="-122"/>
+                          <a:cs typeface="Calibri" pitchFamily="34" charset="-120"/>
+                        </a:rPr>
+                        <a:t>Minutes built; days designed</a:t>
+                      </a:r>
+                      <a:endParaRPr lang="en-US" sz="1400" dirty="0">
+                        <a:latin typeface="Calibri" charset="0"/>
+                        <a:ea typeface="Calibri" charset="0"/>
+                        <a:cs typeface="Calibri" charset="0"/>
+                      </a:endParaRPr>
+                    </a:p>
+                  </a:txBody>
+                  <a:tcPr marL="73152" marR="73152" marT="36576" marB="36576" anchor="ctr">
+                    <a:lnL w="9525" cap="flat" cmpd="sng" algn="ctr">
+                      <a:solidFill>
+                        <a:srgbClr val="C9CFD8"/>
+                      </a:solidFill>
+                      <a:prstDash val="solid"/>
+                      <a:round/>
+                      <a:headEnd type="none" w="med" len="med"/>
+                      <a:tailEnd type="none" w="med" len="med"/>
+                    </a:lnL>
+                    <a:lnR w="9525" cap="flat" cmpd="sng" algn="ctr">
+                      <a:solidFill>
+                        <a:srgbClr val="C9CFD8"/>
+                      </a:solidFill>
+                      <a:prstDash val="solid"/>
+                      <a:round/>
+                      <a:headEnd type="none" w="med" len="med"/>
+                      <a:tailEnd type="none" w="med" len="med"/>
+                    </a:lnR>
+                    <a:lnT w="9525" cap="flat" cmpd="sng" algn="ctr">
+                      <a:solidFill>
+                        <a:srgbClr val="C9CFD8"/>
+                      </a:solidFill>
+                      <a:prstDash val="solid"/>
+                      <a:round/>
+                      <a:headEnd type="none" w="med" len="med"/>
+                      <a:tailEnd type="none" w="med" len="med"/>
+                    </a:lnT>
+                    <a:lnB w="9525" cap="flat" cmpd="sng" algn="ctr">
+                      <a:solidFill>
+                        <a:srgbClr val="C9CFD8"/>
+                      </a:solidFill>
+                      <a:prstDash val="solid"/>
+                      <a:round/>
+                      <a:headEnd type="none" w="med" len="med"/>
+                      <a:tailEnd type="none" w="med" len="med"/>
+                    </a:lnB>
+                  </a:tcPr>
+                </a:tc>
+              </a:tr>
+              <a:tr h="566928">
+                <a:tc>
+                  <a:txBody>
+                    <a:bodyPr/>
+                    <a:lstStyle/>
+                    <a:p>
+                      <a:pPr indent="0" marL="0">
+                        <a:buNone/>
+                      </a:pPr>
+                      <a:r>
+                        <a:rPr lang="en-US" sz="1400" b="1" dirty="0">
+                          <a:solidFill>
+                            <a:srgbClr val="14213D"/>
+                          </a:solidFill>
+                          <a:latin typeface="Calibri" pitchFamily="34" charset="0"/>
+                          <a:ea typeface="Calibri" pitchFamily="34" charset="-122"/>
+                          <a:cs typeface="Calibri" pitchFamily="34" charset="-120"/>
+                        </a:rPr>
+                        <a:t>L4 · One person assumed</a:t>
+                      </a:r>
+                      <a:endParaRPr lang="en-US" sz="1400" dirty="0">
+                        <a:latin typeface="Calibri" charset="0"/>
+                        <a:ea typeface="Calibri" charset="0"/>
+                        <a:cs typeface="Calibri" charset="0"/>
+                      </a:endParaRPr>
+                    </a:p>
+                  </a:txBody>
+                  <a:tcPr marL="73152" marR="73152" marT="36576" marB="36576" anchor="ctr">
+                    <a:lnL w="9525" cap="flat" cmpd="sng" algn="ctr">
+                      <a:solidFill>
+                        <a:srgbClr val="C9CFD8"/>
+                      </a:solidFill>
+                      <a:prstDash val="solid"/>
+                      <a:round/>
+                      <a:headEnd type="none" w="med" len="med"/>
+                      <a:tailEnd type="none" w="med" len="med"/>
+                    </a:lnL>
+                    <a:lnR w="9525" cap="flat" cmpd="sng" algn="ctr">
+                      <a:solidFill>
+                        <a:srgbClr val="C9CFD8"/>
+                      </a:solidFill>
+                      <a:prstDash val="solid"/>
+                      <a:round/>
+                      <a:headEnd type="none" w="med" len="med"/>
+                      <a:tailEnd type="none" w="med" len="med"/>
+                    </a:lnR>
+                    <a:lnT w="9525" cap="flat" cmpd="sng" algn="ctr">
+                      <a:solidFill>
+                        <a:srgbClr val="C9CFD8"/>
+                      </a:solidFill>
+                      <a:prstDash val="solid"/>
+                      <a:round/>
+                      <a:headEnd type="none" w="med" len="med"/>
+                      <a:tailEnd type="none" w="med" len="med"/>
+                    </a:lnT>
+                    <a:lnB w="9525" cap="flat" cmpd="sng" algn="ctr">
+                      <a:solidFill>
+                        <a:srgbClr val="C9CFD8"/>
+                      </a:solidFill>
+                      <a:prstDash val="solid"/>
+                      <a:round/>
+                      <a:headEnd type="none" w="med" len="med"/>
+                      <a:tailEnd type="none" w="med" len="med"/>
+                    </a:lnB>
+                  </a:tcPr>
+                </a:tc>
+                <a:tc>
+                  <a:txBody>
+                    <a:bodyPr/>
+                    <a:lstStyle/>
+                    <a:p>
+                      <a:pPr indent="0" marL="0">
+                        <a:buNone/>
+                      </a:pPr>
+                      <a:r>
+                        <a:rPr lang="en-US" sz="1400" dirty="0">
+                          <a:solidFill>
+                            <a:srgbClr val="14213D"/>
+                          </a:solidFill>
+                          <a:latin typeface="Calibri" pitchFamily="34" charset="0"/>
+                          <a:ea typeface="Calibri" pitchFamily="34" charset="-122"/>
+                          <a:cs typeface="Calibri" pitchFamily="34" charset="-120"/>
+                        </a:rPr>
+                        <a:t>Cannot tell people apart or count them</a:t>
+                      </a:r>
+                      <a:endParaRPr lang="en-US" sz="1400" dirty="0">
+                        <a:latin typeface="Calibri" charset="0"/>
+                        <a:ea typeface="Calibri" charset="0"/>
+                        <a:cs typeface="Calibri" charset="0"/>
+                      </a:endParaRPr>
+                    </a:p>
+                  </a:txBody>
+                  <a:tcPr marL="73152" marR="73152" marT="36576" marB="36576" anchor="ctr">
+                    <a:lnL w="9525" cap="flat" cmpd="sng" algn="ctr">
+                      <a:solidFill>
+                        <a:srgbClr val="C9CFD8"/>
+                      </a:solidFill>
+                      <a:prstDash val="solid"/>
+                      <a:round/>
+                      <a:headEnd type="none" w="med" len="med"/>
+                      <a:tailEnd type="none" w="med" len="med"/>
+                    </a:lnL>
+                    <a:lnR w="9525" cap="flat" cmpd="sng" algn="ctr">
+                      <a:solidFill>
+                        <a:srgbClr val="C9CFD8"/>
+                      </a:solidFill>
+                      <a:prstDash val="solid"/>
+                      <a:round/>
+                      <a:headEnd type="none" w="med" len="med"/>
+                      <a:tailEnd type="none" w="med" len="med"/>
+                    </a:lnR>
+                    <a:lnT w="9525" cap="flat" cmpd="sng" algn="ctr">
+                      <a:solidFill>
+                        <a:srgbClr val="C9CFD8"/>
+                      </a:solidFill>
+                      <a:prstDash val="solid"/>
+                      <a:round/>
+                      <a:headEnd type="none" w="med" len="med"/>
+                      <a:tailEnd type="none" w="med" len="med"/>
+                    </a:lnT>
+                    <a:lnB w="9525" cap="flat" cmpd="sng" algn="ctr">
+                      <a:solidFill>
+                        <a:srgbClr val="C9CFD8"/>
+                      </a:solidFill>
+                      <a:prstDash val="solid"/>
+                      <a:round/>
+                      <a:headEnd type="none" w="med" len="med"/>
+                      <a:tailEnd type="none" w="med" len="med"/>
+                    </a:lnB>
+                  </a:tcPr>
+                </a:tc>
+                <a:tc>
+                  <a:txBody>
+                    <a:bodyPr/>
+                    <a:lstStyle/>
+                    <a:p>
+                      <a:pPr indent="0" marL="0">
+                        <a:buNone/>
+                      </a:pPr>
+                      <a:r>
+                        <a:rPr lang="en-US" sz="1400" dirty="0">
+                          <a:solidFill>
+                            <a:srgbClr val="14213D"/>
+                          </a:solidFill>
+                          <a:latin typeface="Calibri" pitchFamily="34" charset="0"/>
+                          <a:ea typeface="Calibri" pitchFamily="34" charset="-122"/>
+                          <a:cs typeface="Calibri" pitchFamily="34" charset="-120"/>
+                        </a:rPr>
+                        <a:t>Person cards, identity clues, per-room counts</a:t>
+                      </a:r>
+                      <a:endParaRPr lang="en-US" sz="1400" dirty="0">
+                        <a:latin typeface="Calibri" charset="0"/>
+                        <a:ea typeface="Calibri" charset="0"/>
+                        <a:cs typeface="Calibri" charset="0"/>
+                      </a:endParaRPr>
+                    </a:p>
+                  </a:txBody>
+                  <a:tcPr marL="73152" marR="73152" marT="36576" marB="36576" anchor="ctr">
+                    <a:lnL w="9525" cap="flat" cmpd="sng" algn="ctr">
+                      <a:solidFill>
+                        <a:srgbClr val="C9CFD8"/>
+                      </a:solidFill>
+                      <a:prstDash val="solid"/>
+                      <a:round/>
+                      <a:headEnd type="none" w="med" len="med"/>
+                      <a:tailEnd type="none" w="med" len="med"/>
+                    </a:lnL>
+                    <a:lnR w="9525" cap="flat" cmpd="sng" algn="ctr">
+                      <a:solidFill>
+                        <a:srgbClr val="C9CFD8"/>
+                      </a:solidFill>
+                      <a:prstDash val="solid"/>
+                      <a:round/>
+                      <a:headEnd type="none" w="med" len="med"/>
+                      <a:tailEnd type="none" w="med" len="med"/>
+                    </a:lnR>
+                    <a:lnT w="9525" cap="flat" cmpd="sng" algn="ctr">
+                      <a:solidFill>
+                        <a:srgbClr val="C9CFD8"/>
+                      </a:solidFill>
+                      <a:prstDash val="solid"/>
+                      <a:round/>
+                      <a:headEnd type="none" w="med" len="med"/>
+                      <a:tailEnd type="none" w="med" len="med"/>
+                    </a:lnT>
+                    <a:lnB w="9525" cap="flat" cmpd="sng" algn="ctr">
+                      <a:solidFill>
+                        <a:srgbClr val="C9CFD8"/>
+                      </a:solidFill>
+                      <a:prstDash val="solid"/>
+                      <a:round/>
+                      <a:headEnd type="none" w="med" len="med"/>
+                      <a:tailEnd type="none" w="med" len="med"/>
+                    </a:lnB>
+                  </a:tcPr>
+                </a:tc>
+                <a:tc>
+                  <a:txBody>
+                    <a:bodyPr/>
+                    <a:lstStyle/>
+                    <a:p>
+                      <a:pPr indent="0" marL="0">
+                        <a:buNone/>
+                      </a:pPr>
+                      <a:r>
+                        <a:rPr lang="en-US" sz="1400" dirty="0">
+                          <a:solidFill>
+                            <a:srgbClr val="5F6B7A"/>
+                          </a:solidFill>
+                          <a:latin typeface="Calibri" pitchFamily="34" charset="0"/>
+                          <a:ea typeface="Calibri" pitchFamily="34" charset="-122"/>
+                          <a:cs typeface="Calibri" pitchFamily="34" charset="-120"/>
+                        </a:rPr>
+                        <a:t>Designed</a:t>
+                      </a:r>
+                      <a:endParaRPr lang="en-US" sz="1400" dirty="0">
+                        <a:latin typeface="Calibri" charset="0"/>
+                        <a:ea typeface="Calibri" charset="0"/>
+                        <a:cs typeface="Calibri" charset="0"/>
+                      </a:endParaRPr>
+                    </a:p>
+                  </a:txBody>
+                  <a:tcPr marL="73152" marR="73152" marT="36576" marB="36576" anchor="ctr">
+                    <a:lnL w="9525" cap="flat" cmpd="sng" algn="ctr">
+                      <a:solidFill>
+                        <a:srgbClr val="C9CFD8"/>
+                      </a:solidFill>
+                      <a:prstDash val="solid"/>
+                      <a:round/>
+                      <a:headEnd type="none" w="med" len="med"/>
+                      <a:tailEnd type="none" w="med" len="med"/>
+                    </a:lnL>
+                    <a:lnR w="9525" cap="flat" cmpd="sng" algn="ctr">
+                      <a:solidFill>
+                        <a:srgbClr val="C9CFD8"/>
+                      </a:solidFill>
+                      <a:prstDash val="solid"/>
+                      <a:round/>
+                      <a:headEnd type="none" w="med" len="med"/>
+                      <a:tailEnd type="none" w="med" len="med"/>
+                    </a:lnR>
+                    <a:lnT w="9525" cap="flat" cmpd="sng" algn="ctr">
+                      <a:solidFill>
+                        <a:srgbClr val="C9CFD8"/>
+                      </a:solidFill>
+                      <a:prstDash val="solid"/>
+                      <a:round/>
+                      <a:headEnd type="none" w="med" len="med"/>
+                      <a:tailEnd type="none" w="med" len="med"/>
+                    </a:lnT>
+                    <a:lnB w="9525" cap="flat" cmpd="sng" algn="ctr">
+                      <a:solidFill>
+                        <a:srgbClr val="C9CFD8"/>
+                      </a:solidFill>
+                      <a:prstDash val="solid"/>
+                      <a:round/>
+                      <a:headEnd type="none" w="med" len="med"/>
+                      <a:tailEnd type="none" w="med" len="med"/>
+                    </a:lnB>
+                  </a:tcPr>
+                </a:tc>
+              </a:tr>
+              <a:tr h="566928">
+                <a:tc>
+                  <a:txBody>
+                    <a:bodyPr/>
+                    <a:lstStyle/>
+                    <a:p>
+                      <a:pPr indent="0" marL="0">
+                        <a:buNone/>
+                      </a:pPr>
+                      <a:r>
+                        <a:rPr lang="en-US" sz="1400" b="1" dirty="0">
+                          <a:solidFill>
+                            <a:srgbClr val="14213D"/>
+                          </a:solidFill>
+                          <a:latin typeface="Calibri" pitchFamily="34" charset="0"/>
+                          <a:ea typeface="Calibri" pitchFamily="34" charset="-122"/>
+                          <a:cs typeface="Calibri" pitchFamily="34" charset="-120"/>
+                        </a:rPr>
+                        <a:t>L9 · No sound or camera</a:t>
+                      </a:r>
+                      <a:endParaRPr lang="en-US" sz="1400" dirty="0">
+                        <a:latin typeface="Calibri" charset="0"/>
+                        <a:ea typeface="Calibri" charset="0"/>
+                        <a:cs typeface="Calibri" charset="0"/>
+                      </a:endParaRPr>
+                    </a:p>
+                  </a:txBody>
+                  <a:tcPr marL="73152" marR="73152" marT="36576" marB="36576" anchor="ctr">
+                    <a:lnL w="9525" cap="flat" cmpd="sng" algn="ctr">
+                      <a:solidFill>
+                        <a:srgbClr val="C9CFD8"/>
+                      </a:solidFill>
+                      <a:prstDash val="solid"/>
+                      <a:round/>
+                      <a:headEnd type="none" w="med" len="med"/>
+                      <a:tailEnd type="none" w="med" len="med"/>
+                    </a:lnL>
+                    <a:lnR w="9525" cap="flat" cmpd="sng" algn="ctr">
+                      <a:solidFill>
+                        <a:srgbClr val="C9CFD8"/>
+                      </a:solidFill>
+                      <a:prstDash val="solid"/>
+                      <a:round/>
+                      <a:headEnd type="none" w="med" len="med"/>
+                      <a:tailEnd type="none" w="med" len="med"/>
+                    </a:lnR>
+                    <a:lnT w="9525" cap="flat" cmpd="sng" algn="ctr">
+                      <a:solidFill>
+                        <a:srgbClr val="C9CFD8"/>
+                      </a:solidFill>
+                      <a:prstDash val="solid"/>
+                      <a:round/>
+                      <a:headEnd type="none" w="med" len="med"/>
+                      <a:tailEnd type="none" w="med" len="med"/>
+                    </a:lnT>
+                    <a:lnB w="9525" cap="flat" cmpd="sng" algn="ctr">
+                      <a:solidFill>
+                        <a:srgbClr val="C9CFD8"/>
+                      </a:solidFill>
+                      <a:prstDash val="solid"/>
+                      <a:round/>
+                      <a:headEnd type="none" w="med" len="med"/>
+                      <a:tailEnd type="none" w="med" len="med"/>
+                    </a:lnB>
+                  </a:tcPr>
+                </a:tc>
+                <a:tc>
+                  <a:txBody>
+                    <a:bodyPr/>
+                    <a:lstStyle/>
+                    <a:p>
+                      <a:pPr indent="0" marL="0">
+                        <a:buNone/>
+                      </a:pPr>
+                      <a:r>
+                        <a:rPr lang="en-US" sz="1400" dirty="0">
+                          <a:solidFill>
+                            <a:srgbClr val="14213D"/>
+                          </a:solidFill>
+                          <a:latin typeface="Calibri" pitchFamily="34" charset="0"/>
+                          <a:ea typeface="Calibri" pitchFamily="34" charset="-122"/>
+                          <a:cs typeface="Calibri" pitchFamily="34" charset="-120"/>
+                        </a:rPr>
+                        <a:t>Cannot hear a baby cry or see a parcel</a:t>
+                      </a:r>
+                      <a:endParaRPr lang="en-US" sz="1400" dirty="0">
+                        <a:latin typeface="Calibri" charset="0"/>
+                        <a:ea typeface="Calibri" charset="0"/>
+                        <a:cs typeface="Calibri" charset="0"/>
+                      </a:endParaRPr>
+                    </a:p>
+                  </a:txBody>
+                  <a:tcPr marL="73152" marR="73152" marT="36576" marB="36576" anchor="ctr">
+                    <a:lnL w="9525" cap="flat" cmpd="sng" algn="ctr">
+                      <a:solidFill>
+                        <a:srgbClr val="C9CFD8"/>
+                      </a:solidFill>
+                      <a:prstDash val="solid"/>
+                      <a:round/>
+                      <a:headEnd type="none" w="med" len="med"/>
+                      <a:tailEnd type="none" w="med" len="med"/>
+                    </a:lnL>
+                    <a:lnR w="9525" cap="flat" cmpd="sng" algn="ctr">
+                      <a:solidFill>
+                        <a:srgbClr val="C9CFD8"/>
+                      </a:solidFill>
+                      <a:prstDash val="solid"/>
+                      <a:round/>
+                      <a:headEnd type="none" w="med" len="med"/>
+                      <a:tailEnd type="none" w="med" len="med"/>
+                    </a:lnR>
+                    <a:lnT w="9525" cap="flat" cmpd="sng" algn="ctr">
+                      <a:solidFill>
+                        <a:srgbClr val="C9CFD8"/>
+                      </a:solidFill>
+                      <a:prstDash val="solid"/>
+                      <a:round/>
+                      <a:headEnd type="none" w="med" len="med"/>
+                      <a:tailEnd type="none" w="med" len="med"/>
+                    </a:lnT>
+                    <a:lnB w="9525" cap="flat" cmpd="sng" algn="ctr">
+                      <a:solidFill>
+                        <a:srgbClr val="C9CFD8"/>
+                      </a:solidFill>
+                      <a:prstDash val="solid"/>
+                      <a:round/>
+                      <a:headEnd type="none" w="med" len="med"/>
+                      <a:tailEnd type="none" w="med" len="med"/>
+                    </a:lnB>
+                  </a:tcPr>
+                </a:tc>
+                <a:tc>
+                  <a:txBody>
+                    <a:bodyPr/>
+                    <a:lstStyle/>
+                    <a:p>
+                      <a:pPr indent="0" marL="0">
+                        <a:buNone/>
+                      </a:pPr>
+                      <a:r>
+                        <a:rPr lang="en-US" sz="1400" dirty="0">
+                          <a:solidFill>
+                            <a:srgbClr val="14213D"/>
+                          </a:solidFill>
+                          <a:latin typeface="Calibri" pitchFamily="34" charset="0"/>
+                          <a:ea typeface="Calibri" pitchFamily="34" charset="-122"/>
+                          <a:cs typeface="Calibri" pitchFamily="34" charset="-120"/>
+                        </a:rPr>
+                        <a:t>On-hub sound and camera detectors send short tags</a:t>
+                      </a:r>
+                      <a:endParaRPr lang="en-US" sz="1400" dirty="0">
+                        <a:latin typeface="Calibri" charset="0"/>
+                        <a:ea typeface="Calibri" charset="0"/>
+                        <a:cs typeface="Calibri" charset="0"/>
+                      </a:endParaRPr>
+                    </a:p>
+                  </a:txBody>
+                  <a:tcPr marL="73152" marR="73152" marT="36576" marB="36576" anchor="ctr">
+                    <a:lnL w="9525" cap="flat" cmpd="sng" algn="ctr">
+                      <a:solidFill>
+                        <a:srgbClr val="C9CFD8"/>
+                      </a:solidFill>
+                      <a:prstDash val="solid"/>
+                      <a:round/>
+                      <a:headEnd type="none" w="med" len="med"/>
+                      <a:tailEnd type="none" w="med" len="med"/>
+                    </a:lnL>
+                    <a:lnR w="9525" cap="flat" cmpd="sng" algn="ctr">
+                      <a:solidFill>
+                        <a:srgbClr val="C9CFD8"/>
+                      </a:solidFill>
+                      <a:prstDash val="solid"/>
+                      <a:round/>
+                      <a:headEnd type="none" w="med" len="med"/>
+                      <a:tailEnd type="none" w="med" len="med"/>
+                    </a:lnR>
+                    <a:lnT w="9525" cap="flat" cmpd="sng" algn="ctr">
+                      <a:solidFill>
+                        <a:srgbClr val="C9CFD8"/>
+                      </a:solidFill>
+                      <a:prstDash val="solid"/>
+                      <a:round/>
+                      <a:headEnd type="none" w="med" len="med"/>
+                      <a:tailEnd type="none" w="med" len="med"/>
+                    </a:lnT>
+                    <a:lnB w="9525" cap="flat" cmpd="sng" algn="ctr">
+                      <a:solidFill>
+                        <a:srgbClr val="C9CFD8"/>
+                      </a:solidFill>
+                      <a:prstDash val="solid"/>
+                      <a:round/>
+                      <a:headEnd type="none" w="med" len="med"/>
+                      <a:tailEnd type="none" w="med" len="med"/>
+                    </a:lnB>
+                  </a:tcPr>
+                </a:tc>
+                <a:tc>
+                  <a:txBody>
+                    <a:bodyPr/>
+                    <a:lstStyle/>
+                    <a:p>
+                      <a:pPr indent="0" marL="0">
+                        <a:buNone/>
+                      </a:pPr>
+                      <a:r>
+                        <a:rPr lang="en-US" sz="1400" dirty="0">
+                          <a:solidFill>
+                            <a:srgbClr val="5F6B7A"/>
+                          </a:solidFill>
+                          <a:latin typeface="Calibri" pitchFamily="34" charset="0"/>
+                          <a:ea typeface="Calibri" pitchFamily="34" charset="-122"/>
+                          <a:cs typeface="Calibri" pitchFamily="34" charset="-120"/>
+                        </a:rPr>
+                        <a:t>Designed; event format built</a:t>
+                      </a:r>
+                      <a:endParaRPr lang="en-US" sz="1400" dirty="0">
+                        <a:latin typeface="Calibri" charset="0"/>
+                        <a:ea typeface="Calibri" charset="0"/>
+                        <a:cs typeface="Calibri" charset="0"/>
+                      </a:endParaRPr>
+                    </a:p>
+                  </a:txBody>
+                  <a:tcPr marL="73152" marR="73152" marT="36576" marB="36576" anchor="ctr">
+                    <a:lnL w="9525" cap="flat" cmpd="sng" algn="ctr">
+                      <a:solidFill>
+                        <a:srgbClr val="C9CFD8"/>
+                      </a:solidFill>
+                      <a:prstDash val="solid"/>
+                      <a:round/>
+                      <a:headEnd type="none" w="med" len="med"/>
+                      <a:tailEnd type="none" w="med" len="med"/>
+                    </a:lnL>
+                    <a:lnR w="9525" cap="flat" cmpd="sng" algn="ctr">
+                      <a:solidFill>
+                        <a:srgbClr val="C9CFD8"/>
+                      </a:solidFill>
+                      <a:prstDash val="solid"/>
+                      <a:round/>
+                      <a:headEnd type="none" w="med" len="med"/>
+                      <a:tailEnd type="none" w="med" len="med"/>
+                    </a:lnR>
+                    <a:lnT w="9525" cap="flat" cmpd="sng" algn="ctr">
+                      <a:solidFill>
+                        <a:srgbClr val="C9CFD8"/>
+                      </a:solidFill>
+                      <a:prstDash val="solid"/>
+                      <a:round/>
+                      <a:headEnd type="none" w="med" len="med"/>
+                      <a:tailEnd type="none" w="med" len="med"/>
+                    </a:lnT>
+                    <a:lnB w="9525" cap="flat" cmpd="sng" algn="ctr">
+                      <a:solidFill>
+                        <a:srgbClr val="C9CFD8"/>
+                      </a:solidFill>
+                      <a:prstDash val="solid"/>
+                      <a:round/>
+                      <a:headEnd type="none" w="med" len="med"/>
+                      <a:tailEnd type="none" w="med" len="med"/>
+                    </a:lnB>
+                  </a:tcPr>
+                </a:tc>
+              </a:tr>
+            </a:tbl>
+          </a:graphicData>
+        </a:graphic>
+      </p:graphicFrame>
+      <p:sp>
+        <p:nvSpPr>
+          <p:cNvPr id="5" name="Text 2"/>
+          <p:cNvSpPr txBox="1"/>
+          <p:nvPr/>
+        </p:nvSpPr>
+        <p:spPr>
+          <a:xfrm>
+            <a:off x="640080" y="6355080"/>
+            <a:ext cx="10911535" cy="274320"/>
+          </a:xfrm>
+          <a:prstGeom prst="rect">
+            <a:avLst/>
+          </a:prstGeom>
+          <a:noFill/>
+          <a:ln/>
+        </p:spPr>
+        <p:txBody>
+          <a:bodyPr wrap="square" lIns="0" tIns="0" rIns="0" bIns="0" rtlCol="0" anchor="ctr"/>
+          <a:lstStyle/>
+          <a:p>
+            <a:pPr indent="0" marL="0">
+              <a:buNone/>
+            </a:pPr>
+            <a:r>
+              <a:rPr lang="en-US" sz="1100" dirty="0">
+                <a:solidFill>
+                  <a:srgbClr val="5F6B7A"/>
+                </a:solidFill>
+                <a:latin typeface="Calibri" pitchFamily="34" charset="0"/>
+                <a:ea typeface="Calibri" pitchFamily="34" charset="-122"/>
+                <a:cs typeface="Calibri" pitchFamily="34" charset="-120"/>
+              </a:rPr>
+              <a:t>DomusFM reproduction · 18 · Source: docs/LIMITATIONS_AND_REMEDIES.md</a:t>
+            </a:r>
+            <a:endParaRPr lang="en-US" sz="1100" dirty="0"/>
+          </a:p>
+        </p:txBody>
+      </p:sp>
+    </p:spTree>
+  </p:cSld>
+  <p:clrMapOvr>
+    <a:masterClrMapping/>
+  </p:clrMapOvr>
+</p:sld>
+</file>
+
+<file path=ppt/slides/slide19.xml><?xml version="1.0" encoding="utf-8"?>
+<p:sld xmlns:a="http://schemas.openxmlformats.org/drawingml/2006/main" xmlns:r="http://schemas.openxmlformats.org/officeDocument/2006/relationships" xmlns:p="http://schemas.openxmlformats.org/presentationml/2006/main">
+  <p:cSld name="Slide 19">
+    <p:bg>
+      <p:bgPr>
+        <a:solidFill>
+          <a:srgbClr val="FFFFFF"/>
+        </a:solidFill>
+      </p:bgPr>
+    </p:bg>
+    <p:spTree>
+      <p:nvGrpSpPr>
+        <p:cNvPr id="1" name=""/>
+        <p:cNvGrpSpPr/>
+        <p:nvPr/>
+      </p:nvGrpSpPr>
+      <p:grpSpPr>
+        <a:xfrm>
+          <a:off x="0" y="0"/>
+          <a:ext cx="0" cy="0"/>
+          <a:chOff x="0" y="0"/>
+          <a:chExt cx="0" cy="0"/>
+        </a:xfrm>
+      </p:grpSpPr>
+      <p:sp>
+        <p:nvSpPr>
+          <p:cNvPr id="2" name="Text 0"/>
+          <p:cNvSpPr txBox="1"/>
+          <p:nvPr/>
+        </p:nvSpPr>
+        <p:spPr>
+          <a:xfrm>
+            <a:off x="640080" y="457200"/>
+            <a:ext cx="10911535" cy="274320"/>
+          </a:xfrm>
+          <a:prstGeom prst="rect">
+            <a:avLst/>
+          </a:prstGeom>
+          <a:noFill/>
+          <a:ln/>
+        </p:spPr>
+        <p:txBody>
+          <a:bodyPr wrap="square" lIns="0" tIns="0" rIns="0" bIns="0" rtlCol="0" anchor="ctr"/>
+          <a:lstStyle/>
+          <a:p>
+            <a:pPr indent="0" marL="0">
+              <a:buNone/>
+            </a:pPr>
+            <a:r>
+              <a:rPr lang="en-US" sz="1200" b="1" spc="200" kern="0" dirty="0">
+                <a:solidFill>
+                  <a:srgbClr val="2F6FB0"/>
+                </a:solidFill>
+                <a:latin typeface="Calibri" pitchFamily="34" charset="0"/>
+                <a:ea typeface="Calibri" pitchFamily="34" charset="-122"/>
+                <a:cs typeface="Calibri" pitchFamily="34" charset="-120"/>
+              </a:rPr>
+              <a:t>DOMUSFM LIMITATIONS → HOMEFM REMEDIES · 3 OF 3</a:t>
+            </a:r>
+            <a:endParaRPr lang="en-US" sz="1200" dirty="0"/>
+          </a:p>
+        </p:txBody>
+      </p:sp>
+      <p:sp>
+        <p:nvSpPr>
+          <p:cNvPr id="3" name="Text 1"/>
+          <p:cNvSpPr txBox="1"/>
+          <p:nvPr/>
+        </p:nvSpPr>
+        <p:spPr>
+          <a:xfrm>
+            <a:off x="640080" y="749808"/>
+            <a:ext cx="10911535" cy="685800"/>
+          </a:xfrm>
+          <a:prstGeom prst="rect">
+            <a:avLst/>
+          </a:prstGeom>
+          <a:noFill/>
+          <a:ln/>
+        </p:spPr>
+        <p:txBody>
+          <a:bodyPr wrap="square" lIns="0" tIns="0" rIns="0" bIns="0" rtlCol="0" anchor="ctr"/>
+          <a:lstStyle/>
+          <a:p>
+            <a:pPr indent="0" marL="0">
+              <a:buNone/>
+            </a:pPr>
+            <a:r>
+              <a:rPr lang="en-US" sz="3600" b="1" dirty="0">
+                <a:solidFill>
+                  <a:srgbClr val="14213D"/>
+                </a:solidFill>
+                <a:latin typeface="Cambria" pitchFamily="34" charset="0"/>
+                <a:ea typeface="Cambria" pitchFamily="34" charset="-122"/>
+                <a:cs typeface="Cambria" pitchFamily="34" charset="-120"/>
+              </a:rPr>
+              <a:t>Limits on how it learns</a:t>
+            </a:r>
+            <a:endParaRPr lang="en-US" sz="3600" dirty="0"/>
+          </a:p>
+        </p:txBody>
+      </p:sp>
+      <p:graphicFrame>
+        <p:nvGraphicFramePr>
+          <p:cNvPr id="20" name="Table 0"/>
+          <p:cNvGraphicFramePr>
+            <a:graphicFrameLocks noGrp="1"/>
+          </p:cNvGraphicFramePr>
+          <p:nvPr>
+            <p:extLst>
+              <p:ext uri="{D42A27DB-BD31-4B8C-83A1-F6EECF244321}">
+                <p14:modId xmlns:p14="http://schemas.microsoft.com/office/powerpoint/2010/main" val="1579011935"/>
+              </p:ext>
+            </p:extLst>
+          </p:nvPr>
+        </p:nvGraphicFramePr>
+        <p:xfrm>
+          <a:off x="640080" y="1691640"/>
+          <a:ext cx="10911535" cy="914400"/>
+        </p:xfrm>
+        <a:graphic>
+          <a:graphicData uri="http://schemas.openxmlformats.org/drawingml/2006/table">
+            <a:tbl>
+              <a:tblPr/>
+              <a:tblGrid>
+                <a:gridCol w="2331720"/>
+                <a:gridCol w="3154680"/>
+                <a:gridCol w="3383280"/>
+                <a:gridCol w="2039112"/>
+              </a:tblGrid>
+              <a:tr h="566928">
+                <a:tc>
+                  <a:txBody>
+                    <a:bodyPr/>
+                    <a:lstStyle/>
+                    <a:p>
+                      <a:pPr algn="l" indent="0" marL="0">
+                        <a:buNone/>
+                      </a:pPr>
+                      <a:r>
+                        <a:rPr lang="en-US" sz="1400" b="1" dirty="0">
+                          <a:solidFill>
+                            <a:srgbClr val="14213D"/>
+                          </a:solidFill>
+                          <a:latin typeface="Calibri" pitchFamily="34" charset="0"/>
+                          <a:ea typeface="Calibri" pitchFamily="34" charset="-122"/>
+                          <a:cs typeface="Calibri" pitchFamily="34" charset="-120"/>
+                        </a:rPr>
+                        <a:t>Limitation</a:t>
+                      </a:r>
+                      <a:endParaRPr lang="en-US" sz="1400" dirty="0">
+                        <a:latin typeface="Calibri" charset="0"/>
+                        <a:ea typeface="Calibri" charset="0"/>
+                        <a:cs typeface="Calibri" charset="0"/>
+                      </a:endParaRPr>
+                    </a:p>
+                  </a:txBody>
+                  <a:tcPr marL="73152" marR="73152" marT="36576" marB="36576" anchor="ctr">
+                    <a:lnL w="9525" cap="flat" cmpd="sng" algn="ctr">
+                      <a:solidFill>
+                        <a:srgbClr val="C9CFD8"/>
+                      </a:solidFill>
+                      <a:prstDash val="solid"/>
+                      <a:round/>
+                      <a:headEnd type="none" w="med" len="med"/>
+                      <a:tailEnd type="none" w="med" len="med"/>
+                    </a:lnL>
+                    <a:lnR w="9525" cap="flat" cmpd="sng" algn="ctr">
+                      <a:solidFill>
+                        <a:srgbClr val="C9CFD8"/>
+                      </a:solidFill>
+                      <a:prstDash val="solid"/>
+                      <a:round/>
+                      <a:headEnd type="none" w="med" len="med"/>
+                      <a:tailEnd type="none" w="med" len="med"/>
+                    </a:lnR>
+                    <a:lnT w="9525" cap="flat" cmpd="sng" algn="ctr">
+                      <a:solidFill>
+                        <a:srgbClr val="C9CFD8"/>
+                      </a:solidFill>
+                      <a:prstDash val="solid"/>
+                      <a:round/>
+                      <a:headEnd type="none" w="med" len="med"/>
+                      <a:tailEnd type="none" w="med" len="med"/>
+                    </a:lnT>
+                    <a:lnB w="9525" cap="flat" cmpd="sng" algn="ctr">
+                      <a:solidFill>
+                        <a:srgbClr val="C9CFD8"/>
+                      </a:solidFill>
+                      <a:prstDash val="solid"/>
+                      <a:round/>
+                      <a:headEnd type="none" w="med" len="med"/>
+                      <a:tailEnd type="none" w="med" len="med"/>
+                    </a:lnB>
+                    <a:solidFill>
+                      <a:srgbClr val="DDE3EC"/>
+                    </a:solidFill>
+                  </a:tcPr>
+                </a:tc>
+                <a:tc>
+                  <a:txBody>
+                    <a:bodyPr/>
+                    <a:lstStyle/>
+                    <a:p>
+                      <a:pPr algn="l" indent="0" marL="0">
+                        <a:buNone/>
+                      </a:pPr>
+                      <a:r>
+                        <a:rPr lang="en-US" sz="1400" b="1" dirty="0">
+                          <a:solidFill>
+                            <a:srgbClr val="14213D"/>
+                          </a:solidFill>
+                          <a:latin typeface="Calibri" pitchFamily="34" charset="0"/>
+                          <a:ea typeface="Calibri" pitchFamily="34" charset="-122"/>
+                          <a:cs typeface="Calibri" pitchFamily="34" charset="-120"/>
+                        </a:rPr>
+                        <a:t>What goes wrong</a:t>
+                      </a:r>
+                      <a:endParaRPr lang="en-US" sz="1400" dirty="0">
+                        <a:latin typeface="Calibri" charset="0"/>
+                        <a:ea typeface="Calibri" charset="0"/>
+                        <a:cs typeface="Calibri" charset="0"/>
+                      </a:endParaRPr>
+                    </a:p>
+                  </a:txBody>
+                  <a:tcPr marL="73152" marR="73152" marT="36576" marB="36576" anchor="ctr">
+                    <a:lnL w="9525" cap="flat" cmpd="sng" algn="ctr">
+                      <a:solidFill>
+                        <a:srgbClr val="C9CFD8"/>
+                      </a:solidFill>
+                      <a:prstDash val="solid"/>
+                      <a:round/>
+                      <a:headEnd type="none" w="med" len="med"/>
+                      <a:tailEnd type="none" w="med" len="med"/>
+                    </a:lnL>
+                    <a:lnR w="9525" cap="flat" cmpd="sng" algn="ctr">
+                      <a:solidFill>
+                        <a:srgbClr val="C9CFD8"/>
+                      </a:solidFill>
+                      <a:prstDash val="solid"/>
+                      <a:round/>
+                      <a:headEnd type="none" w="med" len="med"/>
+                      <a:tailEnd type="none" w="med" len="med"/>
+                    </a:lnR>
+                    <a:lnT w="9525" cap="flat" cmpd="sng" algn="ctr">
+                      <a:solidFill>
+                        <a:srgbClr val="C9CFD8"/>
+                      </a:solidFill>
+                      <a:prstDash val="solid"/>
+                      <a:round/>
+                      <a:headEnd type="none" w="med" len="med"/>
+                      <a:tailEnd type="none" w="med" len="med"/>
+                    </a:lnT>
+                    <a:lnB w="9525" cap="flat" cmpd="sng" algn="ctr">
+                      <a:solidFill>
+                        <a:srgbClr val="C9CFD8"/>
+                      </a:solidFill>
+                      <a:prstDash val="solid"/>
+                      <a:round/>
+                      <a:headEnd type="none" w="med" len="med"/>
+                      <a:tailEnd type="none" w="med" len="med"/>
+                    </a:lnB>
+                    <a:solidFill>
+                      <a:srgbClr val="DDE3EC"/>
+                    </a:solidFill>
+                  </a:tcPr>
+                </a:tc>
+                <a:tc>
+                  <a:txBody>
+                    <a:bodyPr/>
+                    <a:lstStyle/>
+                    <a:p>
+                      <a:pPr algn="l" indent="0" marL="0">
+                        <a:buNone/>
+                      </a:pPr>
+                      <a:r>
+                        <a:rPr lang="en-US" sz="1400" b="1" dirty="0">
+                          <a:solidFill>
+                            <a:srgbClr val="14213D"/>
+                          </a:solidFill>
+                          <a:latin typeface="Calibri" pitchFamily="34" charset="0"/>
+                          <a:ea typeface="Calibri" pitchFamily="34" charset="-122"/>
+                          <a:cs typeface="Calibri" pitchFamily="34" charset="-120"/>
+                        </a:rPr>
+                        <a:t>HomeFM remedy</a:t>
+                      </a:r>
+                      <a:endParaRPr lang="en-US" sz="1400" dirty="0">
+                        <a:latin typeface="Calibri" charset="0"/>
+                        <a:ea typeface="Calibri" charset="0"/>
+                        <a:cs typeface="Calibri" charset="0"/>
+                      </a:endParaRPr>
+                    </a:p>
+                  </a:txBody>
+                  <a:tcPr marL="73152" marR="73152" marT="36576" marB="36576" anchor="ctr">
+                    <a:lnL w="9525" cap="flat" cmpd="sng" algn="ctr">
+                      <a:solidFill>
+                        <a:srgbClr val="C9CFD8"/>
+                      </a:solidFill>
+                      <a:prstDash val="solid"/>
+                      <a:round/>
+                      <a:headEnd type="none" w="med" len="med"/>
+                      <a:tailEnd type="none" w="med" len="med"/>
+                    </a:lnL>
+                    <a:lnR w="9525" cap="flat" cmpd="sng" algn="ctr">
+                      <a:solidFill>
+                        <a:srgbClr val="C9CFD8"/>
+                      </a:solidFill>
+                      <a:prstDash val="solid"/>
+                      <a:round/>
+                      <a:headEnd type="none" w="med" len="med"/>
+                      <a:tailEnd type="none" w="med" len="med"/>
+                    </a:lnR>
+                    <a:lnT w="9525" cap="flat" cmpd="sng" algn="ctr">
+                      <a:solidFill>
+                        <a:srgbClr val="C9CFD8"/>
+                      </a:solidFill>
+                      <a:prstDash val="solid"/>
+                      <a:round/>
+                      <a:headEnd type="none" w="med" len="med"/>
+                      <a:tailEnd type="none" w="med" len="med"/>
+                    </a:lnT>
+                    <a:lnB w="9525" cap="flat" cmpd="sng" algn="ctr">
+                      <a:solidFill>
+                        <a:srgbClr val="C9CFD8"/>
+                      </a:solidFill>
+                      <a:prstDash val="solid"/>
+                      <a:round/>
+                      <a:headEnd type="none" w="med" len="med"/>
+                      <a:tailEnd type="none" w="med" len="med"/>
+                    </a:lnB>
+                    <a:solidFill>
+                      <a:srgbClr val="DDE3EC"/>
+                    </a:solidFill>
+                  </a:tcPr>
+                </a:tc>
+                <a:tc>
+                  <a:txBody>
+                    <a:bodyPr/>
+                    <a:lstStyle/>
+                    <a:p>
+                      <a:pPr algn="l" indent="0" marL="0">
+                        <a:buNone/>
+                      </a:pPr>
+                      <a:r>
+                        <a:rPr lang="en-US" sz="1400" b="1" dirty="0">
+                          <a:solidFill>
+                            <a:srgbClr val="14213D"/>
+                          </a:solidFill>
+                          <a:latin typeface="Calibri" pitchFamily="34" charset="0"/>
+                          <a:ea typeface="Calibri" pitchFamily="34" charset="-122"/>
+                          <a:cs typeface="Calibri" pitchFamily="34" charset="-120"/>
+                        </a:rPr>
+                        <a:t>Status</a:t>
+                      </a:r>
+                      <a:endParaRPr lang="en-US" sz="1400" dirty="0">
+                        <a:latin typeface="Calibri" charset="0"/>
+                        <a:ea typeface="Calibri" charset="0"/>
+                        <a:cs typeface="Calibri" charset="0"/>
+                      </a:endParaRPr>
+                    </a:p>
+                  </a:txBody>
+                  <a:tcPr marL="73152" marR="73152" marT="36576" marB="36576" anchor="ctr">
+                    <a:lnL w="9525" cap="flat" cmpd="sng" algn="ctr">
+                      <a:solidFill>
+                        <a:srgbClr val="C9CFD8"/>
+                      </a:solidFill>
+                      <a:prstDash val="solid"/>
+                      <a:round/>
+                      <a:headEnd type="none" w="med" len="med"/>
+                      <a:tailEnd type="none" w="med" len="med"/>
+                    </a:lnL>
+                    <a:lnR w="9525" cap="flat" cmpd="sng" algn="ctr">
+                      <a:solidFill>
+                        <a:srgbClr val="C9CFD8"/>
+                      </a:solidFill>
+                      <a:prstDash val="solid"/>
+                      <a:round/>
+                      <a:headEnd type="none" w="med" len="med"/>
+                      <a:tailEnd type="none" w="med" len="med"/>
+                    </a:lnR>
+                    <a:lnT w="9525" cap="flat" cmpd="sng" algn="ctr">
+                      <a:solidFill>
+                        <a:srgbClr val="C9CFD8"/>
+                      </a:solidFill>
+                      <a:prstDash val="solid"/>
+                      <a:round/>
+                      <a:headEnd type="none" w="med" len="med"/>
+                      <a:tailEnd type="none" w="med" len="med"/>
+                    </a:lnT>
+                    <a:lnB w="9525" cap="flat" cmpd="sng" algn="ctr">
+                      <a:solidFill>
+                        <a:srgbClr val="C9CFD8"/>
+                      </a:solidFill>
+                      <a:prstDash val="solid"/>
+                      <a:round/>
+                      <a:headEnd type="none" w="med" len="med"/>
+                      <a:tailEnd type="none" w="med" len="med"/>
+                    </a:lnB>
+                    <a:solidFill>
+                      <a:srgbClr val="DDE3EC"/>
+                    </a:solidFill>
+                  </a:tcPr>
+                </a:tc>
+              </a:tr>
+              <a:tr h="566928">
+                <a:tc>
+                  <a:txBody>
+                    <a:bodyPr/>
+                    <a:lstStyle/>
+                    <a:p>
+                      <a:pPr indent="0" marL="0">
+                        <a:buNone/>
+                      </a:pPr>
+                      <a:r>
+                        <a:rPr lang="en-US" sz="1400" b="1" dirty="0">
+                          <a:solidFill>
+                            <a:srgbClr val="14213D"/>
+                          </a:solidFill>
+                          <a:latin typeface="Calibri" pitchFamily="34" charset="0"/>
+                          <a:ea typeface="Calibri" pitchFamily="34" charset="-122"/>
+                          <a:cs typeface="Calibri" pitchFamily="34" charset="-120"/>
+                        </a:rPr>
+                        <a:t>L10 · Small, old data</a:t>
+                      </a:r>
+                      <a:endParaRPr lang="en-US" sz="1400" dirty="0">
+                        <a:latin typeface="Calibri" charset="0"/>
+                        <a:ea typeface="Calibri" charset="0"/>
+                        <a:cs typeface="Calibri" charset="0"/>
+                      </a:endParaRPr>
+                    </a:p>
+                  </a:txBody>
+                  <a:tcPr marL="73152" marR="73152" marT="36576" marB="36576" anchor="ctr">
+                    <a:lnL w="9525" cap="flat" cmpd="sng" algn="ctr">
+                      <a:solidFill>
+                        <a:srgbClr val="C9CFD8"/>
+                      </a:solidFill>
+                      <a:prstDash val="solid"/>
+                      <a:round/>
+                      <a:headEnd type="none" w="med" len="med"/>
+                      <a:tailEnd type="none" w="med" len="med"/>
+                    </a:lnL>
+                    <a:lnR w="9525" cap="flat" cmpd="sng" algn="ctr">
+                      <a:solidFill>
+                        <a:srgbClr val="C9CFD8"/>
+                      </a:solidFill>
+                      <a:prstDash val="solid"/>
+                      <a:round/>
+                      <a:headEnd type="none" w="med" len="med"/>
+                      <a:tailEnd type="none" w="med" len="med"/>
+                    </a:lnR>
+                    <a:lnT w="9525" cap="flat" cmpd="sng" algn="ctr">
+                      <a:solidFill>
+                        <a:srgbClr val="C9CFD8"/>
+                      </a:solidFill>
+                      <a:prstDash val="solid"/>
+                      <a:round/>
+                      <a:headEnd type="none" w="med" len="med"/>
+                      <a:tailEnd type="none" w="med" len="med"/>
+                    </a:lnT>
+                    <a:lnB w="9525" cap="flat" cmpd="sng" algn="ctr">
+                      <a:solidFill>
+                        <a:srgbClr val="C9CFD8"/>
+                      </a:solidFill>
+                      <a:prstDash val="solid"/>
+                      <a:round/>
+                      <a:headEnd type="none" w="med" len="med"/>
+                      <a:tailEnd type="none" w="med" len="med"/>
+                    </a:lnB>
+                  </a:tcPr>
+                </a:tc>
+                <a:tc>
+                  <a:txBody>
+                    <a:bodyPr/>
+                    <a:lstStyle/>
+                    <a:p>
+                      <a:pPr indent="0" marL="0">
+                        <a:buNone/>
+                      </a:pPr>
+                      <a:r>
+                        <a:rPr lang="en-US" sz="1400" dirty="0">
+                          <a:solidFill>
+                            <a:srgbClr val="14213D"/>
+                          </a:solidFill>
+                          <a:latin typeface="Calibri" pitchFamily="34" charset="0"/>
+                          <a:ea typeface="Calibri" pitchFamily="34" charset="-122"/>
+                          <a:cs typeface="Calibri" pitchFamily="34" charset="-120"/>
+                        </a:rPr>
+                        <a:t>Never saw smart locks, cameras or robot vacuums</a:t>
+                      </a:r>
+                      <a:endParaRPr lang="en-US" sz="1400" dirty="0">
+                        <a:latin typeface="Calibri" charset="0"/>
+                        <a:ea typeface="Calibri" charset="0"/>
+                        <a:cs typeface="Calibri" charset="0"/>
+                      </a:endParaRPr>
+                    </a:p>
+                  </a:txBody>
+                  <a:tcPr marL="73152" marR="73152" marT="36576" marB="36576" anchor="ctr">
+                    <a:lnL w="9525" cap="flat" cmpd="sng" algn="ctr">
+                      <a:solidFill>
+                        <a:srgbClr val="C9CFD8"/>
+                      </a:solidFill>
+                      <a:prstDash val="solid"/>
+                      <a:round/>
+                      <a:headEnd type="none" w="med" len="med"/>
+                      <a:tailEnd type="none" w="med" len="med"/>
+                    </a:lnL>
+                    <a:lnR w="9525" cap="flat" cmpd="sng" algn="ctr">
+                      <a:solidFill>
+                        <a:srgbClr val="C9CFD8"/>
+                      </a:solidFill>
+                      <a:prstDash val="solid"/>
+                      <a:round/>
+                      <a:headEnd type="none" w="med" len="med"/>
+                      <a:tailEnd type="none" w="med" len="med"/>
+                    </a:lnR>
+                    <a:lnT w="9525" cap="flat" cmpd="sng" algn="ctr">
+                      <a:solidFill>
+                        <a:srgbClr val="C9CFD8"/>
+                      </a:solidFill>
+                      <a:prstDash val="solid"/>
+                      <a:round/>
+                      <a:headEnd type="none" w="med" len="med"/>
+                      <a:tailEnd type="none" w="med" len="med"/>
+                    </a:lnT>
+                    <a:lnB w="9525" cap="flat" cmpd="sng" algn="ctr">
+                      <a:solidFill>
+                        <a:srgbClr val="C9CFD8"/>
+                      </a:solidFill>
+                      <a:prstDash val="solid"/>
+                      <a:round/>
+                      <a:headEnd type="none" w="med" len="med"/>
+                      <a:tailEnd type="none" w="med" len="med"/>
+                    </a:lnB>
+                  </a:tcPr>
+                </a:tc>
+                <a:tc>
+                  <a:txBody>
+                    <a:bodyPr/>
+                    <a:lstStyle/>
+                    <a:p>
+                      <a:pPr indent="0" marL="0">
+                        <a:buNone/>
+                      </a:pPr>
+                      <a:r>
+                        <a:rPr lang="en-US" sz="1400" dirty="0">
+                          <a:solidFill>
+                            <a:srgbClr val="14213D"/>
+                          </a:solidFill>
+                          <a:latin typeface="Calibri" pitchFamily="34" charset="0"/>
+                          <a:ea typeface="Calibri" pitchFamily="34" charset="-122"/>
+                          <a:cs typeface="Calibri" pitchFamily="34" charset="-120"/>
+                        </a:rPr>
+                        <a:t>Many more homes, a simulator, pilot and donated homes</a:t>
+                      </a:r>
+                      <a:endParaRPr lang="en-US" sz="1400" dirty="0">
+                        <a:latin typeface="Calibri" charset="0"/>
+                        <a:ea typeface="Calibri" charset="0"/>
+                        <a:cs typeface="Calibri" charset="0"/>
+                      </a:endParaRPr>
+                    </a:p>
+                  </a:txBody>
+                  <a:tcPr marL="73152" marR="73152" marT="36576" marB="36576" anchor="ctr">
+                    <a:lnL w="9525" cap="flat" cmpd="sng" algn="ctr">
+                      <a:solidFill>
+                        <a:srgbClr val="C9CFD8"/>
+                      </a:solidFill>
+                      <a:prstDash val="solid"/>
+                      <a:round/>
+                      <a:headEnd type="none" w="med" len="med"/>
+                      <a:tailEnd type="none" w="med" len="med"/>
+                    </a:lnL>
+                    <a:lnR w="9525" cap="flat" cmpd="sng" algn="ctr">
+                      <a:solidFill>
+                        <a:srgbClr val="C9CFD8"/>
+                      </a:solidFill>
+                      <a:prstDash val="solid"/>
+                      <a:round/>
+                      <a:headEnd type="none" w="med" len="med"/>
+                      <a:tailEnd type="none" w="med" len="med"/>
+                    </a:lnR>
+                    <a:lnT w="9525" cap="flat" cmpd="sng" algn="ctr">
+                      <a:solidFill>
+                        <a:srgbClr val="C9CFD8"/>
+                      </a:solidFill>
+                      <a:prstDash val="solid"/>
+                      <a:round/>
+                      <a:headEnd type="none" w="med" len="med"/>
+                      <a:tailEnd type="none" w="med" len="med"/>
+                    </a:lnT>
+                    <a:lnB w="9525" cap="flat" cmpd="sng" algn="ctr">
+                      <a:solidFill>
+                        <a:srgbClr val="C9CFD8"/>
+                      </a:solidFill>
+                      <a:prstDash val="solid"/>
+                      <a:round/>
+                      <a:headEnd type="none" w="med" len="med"/>
+                      <a:tailEnd type="none" w="med" len="med"/>
+                    </a:lnB>
+                  </a:tcPr>
+                </a:tc>
+                <a:tc>
+                  <a:txBody>
+                    <a:bodyPr/>
+                    <a:lstStyle/>
+                    <a:p>
+                      <a:pPr indent="0" marL="0">
+                        <a:buNone/>
+                      </a:pPr>
+                      <a:r>
+                        <a:rPr lang="en-US" sz="1400" dirty="0">
+                          <a:solidFill>
+                            <a:srgbClr val="5F6B7A"/>
+                          </a:solidFill>
+                          <a:latin typeface="Calibri" pitchFamily="34" charset="0"/>
+                          <a:ea typeface="Calibri" pitchFamily="34" charset="-122"/>
+                          <a:cs typeface="Calibri" pitchFamily="34" charset="-120"/>
+                        </a:rPr>
+                        <a:t>84 homes built; rest designed</a:t>
+                      </a:r>
+                      <a:endParaRPr lang="en-US" sz="1400" dirty="0">
+                        <a:latin typeface="Calibri" charset="0"/>
+                        <a:ea typeface="Calibri" charset="0"/>
+                        <a:cs typeface="Calibri" charset="0"/>
+                      </a:endParaRPr>
+                    </a:p>
+                  </a:txBody>
+                  <a:tcPr marL="73152" marR="73152" marT="36576" marB="36576" anchor="ctr">
+                    <a:lnL w="9525" cap="flat" cmpd="sng" algn="ctr">
+                      <a:solidFill>
+                        <a:srgbClr val="C9CFD8"/>
+                      </a:solidFill>
+                      <a:prstDash val="solid"/>
+                      <a:round/>
+                      <a:headEnd type="none" w="med" len="med"/>
+                      <a:tailEnd type="none" w="med" len="med"/>
+                    </a:lnL>
+                    <a:lnR w="9525" cap="flat" cmpd="sng" algn="ctr">
+                      <a:solidFill>
+                        <a:srgbClr val="C9CFD8"/>
+                      </a:solidFill>
+                      <a:prstDash val="solid"/>
+                      <a:round/>
+                      <a:headEnd type="none" w="med" len="med"/>
+                      <a:tailEnd type="none" w="med" len="med"/>
+                    </a:lnR>
+                    <a:lnT w="9525" cap="flat" cmpd="sng" algn="ctr">
+                      <a:solidFill>
+                        <a:srgbClr val="C9CFD8"/>
+                      </a:solidFill>
+                      <a:prstDash val="solid"/>
+                      <a:round/>
+                      <a:headEnd type="none" w="med" len="med"/>
+                      <a:tailEnd type="none" w="med" len="med"/>
+                    </a:lnT>
+                    <a:lnB w="9525" cap="flat" cmpd="sng" algn="ctr">
+                      <a:solidFill>
+                        <a:srgbClr val="C9CFD8"/>
+                      </a:solidFill>
+                      <a:prstDash val="solid"/>
+                      <a:round/>
+                      <a:headEnd type="none" w="med" len="med"/>
+                      <a:tailEnd type="none" w="med" len="med"/>
+                    </a:lnB>
+                  </a:tcPr>
+                </a:tc>
+              </a:tr>
+              <a:tr h="566928">
+                <a:tc>
+                  <a:txBody>
+                    <a:bodyPr/>
+                    <a:lstStyle/>
+                    <a:p>
+                      <a:pPr indent="0" marL="0">
+                        <a:buNone/>
+                      </a:pPr>
+                      <a:r>
+                        <a:rPr lang="en-US" sz="1400" b="1" dirty="0">
+                          <a:solidFill>
+                            <a:srgbClr val="14213D"/>
+                          </a:solidFill>
+                          <a:latin typeface="Calibri" pitchFamily="34" charset="0"/>
+                          <a:ea typeface="Calibri" pitchFamily="34" charset="-122"/>
+                          <a:cs typeface="Calibri" pitchFamily="34" charset="-120"/>
+                        </a:rPr>
+                        <a:t>L11 · Game too easy</a:t>
+                      </a:r>
+                      <a:endParaRPr lang="en-US" sz="1400" dirty="0">
+                        <a:latin typeface="Calibri" charset="0"/>
+                        <a:ea typeface="Calibri" charset="0"/>
+                        <a:cs typeface="Calibri" charset="0"/>
+                      </a:endParaRPr>
+                    </a:p>
+                  </a:txBody>
+                  <a:tcPr marL="73152" marR="73152" marT="36576" marB="36576" anchor="ctr">
+                    <a:lnL w="9525" cap="flat" cmpd="sng" algn="ctr">
+                      <a:solidFill>
+                        <a:srgbClr val="C9CFD8"/>
+                      </a:solidFill>
+                      <a:prstDash val="solid"/>
+                      <a:round/>
+                      <a:headEnd type="none" w="med" len="med"/>
+                      <a:tailEnd type="none" w="med" len="med"/>
+                    </a:lnL>
+                    <a:lnR w="9525" cap="flat" cmpd="sng" algn="ctr">
+                      <a:solidFill>
+                        <a:srgbClr val="C9CFD8"/>
+                      </a:solidFill>
+                      <a:prstDash val="solid"/>
+                      <a:round/>
+                      <a:headEnd type="none" w="med" len="med"/>
+                      <a:tailEnd type="none" w="med" len="med"/>
+                    </a:lnR>
+                    <a:lnT w="9525" cap="flat" cmpd="sng" algn="ctr">
+                      <a:solidFill>
+                        <a:srgbClr val="C9CFD8"/>
+                      </a:solidFill>
+                      <a:prstDash val="solid"/>
+                      <a:round/>
+                      <a:headEnd type="none" w="med" len="med"/>
+                      <a:tailEnd type="none" w="med" len="med"/>
+                    </a:lnT>
+                    <a:lnB w="9525" cap="flat" cmpd="sng" algn="ctr">
+                      <a:solidFill>
+                        <a:srgbClr val="C9CFD8"/>
+                      </a:solidFill>
+                      <a:prstDash val="solid"/>
+                      <a:round/>
+                      <a:headEnd type="none" w="med" len="med"/>
+                      <a:tailEnd type="none" w="med" len="med"/>
+                    </a:lnB>
+                  </a:tcPr>
+                </a:tc>
+                <a:tc>
+                  <a:txBody>
+                    <a:bodyPr/>
+                    <a:lstStyle/>
+                    <a:p>
+                      <a:pPr indent="0" marL="0">
+                        <a:buNone/>
+                      </a:pPr>
+                      <a:r>
+                        <a:rPr lang="en-US" sz="1400" dirty="0">
+                          <a:solidFill>
+                            <a:srgbClr val="14213D"/>
+                          </a:solidFill>
+                          <a:latin typeface="Calibri" pitchFamily="34" charset="0"/>
+                          <a:ea typeface="Calibri" pitchFamily="34" charset="-122"/>
+                          <a:cs typeface="Calibri" pitchFamily="34" charset="-120"/>
+                        </a:rPr>
+                        <a:t>Learns sensor tricks instead of behaviour</a:t>
+                      </a:r>
+                      <a:endParaRPr lang="en-US" sz="1400" dirty="0">
+                        <a:latin typeface="Calibri" charset="0"/>
+                        <a:ea typeface="Calibri" charset="0"/>
+                        <a:cs typeface="Calibri" charset="0"/>
+                      </a:endParaRPr>
+                    </a:p>
+                  </a:txBody>
+                  <a:tcPr marL="73152" marR="73152" marT="36576" marB="36576" anchor="ctr">
+                    <a:lnL w="9525" cap="flat" cmpd="sng" algn="ctr">
+                      <a:solidFill>
+                        <a:srgbClr val="C9CFD8"/>
+                      </a:solidFill>
+                      <a:prstDash val="solid"/>
+                      <a:round/>
+                      <a:headEnd type="none" w="med" len="med"/>
+                      <a:tailEnd type="none" w="med" len="med"/>
+                    </a:lnL>
+                    <a:lnR w="9525" cap="flat" cmpd="sng" algn="ctr">
+                      <a:solidFill>
+                        <a:srgbClr val="C9CFD8"/>
+                      </a:solidFill>
+                      <a:prstDash val="solid"/>
+                      <a:round/>
+                      <a:headEnd type="none" w="med" len="med"/>
+                      <a:tailEnd type="none" w="med" len="med"/>
+                    </a:lnR>
+                    <a:lnT w="9525" cap="flat" cmpd="sng" algn="ctr">
+                      <a:solidFill>
+                        <a:srgbClr val="C9CFD8"/>
+                      </a:solidFill>
+                      <a:prstDash val="solid"/>
+                      <a:round/>
+                      <a:headEnd type="none" w="med" len="med"/>
+                      <a:tailEnd type="none" w="med" len="med"/>
+                    </a:lnT>
+                    <a:lnB w="9525" cap="flat" cmpd="sng" algn="ctr">
+                      <a:solidFill>
+                        <a:srgbClr val="C9CFD8"/>
+                      </a:solidFill>
+                      <a:prstDash val="solid"/>
+                      <a:round/>
+                      <a:headEnd type="none" w="med" len="med"/>
+                      <a:tailEnd type="none" w="med" len="med"/>
+                    </a:lnB>
+                  </a:tcPr>
+                </a:tc>
+                <a:tc>
+                  <a:txBody>
+                    <a:bodyPr/>
+                    <a:lstStyle/>
+                    <a:p>
+                      <a:pPr indent="0" marL="0">
+                        <a:buNone/>
+                      </a:pPr>
+                      <a:r>
+                        <a:rPr lang="en-US" sz="1400" dirty="0">
+                          <a:solidFill>
+                            <a:srgbClr val="14213D"/>
+                          </a:solidFill>
+                          <a:latin typeface="Calibri" pitchFamily="34" charset="0"/>
+                          <a:ea typeface="Calibri" pitchFamily="34" charset="-122"/>
+                          <a:cs typeface="Calibri" pitchFamily="34" charset="-120"/>
+                        </a:rPr>
+                        <a:t>Three harder, more useful practice games</a:t>
+                      </a:r>
+                      <a:endParaRPr lang="en-US" sz="1400" dirty="0">
+                        <a:latin typeface="Calibri" charset="0"/>
+                        <a:ea typeface="Calibri" charset="0"/>
+                        <a:cs typeface="Calibri" charset="0"/>
+                      </a:endParaRPr>
+                    </a:p>
+                  </a:txBody>
+                  <a:tcPr marL="73152" marR="73152" marT="36576" marB="36576" anchor="ctr">
+                    <a:lnL w="9525" cap="flat" cmpd="sng" algn="ctr">
+                      <a:solidFill>
+                        <a:srgbClr val="C9CFD8"/>
+                      </a:solidFill>
+                      <a:prstDash val="solid"/>
+                      <a:round/>
+                      <a:headEnd type="none" w="med" len="med"/>
+                      <a:tailEnd type="none" w="med" len="med"/>
+                    </a:lnL>
+                    <a:lnR w="9525" cap="flat" cmpd="sng" algn="ctr">
+                      <a:solidFill>
+                        <a:srgbClr val="C9CFD8"/>
+                      </a:solidFill>
+                      <a:prstDash val="solid"/>
+                      <a:round/>
+                      <a:headEnd type="none" w="med" len="med"/>
+                      <a:tailEnd type="none" w="med" len="med"/>
+                    </a:lnR>
+                    <a:lnT w="9525" cap="flat" cmpd="sng" algn="ctr">
+                      <a:solidFill>
+                        <a:srgbClr val="C9CFD8"/>
+                      </a:solidFill>
+                      <a:prstDash val="solid"/>
+                      <a:round/>
+                      <a:headEnd type="none" w="med" len="med"/>
+                      <a:tailEnd type="none" w="med" len="med"/>
+                    </a:lnT>
+                    <a:lnB w="9525" cap="flat" cmpd="sng" algn="ctr">
+                      <a:solidFill>
+                        <a:srgbClr val="C9CFD8"/>
+                      </a:solidFill>
+                      <a:prstDash val="solid"/>
+                      <a:round/>
+                      <a:headEnd type="none" w="med" len="med"/>
+                      <a:tailEnd type="none" w="med" len="med"/>
+                    </a:lnB>
+                  </a:tcPr>
+                </a:tc>
+                <a:tc>
+                  <a:txBody>
+                    <a:bodyPr/>
+                    <a:lstStyle/>
+                    <a:p>
+                      <a:pPr indent="0" marL="0">
+                        <a:buNone/>
+                      </a:pPr>
+                      <a:r>
+                        <a:rPr lang="en-US" sz="1400" dirty="0">
+                          <a:solidFill>
+                            <a:srgbClr val="5F6B7A"/>
+                          </a:solidFill>
+                          <a:latin typeface="Calibri" pitchFamily="34" charset="0"/>
+                          <a:ea typeface="Calibri" pitchFamily="34" charset="-122"/>
+                          <a:cs typeface="Calibri" pitchFamily="34" charset="-120"/>
+                        </a:rPr>
+                        <a:t>Games built on small data; corpus run next</a:t>
+                      </a:r>
+                      <a:endParaRPr lang="en-US" sz="1400" dirty="0">
+                        <a:latin typeface="Calibri" charset="0"/>
+                        <a:ea typeface="Calibri" charset="0"/>
+                        <a:cs typeface="Calibri" charset="0"/>
+                      </a:endParaRPr>
+                    </a:p>
+                  </a:txBody>
+                  <a:tcPr marL="73152" marR="73152" marT="36576" marB="36576" anchor="ctr">
+                    <a:lnL w="9525" cap="flat" cmpd="sng" algn="ctr">
+                      <a:solidFill>
+                        <a:srgbClr val="C9CFD8"/>
+                      </a:solidFill>
+                      <a:prstDash val="solid"/>
+                      <a:round/>
+                      <a:headEnd type="none" w="med" len="med"/>
+                      <a:tailEnd type="none" w="med" len="med"/>
+                    </a:lnL>
+                    <a:lnR w="9525" cap="flat" cmpd="sng" algn="ctr">
+                      <a:solidFill>
+                        <a:srgbClr val="C9CFD8"/>
+                      </a:solidFill>
+                      <a:prstDash val="solid"/>
+                      <a:round/>
+                      <a:headEnd type="none" w="med" len="med"/>
+                      <a:tailEnd type="none" w="med" len="med"/>
+                    </a:lnR>
+                    <a:lnT w="9525" cap="flat" cmpd="sng" algn="ctr">
+                      <a:solidFill>
+                        <a:srgbClr val="C9CFD8"/>
+                      </a:solidFill>
+                      <a:prstDash val="solid"/>
+                      <a:round/>
+                      <a:headEnd type="none" w="med" len="med"/>
+                      <a:tailEnd type="none" w="med" len="med"/>
+                    </a:lnT>
+                    <a:lnB w="9525" cap="flat" cmpd="sng" algn="ctr">
+                      <a:solidFill>
+                        <a:srgbClr val="C9CFD8"/>
+                      </a:solidFill>
+                      <a:prstDash val="solid"/>
+                      <a:round/>
+                      <a:headEnd type="none" w="med" len="med"/>
+                      <a:tailEnd type="none" w="med" len="med"/>
+                    </a:lnB>
+                  </a:tcPr>
+                </a:tc>
+              </a:tr>
+            </a:tbl>
+          </a:graphicData>
+        </a:graphic>
+      </p:graphicFrame>
+      <p:sp>
+        <p:nvSpPr>
+          <p:cNvPr id="5" name="Shape 2"/>
+          <p:cNvSpPr/>
+          <p:nvPr/>
+        </p:nvSpPr>
+        <p:spPr>
+          <a:xfrm>
+            <a:off x="640080" y="4023360"/>
+            <a:ext cx="5318608" cy="1645920"/>
+          </a:xfrm>
+          <a:prstGeom prst="roundRect">
+            <a:avLst>
+              <a:gd name="adj" fmla="val 5556"/>
+            </a:avLst>
+          </a:prstGeom>
+          <a:solidFill>
+            <a:srgbClr val="E3ECF7"/>
+          </a:solidFill>
+          <a:ln w="12700">
+            <a:solidFill>
+              <a:srgbClr val="E3ECF7"/>
+            </a:solidFill>
+            <a:prstDash val="solid"/>
+          </a:ln>
+        </p:spPr>
+      </p:sp>
+      <p:sp>
+        <p:nvSpPr>
+          <p:cNvPr id="6" name="Text 3"/>
+          <p:cNvSpPr txBox="1"/>
+          <p:nvPr/>
+        </p:nvSpPr>
+        <p:spPr>
+          <a:xfrm>
+            <a:off x="914400" y="4206240"/>
+            <a:ext cx="4769968" cy="365760"/>
+          </a:xfrm>
+          <a:prstGeom prst="rect">
+            <a:avLst/>
+          </a:prstGeom>
+          <a:noFill/>
+          <a:ln/>
+        </p:spPr>
+        <p:txBody>
+          <a:bodyPr wrap="square" lIns="0" tIns="0" rIns="0" bIns="0" rtlCol="0" anchor="t"/>
+          <a:lstStyle/>
+          <a:p>
+            <a:pPr indent="0" marL="0">
+              <a:buNone/>
+            </a:pPr>
+            <a:r>
+              <a:rPr lang="en-US" sz="1700" b="1" dirty="0">
+                <a:solidFill>
+                  <a:srgbClr val="14213D"/>
+                </a:solidFill>
+                <a:latin typeface="Calibri" pitchFamily="34" charset="0"/>
+                <a:ea typeface="Calibri" pitchFamily="34" charset="-122"/>
+                <a:cs typeface="Calibri" pitchFamily="34" charset="-120"/>
+              </a:rPr>
+              <a:t>L10 and L11 are linked</a:t>
+            </a:r>
+            <a:endParaRPr lang="en-US" sz="1700" dirty="0"/>
+          </a:p>
+        </p:txBody>
+      </p:sp>
+      <p:sp>
+        <p:nvSpPr>
+          <p:cNvPr id="7" name="Text 4"/>
+          <p:cNvSpPr txBox="1"/>
+          <p:nvPr/>
+        </p:nvSpPr>
+        <p:spPr>
+          <a:xfrm>
+            <a:off x="914400" y="4617720"/>
+            <a:ext cx="4769968" cy="914400"/>
+          </a:xfrm>
+          <a:prstGeom prst="rect">
+            <a:avLst/>
+          </a:prstGeom>
+          <a:noFill/>
+          <a:ln/>
+        </p:spPr>
+        <p:txBody>
+          <a:bodyPr wrap="square" lIns="0" tIns="0" rIns="0" bIns="0" rtlCol="0" anchor="t"/>
+          <a:lstStyle/>
+          <a:p>
+            <a:pPr indent="0" marL="0">
+              <a:buNone/>
+            </a:pPr>
+            <a:r>
+              <a:rPr lang="en-US" sz="1400" dirty="0">
+                <a:solidFill>
+                  <a:srgbClr val="3F4A5A"/>
+                </a:solidFill>
+                <a:latin typeface="Calibri" pitchFamily="34" charset="0"/>
+                <a:ea typeface="Calibri" pitchFamily="34" charset="-122"/>
+                <a:cs typeface="Calibri" pitchFamily="34" charset="-120"/>
+              </a:rPr>
+              <a:t>More data does not help while the game is too easy. With a harder game, the same 77 homes do help.</a:t>
+            </a:r>
+            <a:endParaRPr lang="en-US" sz="1400" dirty="0"/>
+          </a:p>
+        </p:txBody>
+      </p:sp>
+      <p:sp>
+        <p:nvSpPr>
+          <p:cNvPr id="8" name="Shape 5"/>
+          <p:cNvSpPr/>
+          <p:nvPr/>
+        </p:nvSpPr>
+        <p:spPr>
+          <a:xfrm>
+            <a:off x="6233008" y="4023360"/>
+            <a:ext cx="5318608" cy="1645920"/>
+          </a:xfrm>
+          <a:prstGeom prst="roundRect">
+            <a:avLst>
+              <a:gd name="adj" fmla="val 5556"/>
+            </a:avLst>
+          </a:prstGeom>
+          <a:solidFill>
+            <a:srgbClr val="F3F5F8"/>
+          </a:solidFill>
+          <a:ln w="9525">
+            <a:solidFill>
+              <a:srgbClr val="D5D9E0"/>
+            </a:solidFill>
+            <a:prstDash val="solid"/>
+          </a:ln>
+        </p:spPr>
+      </p:sp>
+      <p:sp>
+        <p:nvSpPr>
+          <p:cNvPr id="9" name="Text 6"/>
+          <p:cNvSpPr txBox="1"/>
+          <p:nvPr/>
+        </p:nvSpPr>
+        <p:spPr>
+          <a:xfrm>
+            <a:off x="6507328" y="4206240"/>
+            <a:ext cx="4769968" cy="365760"/>
+          </a:xfrm>
+          <a:prstGeom prst="rect">
+            <a:avLst/>
+          </a:prstGeom>
+          <a:noFill/>
+          <a:ln/>
+        </p:spPr>
+        <p:txBody>
+          <a:bodyPr wrap="square" lIns="0" tIns="0" rIns="0" bIns="0" rtlCol="0" anchor="t"/>
+          <a:lstStyle/>
+          <a:p>
+            <a:pPr indent="0" marL="0">
+              <a:buNone/>
+            </a:pPr>
+            <a:r>
+              <a:rPr lang="en-US" sz="1700" b="1" dirty="0">
+                <a:solidFill>
+                  <a:srgbClr val="14213D"/>
+                </a:solidFill>
+                <a:latin typeface="Calibri" pitchFamily="34" charset="0"/>
+                <a:ea typeface="Calibri" pitchFamily="34" charset="-122"/>
+                <a:cs typeface="Calibri" pitchFamily="34" charset="-120"/>
+              </a:rPr>
+              <a:t>We tested L11 on DomusFM</a:t>
+            </a:r>
+            <a:endParaRPr lang="en-US" sz="1700" dirty="0"/>
+          </a:p>
+        </p:txBody>
+      </p:sp>
+      <p:sp>
+        <p:nvSpPr>
+          <p:cNvPr id="10" name="Text 7"/>
+          <p:cNvSpPr txBox="1"/>
+          <p:nvPr/>
+        </p:nvSpPr>
+        <p:spPr>
+          <a:xfrm>
+            <a:off x="6507328" y="4617720"/>
+            <a:ext cx="4769968" cy="914400"/>
+          </a:xfrm>
+          <a:prstGeom prst="rect">
+            <a:avLst/>
+          </a:prstGeom>
+          <a:noFill/>
+          <a:ln/>
+        </p:spPr>
+        <p:txBody>
+          <a:bodyPr wrap="square" lIns="0" tIns="0" rIns="0" bIns="0" rtlCol="0" anchor="t"/>
+          <a:lstStyle/>
+          <a:p>
+            <a:pPr indent="0" marL="0">
+              <a:buNone/>
+            </a:pPr>
+            <a:r>
+              <a:rPr lang="en-US" sz="1400" dirty="0">
+                <a:solidFill>
+                  <a:srgbClr val="3F4A5A"/>
+                </a:solidFill>
+                <a:latin typeface="Calibri" pitchFamily="34" charset="0"/>
+                <a:ea typeface="Calibri" pitchFamily="34" charset="-122"/>
+                <a:cs typeface="Calibri" pitchFamily="34" charset="-120"/>
+              </a:rPr>
+              <a:t>The paper's game and a harder game, same model and data. Results on the next slide.</a:t>
+            </a:r>
+            <a:endParaRPr lang="en-US" sz="1400" dirty="0"/>
+          </a:p>
+        </p:txBody>
+      </p:sp>
+      <p:sp>
+        <p:nvSpPr>
+          <p:cNvPr id="11" name="Text 8"/>
+          <p:cNvSpPr txBox="1"/>
+          <p:nvPr/>
+        </p:nvSpPr>
+        <p:spPr>
+          <a:xfrm>
+            <a:off x="640080" y="6355080"/>
+            <a:ext cx="10911535" cy="274320"/>
+          </a:xfrm>
+          <a:prstGeom prst="rect">
+            <a:avLst/>
+          </a:prstGeom>
+          <a:noFill/>
+          <a:ln/>
+        </p:spPr>
+        <p:txBody>
+          <a:bodyPr wrap="square" lIns="0" tIns="0" rIns="0" bIns="0" rtlCol="0" anchor="ctr"/>
+          <a:lstStyle/>
+          <a:p>
+            <a:pPr indent="0" marL="0">
+              <a:buNone/>
+            </a:pPr>
+            <a:r>
+              <a:rPr lang="en-US" sz="1100" dirty="0">
+                <a:solidFill>
+                  <a:srgbClr val="5F6B7A"/>
+                </a:solidFill>
+                <a:latin typeface="Calibri" pitchFamily="34" charset="0"/>
+                <a:ea typeface="Calibri" pitchFamily="34" charset="-122"/>
+                <a:cs typeface="Calibri" pitchFamily="34" charset="-120"/>
+              </a:rPr>
+              <a:t>DomusFM reproduction · 19 · Source: docs/LIMITATIONS_AND_REMEDIES.md</a:t>
+            </a:r>
+            <a:endParaRPr lang="en-US" sz="1100" dirty="0"/>
+          </a:p>
+        </p:txBody>
+      </p:sp>
+    </p:spTree>
+  </p:cSld>
+  <p:clrMapOvr>
+    <a:masterClrMapping/>
+  </p:clrMapOvr>
+</p:sld>
+</file>
+
+<file path=ppt/slides/slide2.xml><?xml version="1.0" encoding="utf-8"?>
+<p:sld xmlns:a="http://schemas.openxmlformats.org/drawingml/2006/main" xmlns:r="http://schemas.openxmlformats.org/officeDocument/2006/relationships" xmlns:p="http://schemas.openxmlformats.org/presentationml/2006/main">
+  <p:cSld name="Slide 2">
+    <p:bg>
+      <p:bgPr>
+        <a:solidFill>
+          <a:srgbClr val="2F6FB0"/>
+        </a:solidFill>
+      </p:bgPr>
+    </p:bg>
+    <p:spTree>
+      <p:nvGrpSpPr>
+        <p:cNvPr id="1" name=""/>
+        <p:cNvGrpSpPr/>
+        <p:nvPr/>
+      </p:nvGrpSpPr>
+      <p:grpSpPr>
+        <a:xfrm>
+          <a:off x="0" y="0"/>
+          <a:ext cx="0" cy="0"/>
+          <a:chOff x="0" y="0"/>
+          <a:chExt cx="0" cy="0"/>
+        </a:xfrm>
+      </p:grpSpPr>
+      <p:sp>
+        <p:nvSpPr>
+          <p:cNvPr id="2" name="Text 0"/>
+          <p:cNvSpPr txBox="1"/>
+          <p:nvPr/>
+        </p:nvSpPr>
+        <p:spPr>
+          <a:xfrm>
+            <a:off x="640080" y="822960"/>
+            <a:ext cx="10911535" cy="274320"/>
+          </a:xfrm>
+          <a:prstGeom prst="rect">
+            <a:avLst/>
+          </a:prstGeom>
+          <a:noFill/>
+          <a:ln/>
+        </p:spPr>
+        <p:txBody>
+          <a:bodyPr wrap="square" lIns="0" tIns="0" rIns="0" bIns="0" rtlCol="0" anchor="t"/>
+          <a:lstStyle/>
+          <a:p>
+            <a:pPr indent="0" marL="0">
+              <a:buNone/>
+            </a:pPr>
+            <a:r>
+              <a:rPr lang="en-US" sz="1300" b="1" spc="200" kern="0" dirty="0">
+                <a:solidFill>
+                  <a:srgbClr val="E3EDF8"/>
+                </a:solidFill>
+                <a:latin typeface="Calibri" pitchFamily="34" charset="0"/>
+                <a:ea typeface="Calibri" pitchFamily="34" charset="-122"/>
+                <a:cs typeface="Calibri" pitchFamily="34" charset="-120"/>
+              </a:rPr>
+              <a:t>THE SHORT VERSION</a:t>
+            </a:r>
+            <a:endParaRPr lang="en-US" sz="1300" dirty="0"/>
+          </a:p>
+        </p:txBody>
+      </p:sp>
+      <p:sp>
+        <p:nvSpPr>
+          <p:cNvPr id="3" name="Text 1"/>
+          <p:cNvSpPr txBox="1"/>
+          <p:nvPr/>
+        </p:nvSpPr>
+        <p:spPr>
+          <a:xfrm>
+            <a:off x="640080" y="1188720"/>
+            <a:ext cx="10911535" cy="1463040"/>
+          </a:xfrm>
+          <a:prstGeom prst="rect">
+            <a:avLst/>
+          </a:prstGeom>
+          <a:noFill/>
+          <a:ln/>
+        </p:spPr>
+        <p:txBody>
+          <a:bodyPr wrap="square" lIns="0" tIns="0" rIns="0" bIns="0" rtlCol="0" anchor="ctr"/>
+          <a:lstStyle/>
+          <a:p>
+            <a:pPr indent="0" marL="0">
+              <a:buNone/>
+            </a:pPr>
+            <a:r>
+              <a:rPr lang="en-US" sz="11000" b="1" dirty="0">
+                <a:solidFill>
+                  <a:srgbClr val="FFFFFF"/>
+                </a:solidFill>
+                <a:latin typeface="Cambria" pitchFamily="34" charset="0"/>
+                <a:ea typeface="Cambria" pitchFamily="34" charset="-122"/>
+                <a:cs typeface="Cambria" pitchFamily="34" charset="-120"/>
+              </a:rPr>
+              <a:t>26 of 28</a:t>
+            </a:r>
+            <a:endParaRPr lang="en-US" sz="11000" dirty="0"/>
+          </a:p>
+        </p:txBody>
+      </p:sp>
+      <p:sp>
+        <p:nvSpPr>
+          <p:cNvPr id="4" name="Text 2"/>
+          <p:cNvSpPr txBox="1"/>
+          <p:nvPr/>
+        </p:nvSpPr>
+        <p:spPr>
+          <a:xfrm>
+            <a:off x="640080" y="2788920"/>
+            <a:ext cx="9601200" cy="914400"/>
+          </a:xfrm>
+          <a:prstGeom prst="rect">
+            <a:avLst/>
+          </a:prstGeom>
+          <a:noFill/>
+          <a:ln/>
+        </p:spPr>
+        <p:txBody>
+          <a:bodyPr wrap="square" lIns="0" tIns="0" rIns="0" bIns="0" rtlCol="0" anchor="t"/>
+          <a:lstStyle/>
+          <a:p>
+            <a:pPr indent="0" marL="0">
+              <a:buNone/>
+            </a:pPr>
+            <a:r>
+              <a:rPr lang="en-US" sz="2200" dirty="0">
+                <a:solidFill>
+                  <a:srgbClr val="FFFFFF"/>
+                </a:solidFill>
+                <a:latin typeface="Calibri" pitchFamily="34" charset="0"/>
+                <a:ea typeface="Calibri" pitchFamily="34" charset="-122"/>
+                <a:cs typeface="Calibri" pitchFamily="34" charset="-120"/>
+              </a:rPr>
+              <a:t>settings where pretrained DomusFM beats the same model trained from scratch, on 7 homes it never saw during pretraining.</a:t>
+            </a:r>
+            <a:endParaRPr lang="en-US" sz="2200" dirty="0"/>
+          </a:p>
+        </p:txBody>
+      </p:sp>
+      <p:sp>
+        <p:nvSpPr>
+          <p:cNvPr id="5" name="Text 3"/>
+          <p:cNvSpPr txBox="1"/>
+          <p:nvPr/>
+        </p:nvSpPr>
+        <p:spPr>
+          <a:xfrm>
+            <a:off x="640080" y="4069080"/>
+            <a:ext cx="3108960" cy="685800"/>
+          </a:xfrm>
+          <a:prstGeom prst="rect">
+            <a:avLst/>
+          </a:prstGeom>
+          <a:noFill/>
+          <a:ln/>
+        </p:spPr>
+        <p:txBody>
+          <a:bodyPr wrap="square" lIns="0" tIns="0" rIns="0" bIns="0" rtlCol="0" anchor="ctr"/>
+          <a:lstStyle/>
+          <a:p>
+            <a:pPr indent="0" marL="0">
+              <a:buNone/>
+            </a:pPr>
+            <a:r>
+              <a:rPr lang="en-US" sz="3800" b="1" dirty="0">
+                <a:solidFill>
+                  <a:srgbClr val="FFFFFF"/>
+                </a:solidFill>
+                <a:latin typeface="Cambria" pitchFamily="34" charset="0"/>
+                <a:ea typeface="Cambria" pitchFamily="34" charset="-122"/>
+                <a:cs typeface="Cambria" pitchFamily="34" charset="-120"/>
+              </a:rPr>
+              <a:t>+0.076</a:t>
+            </a:r>
+            <a:endParaRPr lang="en-US" sz="3800" dirty="0"/>
+          </a:p>
+        </p:txBody>
+      </p:sp>
+      <p:sp>
+        <p:nvSpPr>
+          <p:cNvPr id="6" name="Text 4"/>
+          <p:cNvSpPr txBox="1"/>
+          <p:nvPr/>
+        </p:nvSpPr>
+        <p:spPr>
+          <a:xfrm>
+            <a:off x="640080" y="4800600"/>
+            <a:ext cx="3108960" cy="320040"/>
+          </a:xfrm>
+          <a:prstGeom prst="rect">
+            <a:avLst/>
+          </a:prstGeom>
+          <a:noFill/>
+          <a:ln/>
+        </p:spPr>
+        <p:txBody>
+          <a:bodyPr wrap="square" lIns="0" tIns="0" rIns="0" bIns="0" rtlCol="0" anchor="t"/>
+          <a:lstStyle/>
+          <a:p>
+            <a:pPr indent="0" marL="0">
+              <a:buNone/>
+            </a:pPr>
+            <a:r>
+              <a:rPr lang="en-US" sz="1300" dirty="0">
+                <a:solidFill>
+                  <a:srgbClr val="E3EDF8"/>
+                </a:solidFill>
+                <a:latin typeface="Calibri" pitchFamily="34" charset="0"/>
+                <a:ea typeface="Calibri" pitchFamily="34" charset="-122"/>
+                <a:cs typeface="Calibri" pitchFamily="34" charset="-120"/>
+              </a:rPr>
+              <a:t>Activity F1 gain, 5 % labels</a:t>
+            </a:r>
+            <a:endParaRPr lang="en-US" sz="1300" dirty="0"/>
+          </a:p>
+        </p:txBody>
+      </p:sp>
+      <p:sp>
+        <p:nvSpPr>
+          <p:cNvPr id="7" name="Text 5"/>
+          <p:cNvSpPr txBox="1"/>
+          <p:nvPr/>
+        </p:nvSpPr>
+        <p:spPr>
+          <a:xfrm>
+            <a:off x="3931920" y="4069080"/>
+            <a:ext cx="3108960" cy="685800"/>
+          </a:xfrm>
+          <a:prstGeom prst="rect">
+            <a:avLst/>
+          </a:prstGeom>
+          <a:noFill/>
+          <a:ln/>
+        </p:spPr>
+        <p:txBody>
+          <a:bodyPr wrap="square" lIns="0" tIns="0" rIns="0" bIns="0" rtlCol="0" anchor="ctr"/>
+          <a:lstStyle/>
+          <a:p>
+            <a:pPr indent="0" marL="0">
+              <a:buNone/>
+            </a:pPr>
+            <a:r>
+              <a:rPr lang="en-US" sz="3800" b="1" dirty="0">
+                <a:solidFill>
+                  <a:srgbClr val="FFFFFF"/>
+                </a:solidFill>
+                <a:latin typeface="Cambria" pitchFamily="34" charset="0"/>
+                <a:ea typeface="Cambria" pitchFamily="34" charset="-122"/>
+                <a:cs typeface="Cambria" pitchFamily="34" charset="-120"/>
+              </a:rPr>
+              <a:t>+0.053</a:t>
+            </a:r>
+            <a:endParaRPr lang="en-US" sz="3800" dirty="0"/>
+          </a:p>
+        </p:txBody>
+      </p:sp>
+      <p:sp>
+        <p:nvSpPr>
+          <p:cNvPr id="8" name="Text 6"/>
+          <p:cNvSpPr txBox="1"/>
+          <p:nvPr/>
+        </p:nvSpPr>
+        <p:spPr>
+          <a:xfrm>
+            <a:off x="3931920" y="4800600"/>
+            <a:ext cx="3108960" cy="320040"/>
+          </a:xfrm>
+          <a:prstGeom prst="rect">
+            <a:avLst/>
+          </a:prstGeom>
+          <a:noFill/>
+          <a:ln/>
+        </p:spPr>
+        <p:txBody>
+          <a:bodyPr wrap="square" lIns="0" tIns="0" rIns="0" bIns="0" rtlCol="0" anchor="t"/>
+          <a:lstStyle/>
+          <a:p>
+            <a:pPr indent="0" marL="0">
+              <a:buNone/>
+            </a:pPr>
+            <a:r>
+              <a:rPr lang="en-US" sz="1300" dirty="0">
+                <a:solidFill>
+                  <a:srgbClr val="E3EDF8"/>
+                </a:solidFill>
+                <a:latin typeface="Calibri" pitchFamily="34" charset="0"/>
+                <a:ea typeface="Calibri" pitchFamily="34" charset="-122"/>
+                <a:cs typeface="Calibri" pitchFamily="34" charset="-120"/>
+              </a:rPr>
+              <a:t>Next-30 F1 gain, 5 % labels</a:t>
+            </a:r>
+            <a:endParaRPr lang="en-US" sz="1300" dirty="0"/>
+          </a:p>
+        </p:txBody>
+      </p:sp>
+      <p:sp>
+        <p:nvSpPr>
+          <p:cNvPr id="9" name="Text 7"/>
+          <p:cNvSpPr txBox="1"/>
+          <p:nvPr/>
+        </p:nvSpPr>
+        <p:spPr>
+          <a:xfrm>
+            <a:off x="7223760" y="4069080"/>
+            <a:ext cx="3108960" cy="685800"/>
+          </a:xfrm>
+          <a:prstGeom prst="rect">
+            <a:avLst/>
+          </a:prstGeom>
+          <a:noFill/>
+          <a:ln/>
+        </p:spPr>
+        <p:txBody>
+          <a:bodyPr wrap="square" lIns="0" tIns="0" rIns="0" bIns="0" rtlCol="0" anchor="ctr"/>
+          <a:lstStyle/>
+          <a:p>
+            <a:pPr indent="0" marL="0">
+              <a:buNone/>
+            </a:pPr>
+            <a:r>
+              <a:rPr lang="en-US" sz="3800" b="1" dirty="0">
+                <a:solidFill>
+                  <a:srgbClr val="FFFFFF"/>
+                </a:solidFill>
+                <a:latin typeface="Cambria" pitchFamily="34" charset="0"/>
+                <a:ea typeface="Cambria" pitchFamily="34" charset="-122"/>
+                <a:cs typeface="Cambria" pitchFamily="34" charset="-120"/>
+              </a:rPr>
+              <a:t>0.70–0.82</a:t>
+            </a:r>
+            <a:endParaRPr lang="en-US" sz="3800" dirty="0"/>
+          </a:p>
+        </p:txBody>
+      </p:sp>
+      <p:sp>
+        <p:nvSpPr>
+          <p:cNvPr id="10" name="Text 8"/>
+          <p:cNvSpPr txBox="1"/>
+          <p:nvPr/>
+        </p:nvSpPr>
+        <p:spPr>
+          <a:xfrm>
+            <a:off x="7223760" y="4800600"/>
+            <a:ext cx="3108960" cy="320040"/>
+          </a:xfrm>
+          <a:prstGeom prst="rect">
+            <a:avLst/>
+          </a:prstGeom>
+          <a:noFill/>
+          <a:ln/>
+        </p:spPr>
+        <p:txBody>
+          <a:bodyPr wrap="square" lIns="0" tIns="0" rIns="0" bIns="0" rtlCol="0" anchor="t"/>
+          <a:lstStyle/>
+          <a:p>
+            <a:pPr indent="0" marL="0">
+              <a:buNone/>
+            </a:pPr>
+            <a:r>
+              <a:rPr lang="en-US" sz="1300" dirty="0">
+                <a:solidFill>
+                  <a:srgbClr val="E3EDF8"/>
+                </a:solidFill>
+                <a:latin typeface="Calibri" pitchFamily="34" charset="0"/>
+                <a:ea typeface="Calibri" pitchFamily="34" charset="-122"/>
+                <a:cs typeface="Calibri" pitchFamily="34" charset="-120"/>
+              </a:rPr>
+              <a:t>Training loss held, no collapse</a:t>
+            </a:r>
+            <a:endParaRPr lang="en-US" sz="1300" dirty="0"/>
+          </a:p>
+        </p:txBody>
+      </p:sp>
+      <p:sp>
+        <p:nvSpPr>
+          <p:cNvPr id="11" name="Text 9"/>
+          <p:cNvSpPr txBox="1"/>
+          <p:nvPr/>
+        </p:nvSpPr>
+        <p:spPr>
+          <a:xfrm>
+            <a:off x="640080" y="6355080"/>
+            <a:ext cx="10911535" cy="274320"/>
+          </a:xfrm>
+          <a:prstGeom prst="rect">
+            <a:avLst/>
+          </a:prstGeom>
+          <a:noFill/>
+          <a:ln/>
+        </p:spPr>
+        <p:txBody>
+          <a:bodyPr wrap="square" lIns="0" tIns="0" rIns="0" bIns="0" rtlCol="0" anchor="ctr"/>
+          <a:lstStyle/>
+          <a:p>
+            <a:pPr indent="0" marL="0">
+              <a:buNone/>
+            </a:pPr>
+            <a:r>
+              <a:rPr lang="en-US" sz="1100" dirty="0">
+                <a:solidFill>
+                  <a:srgbClr val="E3EDF8"/>
+                </a:solidFill>
+                <a:latin typeface="Calibri" pitchFamily="34" charset="0"/>
+                <a:ea typeface="Calibri" pitchFamily="34" charset="-122"/>
+                <a:cs typeface="Calibri" pitchFamily="34" charset="-120"/>
+              </a:rPr>
+              <a:t>DomusFM reproduction · 2</a:t>
+            </a:r>
+            <a:endParaRPr lang="en-US" sz="1100" dirty="0"/>
+          </a:p>
+        </p:txBody>
+      </p:sp>
+    </p:spTree>
+  </p:cSld>
+  <p:clrMapOvr>
+    <a:masterClrMapping/>
+  </p:clrMapOvr>
+</p:sld>
+</file>
+
+<file path=ppt/slides/slide20.xml><?xml version="1.0" encoding="utf-8"?>
+<p:sld xmlns:a="http://schemas.openxmlformats.org/drawingml/2006/main" xmlns:r="http://schemas.openxmlformats.org/officeDocument/2006/relationships" xmlns:p="http://schemas.openxmlformats.org/presentationml/2006/main">
+  <p:cSld name="Slide 20">
+    <p:bg>
+      <p:bgPr>
+        <a:solidFill>
+          <a:srgbClr val="EEF1F5"/>
+        </a:solidFill>
+      </p:bgPr>
+    </p:bg>
+    <p:spTree>
+      <p:nvGrpSpPr>
+        <p:cNvPr id="1" name=""/>
+        <p:cNvGrpSpPr/>
+        <p:nvPr/>
+      </p:nvGrpSpPr>
+      <p:grpSpPr>
+        <a:xfrm>
+          <a:off x="0" y="0"/>
+          <a:ext cx="0" cy="0"/>
+          <a:chOff x="0" y="0"/>
+          <a:chExt cx="0" cy="0"/>
+        </a:xfrm>
+      </p:grpSpPr>
+      <p:sp>
+        <p:nvSpPr>
+          <p:cNvPr id="2" name="Text 0"/>
+          <p:cNvSpPr txBox="1"/>
+          <p:nvPr/>
+        </p:nvSpPr>
+        <p:spPr>
+          <a:xfrm>
+            <a:off x="640080" y="457200"/>
+            <a:ext cx="10911535" cy="274320"/>
+          </a:xfrm>
+          <a:prstGeom prst="rect">
+            <a:avLst/>
+          </a:prstGeom>
+          <a:noFill/>
+          <a:ln/>
+        </p:spPr>
+        <p:txBody>
+          <a:bodyPr wrap="square" lIns="0" tIns="0" rIns="0" bIns="0" rtlCol="0" anchor="ctr"/>
+          <a:lstStyle/>
+          <a:p>
+            <a:pPr indent="0" marL="0">
+              <a:buNone/>
+            </a:pPr>
+            <a:r>
+              <a:rPr lang="en-US" sz="1200" b="1" spc="200" kern="0" dirty="0">
+                <a:solidFill>
+                  <a:srgbClr val="2F6FB0"/>
+                </a:solidFill>
+                <a:latin typeface="Calibri" pitchFamily="34" charset="0"/>
+                <a:ea typeface="Calibri" pitchFamily="34" charset="-122"/>
+                <a:cs typeface="Calibri" pitchFamily="34" charset="-120"/>
+              </a:rPr>
+              <a:t>L11 IN OUR OWN RUNS · SAME MODEL, SAME 77 HOMES</a:t>
+            </a:r>
+            <a:endParaRPr lang="en-US" sz="1200" dirty="0"/>
+          </a:p>
+        </p:txBody>
+      </p:sp>
+      <p:sp>
+        <p:nvSpPr>
+          <p:cNvPr id="3" name="Text 1"/>
+          <p:cNvSpPr txBox="1"/>
+          <p:nvPr/>
+        </p:nvSpPr>
+        <p:spPr>
+          <a:xfrm>
+            <a:off x="640080" y="749808"/>
+            <a:ext cx="10911535" cy="685800"/>
+          </a:xfrm>
+          <a:prstGeom prst="rect">
+            <a:avLst/>
+          </a:prstGeom>
+          <a:noFill/>
+          <a:ln/>
+        </p:spPr>
+        <p:txBody>
+          <a:bodyPr wrap="square" lIns="0" tIns="0" rIns="0" bIns="0" rtlCol="0" anchor="ctr"/>
+          <a:lstStyle/>
+          <a:p>
+            <a:pPr indent="0" marL="0">
+              <a:buNone/>
+            </a:pPr>
+            <a:r>
+              <a:rPr lang="en-US" sz="3600" b="1" dirty="0">
+                <a:solidFill>
+                  <a:srgbClr val="14213D"/>
+                </a:solidFill>
+                <a:latin typeface="Cambria" pitchFamily="34" charset="0"/>
+                <a:ea typeface="Cambria" pitchFamily="34" charset="-122"/>
+                <a:cs typeface="Cambria" pitchFamily="34" charset="-120"/>
+              </a:rPr>
+              <a:t>An easy game hurts; a harder one helps</a:t>
+            </a:r>
+            <a:endParaRPr lang="en-US" sz="3600" dirty="0"/>
+          </a:p>
+        </p:txBody>
+      </p:sp>
+      <p:graphicFrame>
+        <p:nvGraphicFramePr>
+          <p:cNvPr id="21" name="Table 0"/>
+          <p:cNvGraphicFramePr>
+            <a:graphicFrameLocks noGrp="1"/>
+          </p:cNvGraphicFramePr>
+          <p:nvPr>
+            <p:extLst>
+              <p:ext uri="{D42A27DB-BD31-4B8C-83A1-F6EECF244321}">
+                <p14:modId xmlns:p14="http://schemas.microsoft.com/office/powerpoint/2010/main" val="1579011935"/>
+              </p:ext>
+            </p:extLst>
+          </p:nvPr>
+        </p:nvGraphicFramePr>
+        <p:xfrm>
+          <a:off x="640080" y="1691640"/>
+          <a:ext cx="10911535" cy="914400"/>
+        </p:xfrm>
+        <a:graphic>
+          <a:graphicData uri="http://schemas.openxmlformats.org/drawingml/2006/table">
+            <a:tbl>
+              <a:tblPr/>
+              <a:tblGrid>
+                <a:gridCol w="5056632"/>
+                <a:gridCol w="2926080"/>
+                <a:gridCol w="2926080"/>
+              </a:tblGrid>
+              <a:tr h="457200">
+                <a:tc>
+                  <a:txBody>
+                    <a:bodyPr/>
+                    <a:lstStyle/>
+                    <a:p>
+                      <a:pPr algn="l" indent="0" marL="0">
+                        <a:buNone/>
+                      </a:pPr>
+                      <a:r>
+                        <a:rPr lang="en-US" sz="1600" b="1" dirty="0">
+                          <a:solidFill>
+                            <a:srgbClr val="14213D"/>
+                          </a:solidFill>
+                          <a:latin typeface="Calibri" pitchFamily="34" charset="0"/>
+                          <a:ea typeface="Calibri" pitchFamily="34" charset="-122"/>
+                          <a:cs typeface="Calibri" pitchFamily="34" charset="-120"/>
+                        </a:rPr>
+                        <a:t>Measure</a:t>
+                      </a:r>
+                      <a:endParaRPr lang="en-US" sz="1600" dirty="0">
+                        <a:latin typeface="Calibri" charset="0"/>
+                        <a:ea typeface="Calibri" charset="0"/>
+                        <a:cs typeface="Calibri" charset="0"/>
+                      </a:endParaRPr>
+                    </a:p>
+                  </a:txBody>
+                  <a:tcPr marL="73152" marR="73152" marT="36576" marB="36576" anchor="ctr">
+                    <a:lnL w="9525" cap="flat" cmpd="sng" algn="ctr">
+                      <a:solidFill>
+                        <a:srgbClr val="C9CFD8"/>
+                      </a:solidFill>
+                      <a:prstDash val="solid"/>
+                      <a:round/>
+                      <a:headEnd type="none" w="med" len="med"/>
+                      <a:tailEnd type="none" w="med" len="med"/>
+                    </a:lnL>
+                    <a:lnR w="9525" cap="flat" cmpd="sng" algn="ctr">
+                      <a:solidFill>
+                        <a:srgbClr val="C9CFD8"/>
+                      </a:solidFill>
+                      <a:prstDash val="solid"/>
+                      <a:round/>
+                      <a:headEnd type="none" w="med" len="med"/>
+                      <a:tailEnd type="none" w="med" len="med"/>
+                    </a:lnR>
+                    <a:lnT w="9525" cap="flat" cmpd="sng" algn="ctr">
+                      <a:solidFill>
+                        <a:srgbClr val="C9CFD8"/>
+                      </a:solidFill>
+                      <a:prstDash val="solid"/>
+                      <a:round/>
+                      <a:headEnd type="none" w="med" len="med"/>
+                      <a:tailEnd type="none" w="med" len="med"/>
+                    </a:lnT>
+                    <a:lnB w="9525" cap="flat" cmpd="sng" algn="ctr">
+                      <a:solidFill>
+                        <a:srgbClr val="C9CFD8"/>
+                      </a:solidFill>
+                      <a:prstDash val="solid"/>
+                      <a:round/>
+                      <a:headEnd type="none" w="med" len="med"/>
+                      <a:tailEnd type="none" w="med" len="med"/>
+                    </a:lnB>
+                    <a:solidFill>
+                      <a:srgbClr val="DDE3EC"/>
+                    </a:solidFill>
+                  </a:tcPr>
+                </a:tc>
+                <a:tc>
+                  <a:txBody>
+                    <a:bodyPr/>
+                    <a:lstStyle/>
+                    <a:p>
+                      <a:pPr algn="r" indent="0" marL="0">
+                        <a:buNone/>
+                      </a:pPr>
+                      <a:r>
+                        <a:rPr lang="en-US" sz="1600" b="1" dirty="0">
+                          <a:solidFill>
+                            <a:srgbClr val="14213D"/>
+                          </a:solidFill>
+                          <a:latin typeface="Calibri" pitchFamily="34" charset="0"/>
+                          <a:ea typeface="Calibri" pitchFamily="34" charset="-122"/>
+                          <a:cs typeface="Calibri" pitchFamily="34" charset="-120"/>
+                        </a:rPr>
+                        <a:t>Paper's game</a:t>
+                      </a:r>
+                      <a:endParaRPr lang="en-US" sz="1600" dirty="0">
+                        <a:latin typeface="Calibri" charset="0"/>
+                        <a:ea typeface="Calibri" charset="0"/>
+                        <a:cs typeface="Calibri" charset="0"/>
+                      </a:endParaRPr>
+                    </a:p>
+                  </a:txBody>
+                  <a:tcPr marL="73152" marR="73152" marT="36576" marB="36576" anchor="ctr">
+                    <a:lnL w="9525" cap="flat" cmpd="sng" algn="ctr">
+                      <a:solidFill>
+                        <a:srgbClr val="C9CFD8"/>
+                      </a:solidFill>
+                      <a:prstDash val="solid"/>
+                      <a:round/>
+                      <a:headEnd type="none" w="med" len="med"/>
+                      <a:tailEnd type="none" w="med" len="med"/>
+                    </a:lnL>
+                    <a:lnR w="9525" cap="flat" cmpd="sng" algn="ctr">
+                      <a:solidFill>
+                        <a:srgbClr val="C9CFD8"/>
+                      </a:solidFill>
+                      <a:prstDash val="solid"/>
+                      <a:round/>
+                      <a:headEnd type="none" w="med" len="med"/>
+                      <a:tailEnd type="none" w="med" len="med"/>
+                    </a:lnR>
+                    <a:lnT w="9525" cap="flat" cmpd="sng" algn="ctr">
+                      <a:solidFill>
+                        <a:srgbClr val="C9CFD8"/>
+                      </a:solidFill>
+                      <a:prstDash val="solid"/>
+                      <a:round/>
+                      <a:headEnd type="none" w="med" len="med"/>
+                      <a:tailEnd type="none" w="med" len="med"/>
+                    </a:lnT>
+                    <a:lnB w="9525" cap="flat" cmpd="sng" algn="ctr">
+                      <a:solidFill>
+                        <a:srgbClr val="C9CFD8"/>
+                      </a:solidFill>
+                      <a:prstDash val="solid"/>
+                      <a:round/>
+                      <a:headEnd type="none" w="med" len="med"/>
+                      <a:tailEnd type="none" w="med" len="med"/>
+                    </a:lnB>
+                    <a:solidFill>
+                      <a:srgbClr val="DDE3EC"/>
+                    </a:solidFill>
+                  </a:tcPr>
+                </a:tc>
+                <a:tc>
+                  <a:txBody>
+                    <a:bodyPr/>
+                    <a:lstStyle/>
+                    <a:p>
+                      <a:pPr algn="r" indent="0" marL="0">
+                        <a:buNone/>
+                      </a:pPr>
+                      <a:r>
+                        <a:rPr lang="en-US" sz="1600" b="1" dirty="0">
+                          <a:solidFill>
+                            <a:srgbClr val="14213D"/>
+                          </a:solidFill>
+                          <a:latin typeface="Calibri" pitchFamily="34" charset="0"/>
+                          <a:ea typeface="Calibri" pitchFamily="34" charset="-122"/>
+                          <a:cs typeface="Calibri" pitchFamily="34" charset="-120"/>
+                        </a:rPr>
+                        <a:t>Harder game</a:t>
+                      </a:r>
+                      <a:endParaRPr lang="en-US" sz="1600" dirty="0">
+                        <a:latin typeface="Calibri" charset="0"/>
+                        <a:ea typeface="Calibri" charset="0"/>
+                        <a:cs typeface="Calibri" charset="0"/>
+                      </a:endParaRPr>
+                    </a:p>
+                  </a:txBody>
+                  <a:tcPr marL="73152" marR="73152" marT="36576" marB="36576" anchor="ctr">
+                    <a:lnL w="9525" cap="flat" cmpd="sng" algn="ctr">
+                      <a:solidFill>
+                        <a:srgbClr val="C9CFD8"/>
+                      </a:solidFill>
+                      <a:prstDash val="solid"/>
+                      <a:round/>
+                      <a:headEnd type="none" w="med" len="med"/>
+                      <a:tailEnd type="none" w="med" len="med"/>
+                    </a:lnL>
+                    <a:lnR w="9525" cap="flat" cmpd="sng" algn="ctr">
+                      <a:solidFill>
+                        <a:srgbClr val="C9CFD8"/>
+                      </a:solidFill>
+                      <a:prstDash val="solid"/>
+                      <a:round/>
+                      <a:headEnd type="none" w="med" len="med"/>
+                      <a:tailEnd type="none" w="med" len="med"/>
+                    </a:lnR>
+                    <a:lnT w="9525" cap="flat" cmpd="sng" algn="ctr">
+                      <a:solidFill>
+                        <a:srgbClr val="C9CFD8"/>
+                      </a:solidFill>
+                      <a:prstDash val="solid"/>
+                      <a:round/>
+                      <a:headEnd type="none" w="med" len="med"/>
+                      <a:tailEnd type="none" w="med" len="med"/>
+                    </a:lnT>
+                    <a:lnB w="9525" cap="flat" cmpd="sng" algn="ctr">
+                      <a:solidFill>
+                        <a:srgbClr val="C9CFD8"/>
+                      </a:solidFill>
+                      <a:prstDash val="solid"/>
+                      <a:round/>
+                      <a:headEnd type="none" w="med" len="med"/>
+                      <a:tailEnd type="none" w="med" len="med"/>
+                    </a:lnB>
+                    <a:solidFill>
+                      <a:srgbClr val="DDE3EC"/>
+                    </a:solidFill>
+                  </a:tcPr>
+                </a:tc>
+              </a:tr>
+              <a:tr h="457200">
+                <a:tc>
+                  <a:txBody>
+                    <a:bodyPr/>
+                    <a:lstStyle/>
+                    <a:p>
+                      <a:pPr indent="0" marL="0">
+                        <a:buNone/>
+                      </a:pPr>
+                      <a:r>
+                        <a:rPr lang="en-US" sz="1600" dirty="0">
+                          <a:solidFill>
+                            <a:srgbClr val="14213D"/>
+                          </a:solidFill>
+                          <a:latin typeface="Calibri" pitchFamily="34" charset="0"/>
+                          <a:ea typeface="Calibri" pitchFamily="34" charset="-122"/>
+                          <a:cs typeface="Calibri" pitchFamily="34" charset="-120"/>
+                        </a:rPr>
+                        <a:t>Matching loss, end of training</a:t>
+                      </a:r>
+                      <a:endParaRPr lang="en-US" sz="1600" dirty="0">
+                        <a:latin typeface="Calibri" charset="0"/>
+                        <a:ea typeface="Calibri" charset="0"/>
+                        <a:cs typeface="Calibri" charset="0"/>
+                      </a:endParaRPr>
+                    </a:p>
+                  </a:txBody>
+                  <a:tcPr marL="73152" marR="73152" marT="36576" marB="36576" anchor="ctr">
+                    <a:lnL w="9525" cap="flat" cmpd="sng" algn="ctr">
+                      <a:solidFill>
+                        <a:srgbClr val="C9CFD8"/>
+                      </a:solidFill>
+                      <a:prstDash val="solid"/>
+                      <a:round/>
+                      <a:headEnd type="none" w="med" len="med"/>
+                      <a:tailEnd type="none" w="med" len="med"/>
+                    </a:lnL>
+                    <a:lnR w="9525" cap="flat" cmpd="sng" algn="ctr">
+                      <a:solidFill>
+                        <a:srgbClr val="C9CFD8"/>
+                      </a:solidFill>
+                      <a:prstDash val="solid"/>
+                      <a:round/>
+                      <a:headEnd type="none" w="med" len="med"/>
+                      <a:tailEnd type="none" w="med" len="med"/>
+                    </a:lnR>
+                    <a:lnT w="9525" cap="flat" cmpd="sng" algn="ctr">
+                      <a:solidFill>
+                        <a:srgbClr val="C9CFD8"/>
+                      </a:solidFill>
+                      <a:prstDash val="solid"/>
+                      <a:round/>
+                      <a:headEnd type="none" w="med" len="med"/>
+                      <a:tailEnd type="none" w="med" len="med"/>
+                    </a:lnT>
+                    <a:lnB w="9525" cap="flat" cmpd="sng" algn="ctr">
+                      <a:solidFill>
+                        <a:srgbClr val="C9CFD8"/>
+                      </a:solidFill>
+                      <a:prstDash val="solid"/>
+                      <a:round/>
+                      <a:headEnd type="none" w="med" len="med"/>
+                      <a:tailEnd type="none" w="med" len="med"/>
+                    </a:lnB>
+                    <a:solidFill>
+                      <a:srgbClr val="FFFFFF"/>
+                    </a:solidFill>
+                  </a:tcPr>
+                </a:tc>
+                <a:tc>
+                  <a:txBody>
+                    <a:bodyPr/>
+                    <a:lstStyle/>
+                    <a:p>
+                      <a:pPr algn="r" indent="0" marL="0">
+                        <a:buNone/>
+                      </a:pPr>
+                      <a:r>
+                        <a:rPr lang="en-US" sz="1600" b="1" dirty="0">
+                          <a:solidFill>
+                            <a:srgbClr val="A4520F"/>
+                          </a:solidFill>
+                          <a:latin typeface="Calibri" pitchFamily="34" charset="0"/>
+                          <a:ea typeface="Calibri" pitchFamily="34" charset="-122"/>
+                          <a:cs typeface="Calibri" pitchFamily="34" charset="-120"/>
+                        </a:rPr>
+                        <a:t>about 0.0005</a:t>
+                      </a:r>
+                      <a:endParaRPr lang="en-US" sz="1600" dirty="0">
+                        <a:latin typeface="Calibri" charset="0"/>
+                        <a:ea typeface="Calibri" charset="0"/>
+                        <a:cs typeface="Calibri" charset="0"/>
+                      </a:endParaRPr>
+                    </a:p>
+                  </a:txBody>
+                  <a:tcPr marL="73152" marR="73152" marT="36576" marB="36576" anchor="ctr">
+                    <a:lnL w="9525" cap="flat" cmpd="sng" algn="ctr">
+                      <a:solidFill>
+                        <a:srgbClr val="C9CFD8"/>
+                      </a:solidFill>
+                      <a:prstDash val="solid"/>
+                      <a:round/>
+                      <a:headEnd type="none" w="med" len="med"/>
+                      <a:tailEnd type="none" w="med" len="med"/>
+                    </a:lnL>
+                    <a:lnR w="9525" cap="flat" cmpd="sng" algn="ctr">
+                      <a:solidFill>
+                        <a:srgbClr val="C9CFD8"/>
+                      </a:solidFill>
+                      <a:prstDash val="solid"/>
+                      <a:round/>
+                      <a:headEnd type="none" w="med" len="med"/>
+                      <a:tailEnd type="none" w="med" len="med"/>
+                    </a:lnR>
+                    <a:lnT w="9525" cap="flat" cmpd="sng" algn="ctr">
+                      <a:solidFill>
+                        <a:srgbClr val="C9CFD8"/>
+                      </a:solidFill>
+                      <a:prstDash val="solid"/>
+                      <a:round/>
+                      <a:headEnd type="none" w="med" len="med"/>
+                      <a:tailEnd type="none" w="med" len="med"/>
+                    </a:lnT>
+                    <a:lnB w="9525" cap="flat" cmpd="sng" algn="ctr">
+                      <a:solidFill>
+                        <a:srgbClr val="C9CFD8"/>
+                      </a:solidFill>
+                      <a:prstDash val="solid"/>
+                      <a:round/>
+                      <a:headEnd type="none" w="med" len="med"/>
+                      <a:tailEnd type="none" w="med" len="med"/>
+                    </a:lnB>
+                    <a:solidFill>
+                      <a:srgbClr val="FFFFFF"/>
+                    </a:solidFill>
+                  </a:tcPr>
+                </a:tc>
+                <a:tc>
+                  <a:txBody>
+                    <a:bodyPr/>
+                    <a:lstStyle/>
+                    <a:p>
+                      <a:pPr algn="r" indent="0" marL="0">
+                        <a:buNone/>
+                      </a:pPr>
+                      <a:r>
+                        <a:rPr lang="en-US" sz="1600" b="1" dirty="0">
+                          <a:solidFill>
+                            <a:srgbClr val="1F5A96"/>
+                          </a:solidFill>
+                          <a:latin typeface="Calibri" pitchFamily="34" charset="0"/>
+                          <a:ea typeface="Calibri" pitchFamily="34" charset="-122"/>
+                          <a:cs typeface="Calibri" pitchFamily="34" charset="-120"/>
+                        </a:rPr>
+                        <a:t>0.70–0.82</a:t>
+                      </a:r>
+                      <a:endParaRPr lang="en-US" sz="1600" dirty="0">
+                        <a:latin typeface="Calibri" charset="0"/>
+                        <a:ea typeface="Calibri" charset="0"/>
+                        <a:cs typeface="Calibri" charset="0"/>
+                      </a:endParaRPr>
+                    </a:p>
+                  </a:txBody>
+                  <a:tcPr marL="73152" marR="73152" marT="36576" marB="36576" anchor="ctr">
+                    <a:lnL w="9525" cap="flat" cmpd="sng" algn="ctr">
+                      <a:solidFill>
+                        <a:srgbClr val="C9CFD8"/>
+                      </a:solidFill>
+                      <a:prstDash val="solid"/>
+                      <a:round/>
+                      <a:headEnd type="none" w="med" len="med"/>
+                      <a:tailEnd type="none" w="med" len="med"/>
+                    </a:lnL>
+                    <a:lnR w="9525" cap="flat" cmpd="sng" algn="ctr">
+                      <a:solidFill>
+                        <a:srgbClr val="C9CFD8"/>
+                      </a:solidFill>
+                      <a:prstDash val="solid"/>
+                      <a:round/>
+                      <a:headEnd type="none" w="med" len="med"/>
+                      <a:tailEnd type="none" w="med" len="med"/>
+                    </a:lnR>
+                    <a:lnT w="9525" cap="flat" cmpd="sng" algn="ctr">
+                      <a:solidFill>
+                        <a:srgbClr val="C9CFD8"/>
+                      </a:solidFill>
+                      <a:prstDash val="solid"/>
+                      <a:round/>
+                      <a:headEnd type="none" w="med" len="med"/>
+                      <a:tailEnd type="none" w="med" len="med"/>
+                    </a:lnT>
+                    <a:lnB w="9525" cap="flat" cmpd="sng" algn="ctr">
+                      <a:solidFill>
+                        <a:srgbClr val="C9CFD8"/>
+                      </a:solidFill>
+                      <a:prstDash val="solid"/>
+                      <a:round/>
+                      <a:headEnd type="none" w="med" len="med"/>
+                      <a:tailEnd type="none" w="med" len="med"/>
+                    </a:lnB>
+                    <a:solidFill>
+                      <a:srgbClr val="FFFFFF"/>
+                    </a:solidFill>
+                  </a:tcPr>
+                </a:tc>
+              </a:tr>
+              <a:tr h="457200">
+                <a:tc>
+                  <a:txBody>
+                    <a:bodyPr/>
+                    <a:lstStyle/>
+                    <a:p>
+                      <a:pPr indent="0" marL="0">
+                        <a:buNone/>
+                      </a:pPr>
+                      <a:r>
+                        <a:rPr lang="en-US" sz="1600" dirty="0">
+                          <a:solidFill>
+                            <a:srgbClr val="14213D"/>
+                          </a:solidFill>
+                          <a:latin typeface="Calibri" pitchFamily="34" charset="0"/>
+                          <a:ea typeface="Calibri" pitchFamily="34" charset="-122"/>
+                          <a:cs typeface="Calibri" pitchFamily="34" charset="-120"/>
+                        </a:rPr>
+                        <a:t>Settings where pretraining wins</a:t>
+                      </a:r>
+                      <a:endParaRPr lang="en-US" sz="1600" dirty="0">
+                        <a:latin typeface="Calibri" charset="0"/>
+                        <a:ea typeface="Calibri" charset="0"/>
+                        <a:cs typeface="Calibri" charset="0"/>
+                      </a:endParaRPr>
+                    </a:p>
+                  </a:txBody>
+                  <a:tcPr marL="73152" marR="73152" marT="36576" marB="36576" anchor="ctr">
+                    <a:lnL w="9525" cap="flat" cmpd="sng" algn="ctr">
+                      <a:solidFill>
+                        <a:srgbClr val="C9CFD8"/>
+                      </a:solidFill>
+                      <a:prstDash val="solid"/>
+                      <a:round/>
+                      <a:headEnd type="none" w="med" len="med"/>
+                      <a:tailEnd type="none" w="med" len="med"/>
+                    </a:lnL>
+                    <a:lnR w="9525" cap="flat" cmpd="sng" algn="ctr">
+                      <a:solidFill>
+                        <a:srgbClr val="C9CFD8"/>
+                      </a:solidFill>
+                      <a:prstDash val="solid"/>
+                      <a:round/>
+                      <a:headEnd type="none" w="med" len="med"/>
+                      <a:tailEnd type="none" w="med" len="med"/>
+                    </a:lnR>
+                    <a:lnT w="9525" cap="flat" cmpd="sng" algn="ctr">
+                      <a:solidFill>
+                        <a:srgbClr val="C9CFD8"/>
+                      </a:solidFill>
+                      <a:prstDash val="solid"/>
+                      <a:round/>
+                      <a:headEnd type="none" w="med" len="med"/>
+                      <a:tailEnd type="none" w="med" len="med"/>
+                    </a:lnT>
+                    <a:lnB w="9525" cap="flat" cmpd="sng" algn="ctr">
+                      <a:solidFill>
+                        <a:srgbClr val="C9CFD8"/>
+                      </a:solidFill>
+                      <a:prstDash val="solid"/>
+                      <a:round/>
+                      <a:headEnd type="none" w="med" len="med"/>
+                      <a:tailEnd type="none" w="med" len="med"/>
+                    </a:lnB>
+                    <a:solidFill>
+                      <a:srgbClr val="FFFFFF"/>
+                    </a:solidFill>
+                  </a:tcPr>
+                </a:tc>
+                <a:tc>
+                  <a:txBody>
+                    <a:bodyPr/>
+                    <a:lstStyle/>
+                    <a:p>
+                      <a:pPr algn="r" indent="0" marL="0">
+                        <a:buNone/>
+                      </a:pPr>
+                      <a:r>
+                        <a:rPr lang="en-US" sz="1600" b="1" dirty="0">
+                          <a:solidFill>
+                            <a:srgbClr val="A4520F"/>
+                          </a:solidFill>
+                          <a:latin typeface="Calibri" pitchFamily="34" charset="0"/>
+                          <a:ea typeface="Calibri" pitchFamily="34" charset="-122"/>
+                          <a:cs typeface="Calibri" pitchFamily="34" charset="-120"/>
+                        </a:rPr>
+                        <a:t>6 of 28</a:t>
+                      </a:r>
+                      <a:endParaRPr lang="en-US" sz="1600" dirty="0">
+                        <a:latin typeface="Calibri" charset="0"/>
+                        <a:ea typeface="Calibri" charset="0"/>
+                        <a:cs typeface="Calibri" charset="0"/>
+                      </a:endParaRPr>
+                    </a:p>
+                  </a:txBody>
+                  <a:tcPr marL="73152" marR="73152" marT="36576" marB="36576" anchor="ctr">
+                    <a:lnL w="9525" cap="flat" cmpd="sng" algn="ctr">
+                      <a:solidFill>
+                        <a:srgbClr val="C9CFD8"/>
+                      </a:solidFill>
+                      <a:prstDash val="solid"/>
+                      <a:round/>
+                      <a:headEnd type="none" w="med" len="med"/>
+                      <a:tailEnd type="none" w="med" len="med"/>
+                    </a:lnL>
+                    <a:lnR w="9525" cap="flat" cmpd="sng" algn="ctr">
+                      <a:solidFill>
+                        <a:srgbClr val="C9CFD8"/>
+                      </a:solidFill>
+                      <a:prstDash val="solid"/>
+                      <a:round/>
+                      <a:headEnd type="none" w="med" len="med"/>
+                      <a:tailEnd type="none" w="med" len="med"/>
+                    </a:lnR>
+                    <a:lnT w="9525" cap="flat" cmpd="sng" algn="ctr">
+                      <a:solidFill>
+                        <a:srgbClr val="C9CFD8"/>
+                      </a:solidFill>
+                      <a:prstDash val="solid"/>
+                      <a:round/>
+                      <a:headEnd type="none" w="med" len="med"/>
+                      <a:tailEnd type="none" w="med" len="med"/>
+                    </a:lnT>
+                    <a:lnB w="9525" cap="flat" cmpd="sng" algn="ctr">
+                      <a:solidFill>
+                        <a:srgbClr val="C9CFD8"/>
+                      </a:solidFill>
+                      <a:prstDash val="solid"/>
+                      <a:round/>
+                      <a:headEnd type="none" w="med" len="med"/>
+                      <a:tailEnd type="none" w="med" len="med"/>
+                    </a:lnB>
+                    <a:solidFill>
+                      <a:srgbClr val="FFFFFF"/>
+                    </a:solidFill>
+                  </a:tcPr>
+                </a:tc>
+                <a:tc>
+                  <a:txBody>
+                    <a:bodyPr/>
+                    <a:lstStyle/>
+                    <a:p>
+                      <a:pPr algn="r" indent="0" marL="0">
+                        <a:buNone/>
+                      </a:pPr>
+                      <a:r>
+                        <a:rPr lang="en-US" sz="1600" b="1" dirty="0">
+                          <a:solidFill>
+                            <a:srgbClr val="1F5A96"/>
+                          </a:solidFill>
+                          <a:latin typeface="Calibri" pitchFamily="34" charset="0"/>
+                          <a:ea typeface="Calibri" pitchFamily="34" charset="-122"/>
+                          <a:cs typeface="Calibri" pitchFamily="34" charset="-120"/>
+                        </a:rPr>
+                        <a:t>26 of 28</a:t>
+                      </a:r>
+                      <a:endParaRPr lang="en-US" sz="1600" dirty="0">
+                        <a:latin typeface="Calibri" charset="0"/>
+                        <a:ea typeface="Calibri" charset="0"/>
+                        <a:cs typeface="Calibri" charset="0"/>
+                      </a:endParaRPr>
+                    </a:p>
+                  </a:txBody>
+                  <a:tcPr marL="73152" marR="73152" marT="36576" marB="36576" anchor="ctr">
+                    <a:lnL w="9525" cap="flat" cmpd="sng" algn="ctr">
+                      <a:solidFill>
+                        <a:srgbClr val="C9CFD8"/>
+                      </a:solidFill>
+                      <a:prstDash val="solid"/>
+                      <a:round/>
+                      <a:headEnd type="none" w="med" len="med"/>
+                      <a:tailEnd type="none" w="med" len="med"/>
+                    </a:lnL>
+                    <a:lnR w="9525" cap="flat" cmpd="sng" algn="ctr">
+                      <a:solidFill>
+                        <a:srgbClr val="C9CFD8"/>
+                      </a:solidFill>
+                      <a:prstDash val="solid"/>
+                      <a:round/>
+                      <a:headEnd type="none" w="med" len="med"/>
+                      <a:tailEnd type="none" w="med" len="med"/>
+                    </a:lnR>
+                    <a:lnT w="9525" cap="flat" cmpd="sng" algn="ctr">
+                      <a:solidFill>
+                        <a:srgbClr val="C9CFD8"/>
+                      </a:solidFill>
+                      <a:prstDash val="solid"/>
+                      <a:round/>
+                      <a:headEnd type="none" w="med" len="med"/>
+                      <a:tailEnd type="none" w="med" len="med"/>
+                    </a:lnT>
+                    <a:lnB w="9525" cap="flat" cmpd="sng" algn="ctr">
+                      <a:solidFill>
+                        <a:srgbClr val="C9CFD8"/>
+                      </a:solidFill>
+                      <a:prstDash val="solid"/>
+                      <a:round/>
+                      <a:headEnd type="none" w="med" len="med"/>
+                      <a:tailEnd type="none" w="med" len="med"/>
+                    </a:lnB>
+                    <a:solidFill>
+                      <a:srgbClr val="FFFFFF"/>
+                    </a:solidFill>
+                  </a:tcPr>
+                </a:tc>
+              </a:tr>
+              <a:tr h="457200">
+                <a:tc>
+                  <a:txBody>
+                    <a:bodyPr/>
+                    <a:lstStyle/>
+                    <a:p>
+                      <a:pPr indent="0" marL="0">
+                        <a:buNone/>
+                      </a:pPr>
+                      <a:r>
+                        <a:rPr lang="en-US" sz="1600" dirty="0">
+                          <a:solidFill>
+                            <a:srgbClr val="14213D"/>
+                          </a:solidFill>
+                          <a:latin typeface="Calibri" pitchFamily="34" charset="0"/>
+                          <a:ea typeface="Calibri" pitchFamily="34" charset="-122"/>
+                          <a:cs typeface="Calibri" pitchFamily="34" charset="-120"/>
+                        </a:rPr>
+                        <a:t>ADL gain · 5 % / 30 % labels</a:t>
+                      </a:r>
+                      <a:endParaRPr lang="en-US" sz="1600" dirty="0">
+                        <a:latin typeface="Calibri" charset="0"/>
+                        <a:ea typeface="Calibri" charset="0"/>
+                        <a:cs typeface="Calibri" charset="0"/>
+                      </a:endParaRPr>
+                    </a:p>
+                  </a:txBody>
+                  <a:tcPr marL="73152" marR="73152" marT="36576" marB="36576" anchor="ctr">
+                    <a:lnL w="9525" cap="flat" cmpd="sng" algn="ctr">
+                      <a:solidFill>
+                        <a:srgbClr val="C9CFD8"/>
+                      </a:solidFill>
+                      <a:prstDash val="solid"/>
+                      <a:round/>
+                      <a:headEnd type="none" w="med" len="med"/>
+                      <a:tailEnd type="none" w="med" len="med"/>
+                    </a:lnL>
+                    <a:lnR w="9525" cap="flat" cmpd="sng" algn="ctr">
+                      <a:solidFill>
+                        <a:srgbClr val="C9CFD8"/>
+                      </a:solidFill>
+                      <a:prstDash val="solid"/>
+                      <a:round/>
+                      <a:headEnd type="none" w="med" len="med"/>
+                      <a:tailEnd type="none" w="med" len="med"/>
+                    </a:lnR>
+                    <a:lnT w="9525" cap="flat" cmpd="sng" algn="ctr">
+                      <a:solidFill>
+                        <a:srgbClr val="C9CFD8"/>
+                      </a:solidFill>
+                      <a:prstDash val="solid"/>
+                      <a:round/>
+                      <a:headEnd type="none" w="med" len="med"/>
+                      <a:tailEnd type="none" w="med" len="med"/>
+                    </a:lnT>
+                    <a:lnB w="9525" cap="flat" cmpd="sng" algn="ctr">
+                      <a:solidFill>
+                        <a:srgbClr val="C9CFD8"/>
+                      </a:solidFill>
+                      <a:prstDash val="solid"/>
+                      <a:round/>
+                      <a:headEnd type="none" w="med" len="med"/>
+                      <a:tailEnd type="none" w="med" len="med"/>
+                    </a:lnB>
+                    <a:solidFill>
+                      <a:srgbClr val="FFFFFF"/>
+                    </a:solidFill>
+                  </a:tcPr>
+                </a:tc>
+                <a:tc>
+                  <a:txBody>
+                    <a:bodyPr/>
+                    <a:lstStyle/>
+                    <a:p>
+                      <a:pPr algn="r" indent="0" marL="0">
+                        <a:buNone/>
+                      </a:pPr>
+                      <a:r>
+                        <a:rPr lang="en-US" sz="1600" b="1" dirty="0">
+                          <a:solidFill>
+                            <a:srgbClr val="A4520F"/>
+                          </a:solidFill>
+                          <a:latin typeface="Calibri" pitchFamily="34" charset="0"/>
+                          <a:ea typeface="Calibri" pitchFamily="34" charset="-122"/>
+                          <a:cs typeface="Calibri" pitchFamily="34" charset="-120"/>
+                        </a:rPr>
+                        <a:t>−0.050 / −0.068</a:t>
+                      </a:r>
+                      <a:endParaRPr lang="en-US" sz="1600" dirty="0">
+                        <a:latin typeface="Calibri" charset="0"/>
+                        <a:ea typeface="Calibri" charset="0"/>
+                        <a:cs typeface="Calibri" charset="0"/>
+                      </a:endParaRPr>
+                    </a:p>
+                  </a:txBody>
+                  <a:tcPr marL="73152" marR="73152" marT="36576" marB="36576" anchor="ctr">
+                    <a:lnL w="9525" cap="flat" cmpd="sng" algn="ctr">
+                      <a:solidFill>
+                        <a:srgbClr val="C9CFD8"/>
+                      </a:solidFill>
+                      <a:prstDash val="solid"/>
+                      <a:round/>
+                      <a:headEnd type="none" w="med" len="med"/>
+                      <a:tailEnd type="none" w="med" len="med"/>
+                    </a:lnL>
+                    <a:lnR w="9525" cap="flat" cmpd="sng" algn="ctr">
+                      <a:solidFill>
+                        <a:srgbClr val="C9CFD8"/>
+                      </a:solidFill>
+                      <a:prstDash val="solid"/>
+                      <a:round/>
+                      <a:headEnd type="none" w="med" len="med"/>
+                      <a:tailEnd type="none" w="med" len="med"/>
+                    </a:lnR>
+                    <a:lnT w="9525" cap="flat" cmpd="sng" algn="ctr">
+                      <a:solidFill>
+                        <a:srgbClr val="C9CFD8"/>
+                      </a:solidFill>
+                      <a:prstDash val="solid"/>
+                      <a:round/>
+                      <a:headEnd type="none" w="med" len="med"/>
+                      <a:tailEnd type="none" w="med" len="med"/>
+                    </a:lnT>
+                    <a:lnB w="9525" cap="flat" cmpd="sng" algn="ctr">
+                      <a:solidFill>
+                        <a:srgbClr val="C9CFD8"/>
+                      </a:solidFill>
+                      <a:prstDash val="solid"/>
+                      <a:round/>
+                      <a:headEnd type="none" w="med" len="med"/>
+                      <a:tailEnd type="none" w="med" len="med"/>
+                    </a:lnB>
+                    <a:solidFill>
+                      <a:srgbClr val="FFFFFF"/>
+                    </a:solidFill>
+                  </a:tcPr>
+                </a:tc>
+                <a:tc>
+                  <a:txBody>
+                    <a:bodyPr/>
+                    <a:lstStyle/>
+                    <a:p>
+                      <a:pPr algn="r" indent="0" marL="0">
+                        <a:buNone/>
+                      </a:pPr>
+                      <a:r>
+                        <a:rPr lang="en-US" sz="1600" b="1" dirty="0">
+                          <a:solidFill>
+                            <a:srgbClr val="1F5A96"/>
+                          </a:solidFill>
+                          <a:latin typeface="Calibri" pitchFamily="34" charset="0"/>
+                          <a:ea typeface="Calibri" pitchFamily="34" charset="-122"/>
+                          <a:cs typeface="Calibri" pitchFamily="34" charset="-120"/>
+                        </a:rPr>
+                        <a:t>+0.076 / +0.059</a:t>
+                      </a:r>
+                      <a:endParaRPr lang="en-US" sz="1600" dirty="0">
+                        <a:latin typeface="Calibri" charset="0"/>
+                        <a:ea typeface="Calibri" charset="0"/>
+                        <a:cs typeface="Calibri" charset="0"/>
+                      </a:endParaRPr>
+                    </a:p>
+                  </a:txBody>
+                  <a:tcPr marL="73152" marR="73152" marT="36576" marB="36576" anchor="ctr">
+                    <a:lnL w="9525" cap="flat" cmpd="sng" algn="ctr">
+                      <a:solidFill>
+                        <a:srgbClr val="C9CFD8"/>
+                      </a:solidFill>
+                      <a:prstDash val="solid"/>
+                      <a:round/>
+                      <a:headEnd type="none" w="med" len="med"/>
+                      <a:tailEnd type="none" w="med" len="med"/>
+                    </a:lnL>
+                    <a:lnR w="9525" cap="flat" cmpd="sng" algn="ctr">
+                      <a:solidFill>
+                        <a:srgbClr val="C9CFD8"/>
+                      </a:solidFill>
+                      <a:prstDash val="solid"/>
+                      <a:round/>
+                      <a:headEnd type="none" w="med" len="med"/>
+                      <a:tailEnd type="none" w="med" len="med"/>
+                    </a:lnR>
+                    <a:lnT w="9525" cap="flat" cmpd="sng" algn="ctr">
+                      <a:solidFill>
+                        <a:srgbClr val="C9CFD8"/>
+                      </a:solidFill>
+                      <a:prstDash val="solid"/>
+                      <a:round/>
+                      <a:headEnd type="none" w="med" len="med"/>
+                      <a:tailEnd type="none" w="med" len="med"/>
+                    </a:lnT>
+                    <a:lnB w="9525" cap="flat" cmpd="sng" algn="ctr">
+                      <a:solidFill>
+                        <a:srgbClr val="C9CFD8"/>
+                      </a:solidFill>
+                      <a:prstDash val="solid"/>
+                      <a:round/>
+                      <a:headEnd type="none" w="med" len="med"/>
+                      <a:tailEnd type="none" w="med" len="med"/>
+                    </a:lnB>
+                    <a:solidFill>
+                      <a:srgbClr val="FFFFFF"/>
+                    </a:solidFill>
+                  </a:tcPr>
+                </a:tc>
+              </a:tr>
+              <a:tr h="457200">
+                <a:tc>
+                  <a:txBody>
+                    <a:bodyPr/>
+                    <a:lstStyle/>
+                    <a:p>
+                      <a:pPr indent="0" marL="0">
+                        <a:buNone/>
+                      </a:pPr>
+                      <a:r>
+                        <a:rPr lang="en-US" sz="1600" dirty="0">
+                          <a:solidFill>
+                            <a:srgbClr val="14213D"/>
+                          </a:solidFill>
+                          <a:latin typeface="Calibri" pitchFamily="34" charset="0"/>
+                          <a:ea typeface="Calibri" pitchFamily="34" charset="-122"/>
+                          <a:cs typeface="Calibri" pitchFamily="34" charset="-120"/>
+                        </a:rPr>
+                        <a:t>Next-30 gain · 5 % / 30 % labels</a:t>
+                      </a:r>
+                      <a:endParaRPr lang="en-US" sz="1600" dirty="0">
+                        <a:latin typeface="Calibri" charset="0"/>
+                        <a:ea typeface="Calibri" charset="0"/>
+                        <a:cs typeface="Calibri" charset="0"/>
+                      </a:endParaRPr>
+                    </a:p>
+                  </a:txBody>
+                  <a:tcPr marL="73152" marR="73152" marT="36576" marB="36576" anchor="ctr">
+                    <a:lnL w="9525" cap="flat" cmpd="sng" algn="ctr">
+                      <a:solidFill>
+                        <a:srgbClr val="C9CFD8"/>
+                      </a:solidFill>
+                      <a:prstDash val="solid"/>
+                      <a:round/>
+                      <a:headEnd type="none" w="med" len="med"/>
+                      <a:tailEnd type="none" w="med" len="med"/>
+                    </a:lnL>
+                    <a:lnR w="9525" cap="flat" cmpd="sng" algn="ctr">
+                      <a:solidFill>
+                        <a:srgbClr val="C9CFD8"/>
+                      </a:solidFill>
+                      <a:prstDash val="solid"/>
+                      <a:round/>
+                      <a:headEnd type="none" w="med" len="med"/>
+                      <a:tailEnd type="none" w="med" len="med"/>
+                    </a:lnR>
+                    <a:lnT w="9525" cap="flat" cmpd="sng" algn="ctr">
+                      <a:solidFill>
+                        <a:srgbClr val="C9CFD8"/>
+                      </a:solidFill>
+                      <a:prstDash val="solid"/>
+                      <a:round/>
+                      <a:headEnd type="none" w="med" len="med"/>
+                      <a:tailEnd type="none" w="med" len="med"/>
+                    </a:lnT>
+                    <a:lnB w="9525" cap="flat" cmpd="sng" algn="ctr">
+                      <a:solidFill>
+                        <a:srgbClr val="C9CFD8"/>
+                      </a:solidFill>
+                      <a:prstDash val="solid"/>
+                      <a:round/>
+                      <a:headEnd type="none" w="med" len="med"/>
+                      <a:tailEnd type="none" w="med" len="med"/>
+                    </a:lnB>
+                    <a:solidFill>
+                      <a:srgbClr val="FFFFFF"/>
+                    </a:solidFill>
+                  </a:tcPr>
+                </a:tc>
+                <a:tc>
+                  <a:txBody>
+                    <a:bodyPr/>
+                    <a:lstStyle/>
+                    <a:p>
+                      <a:pPr algn="r" indent="0" marL="0">
+                        <a:buNone/>
+                      </a:pPr>
+                      <a:r>
+                        <a:rPr lang="en-US" sz="1600" b="1" dirty="0">
+                          <a:solidFill>
+                            <a:srgbClr val="A4520F"/>
+                          </a:solidFill>
+                          <a:latin typeface="Calibri" pitchFamily="34" charset="0"/>
+                          <a:ea typeface="Calibri" pitchFamily="34" charset="-122"/>
+                          <a:cs typeface="Calibri" pitchFamily="34" charset="-120"/>
+                        </a:rPr>
+                        <a:t>−0.009 / +0.002</a:t>
+                      </a:r>
+                      <a:endParaRPr lang="en-US" sz="1600" dirty="0">
+                        <a:latin typeface="Calibri" charset="0"/>
+                        <a:ea typeface="Calibri" charset="0"/>
+                        <a:cs typeface="Calibri" charset="0"/>
+                      </a:endParaRPr>
+                    </a:p>
+                  </a:txBody>
+                  <a:tcPr marL="73152" marR="73152" marT="36576" marB="36576" anchor="ctr">
+                    <a:lnL w="9525" cap="flat" cmpd="sng" algn="ctr">
+                      <a:solidFill>
+                        <a:srgbClr val="C9CFD8"/>
+                      </a:solidFill>
+                      <a:prstDash val="solid"/>
+                      <a:round/>
+                      <a:headEnd type="none" w="med" len="med"/>
+                      <a:tailEnd type="none" w="med" len="med"/>
+                    </a:lnL>
+                    <a:lnR w="9525" cap="flat" cmpd="sng" algn="ctr">
+                      <a:solidFill>
+                        <a:srgbClr val="C9CFD8"/>
+                      </a:solidFill>
+                      <a:prstDash val="solid"/>
+                      <a:round/>
+                      <a:headEnd type="none" w="med" len="med"/>
+                      <a:tailEnd type="none" w="med" len="med"/>
+                    </a:lnR>
+                    <a:lnT w="9525" cap="flat" cmpd="sng" algn="ctr">
+                      <a:solidFill>
+                        <a:srgbClr val="C9CFD8"/>
+                      </a:solidFill>
+                      <a:prstDash val="solid"/>
+                      <a:round/>
+                      <a:headEnd type="none" w="med" len="med"/>
+                      <a:tailEnd type="none" w="med" len="med"/>
+                    </a:lnT>
+                    <a:lnB w="9525" cap="flat" cmpd="sng" algn="ctr">
+                      <a:solidFill>
+                        <a:srgbClr val="C9CFD8"/>
+                      </a:solidFill>
+                      <a:prstDash val="solid"/>
+                      <a:round/>
+                      <a:headEnd type="none" w="med" len="med"/>
+                      <a:tailEnd type="none" w="med" len="med"/>
+                    </a:lnB>
+                    <a:solidFill>
+                      <a:srgbClr val="FFFFFF"/>
+                    </a:solidFill>
+                  </a:tcPr>
+                </a:tc>
+                <a:tc>
+                  <a:txBody>
+                    <a:bodyPr/>
+                    <a:lstStyle/>
+                    <a:p>
+                      <a:pPr algn="r" indent="0" marL="0">
+                        <a:buNone/>
+                      </a:pPr>
+                      <a:r>
+                        <a:rPr lang="en-US" sz="1600" b="1" dirty="0">
+                          <a:solidFill>
+                            <a:srgbClr val="1F5A96"/>
+                          </a:solidFill>
+                          <a:latin typeface="Calibri" pitchFamily="34" charset="0"/>
+                          <a:ea typeface="Calibri" pitchFamily="34" charset="-122"/>
+                          <a:cs typeface="Calibri" pitchFamily="34" charset="-120"/>
+                        </a:rPr>
+                        <a:t>+0.053 / +0.030</a:t>
+                      </a:r>
+                      <a:endParaRPr lang="en-US" sz="1600" dirty="0">
+                        <a:latin typeface="Calibri" charset="0"/>
+                        <a:ea typeface="Calibri" charset="0"/>
+                        <a:cs typeface="Calibri" charset="0"/>
+                      </a:endParaRPr>
+                    </a:p>
+                  </a:txBody>
+                  <a:tcPr marL="73152" marR="73152" marT="36576" marB="36576" anchor="ctr">
+                    <a:lnL w="9525" cap="flat" cmpd="sng" algn="ctr">
+                      <a:solidFill>
+                        <a:srgbClr val="C9CFD8"/>
+                      </a:solidFill>
+                      <a:prstDash val="solid"/>
+                      <a:round/>
+                      <a:headEnd type="none" w="med" len="med"/>
+                      <a:tailEnd type="none" w="med" len="med"/>
+                    </a:lnL>
+                    <a:lnR w="9525" cap="flat" cmpd="sng" algn="ctr">
+                      <a:solidFill>
+                        <a:srgbClr val="C9CFD8"/>
+                      </a:solidFill>
+                      <a:prstDash val="solid"/>
+                      <a:round/>
+                      <a:headEnd type="none" w="med" len="med"/>
+                      <a:tailEnd type="none" w="med" len="med"/>
+                    </a:lnR>
+                    <a:lnT w="9525" cap="flat" cmpd="sng" algn="ctr">
+                      <a:solidFill>
+                        <a:srgbClr val="C9CFD8"/>
+                      </a:solidFill>
+                      <a:prstDash val="solid"/>
+                      <a:round/>
+                      <a:headEnd type="none" w="med" len="med"/>
+                      <a:tailEnd type="none" w="med" len="med"/>
+                    </a:lnT>
+                    <a:lnB w="9525" cap="flat" cmpd="sng" algn="ctr">
+                      <a:solidFill>
+                        <a:srgbClr val="C9CFD8"/>
+                      </a:solidFill>
+                      <a:prstDash val="solid"/>
+                      <a:round/>
+                      <a:headEnd type="none" w="med" len="med"/>
+                      <a:tailEnd type="none" w="med" len="med"/>
+                    </a:lnB>
+                    <a:solidFill>
+                      <a:srgbClr val="FFFFFF"/>
+                    </a:solidFill>
+                  </a:tcPr>
+                </a:tc>
+              </a:tr>
+            </a:tbl>
+          </a:graphicData>
+        </a:graphic>
+      </p:graphicFrame>
+      <p:sp>
+        <p:nvSpPr>
+          <p:cNvPr id="5" name="Text 2"/>
+          <p:cNvSpPr txBox="1"/>
+          <p:nvPr/>
+        </p:nvSpPr>
+        <p:spPr>
+          <a:xfrm>
+            <a:off x="640080" y="4251960"/>
+            <a:ext cx="10911535" cy="1463040"/>
+          </a:xfrm>
+          <a:prstGeom prst="rect">
+            <a:avLst/>
+          </a:prstGeom>
+          <a:noFill/>
+          <a:ln/>
+        </p:spPr>
+        <p:txBody>
+          <a:bodyPr wrap="square" lIns="0" tIns="0" rIns="0" bIns="0" rtlCol="0" anchor="t"/>
+          <a:lstStyle/>
+          <a:p>
+            <a:pPr indent="0" marL="0">
+              <a:buNone/>
+            </a:pPr>
+            <a:r>
+              <a:rPr lang="en-US" sz="1500" b="1" dirty="0">
+                <a:solidFill>
+                  <a:srgbClr val="14213D"/>
+                </a:solidFill>
+                <a:latin typeface="Calibri" pitchFamily="34" charset="0"/>
+                <a:ea typeface="Calibri" pitchFamily="34" charset="-122"/>
+                <a:cs typeface="Calibri" pitchFamily="34" charset="-120"/>
+              </a:rPr>
+              <a:t>Tricks the paper's game allowed: </a:t>
+            </a:r>
+            <a:pPr indent="0" marL="0">
+              <a:spcAft>
+                <a:spcPts val="1000"/>
+              </a:spcAft>
+              <a:buNone/>
+            </a:pPr>
+            <a:r>
+              <a:rPr lang="en-US" sz="1500" dirty="0">
+                <a:solidFill>
+                  <a:srgbClr val="3F4A5A"/>
+                </a:solidFill>
+                <a:latin typeface="Calibri" pitchFamily="34" charset="0"/>
+                <a:ea typeface="Calibri" pitchFamily="34" charset="-122"/>
+                <a:cs typeface="Calibri" pitchFamily="34" charset="-120"/>
+              </a:rPr>
+              <a:t>candidates from other homes, exact-second timestamps, one copy never hidden, no separate head for the game, nothing to predict.</a:t>
+            </a:r>
+            <a:endParaRPr lang="en-US" sz="1500" dirty="0"/>
+          </a:p>
+          <a:p>
+            <a:pPr indent="0" marL="0">
+              <a:buNone/>
+            </a:pPr>
+            <a:r>
+              <a:rPr lang="en-US" sz="1500" b="1" dirty="0">
+                <a:solidFill>
+                  <a:srgbClr val="14213D"/>
+                </a:solidFill>
+                <a:latin typeface="Calibri" pitchFamily="34" charset="0"/>
+                <a:ea typeface="Calibri" pitchFamily="34" charset="-122"/>
+                <a:cs typeface="Calibri" pitchFamily="34" charset="-120"/>
+              </a:rPr>
+              <a:t>Remedies: </a:t>
+            </a:r>
+            <a:pPr indent="0" marL="0">
+              <a:buNone/>
+            </a:pPr>
+            <a:r>
+              <a:rPr lang="en-US" sz="1500" dirty="0">
+                <a:solidFill>
+                  <a:srgbClr val="3F4A5A"/>
+                </a:solidFill>
+                <a:latin typeface="Calibri" pitchFamily="34" charset="0"/>
+                <a:ea typeface="Calibri" pitchFamily="34" charset="-122"/>
+                <a:cs typeface="Calibri" pitchFamily="34" charset="-120"/>
+              </a:rPr>
+              <a:t>the six changes on slide 9. The from-scratch baseline barely moved, so the gain comes from the harder game.</a:t>
+            </a:r>
+            <a:endParaRPr lang="en-US" sz="1500" dirty="0"/>
+          </a:p>
+        </p:txBody>
+      </p:sp>
+      <p:sp>
+        <p:nvSpPr>
+          <p:cNvPr id="6" name="Text 3"/>
+          <p:cNvSpPr txBox="1"/>
+          <p:nvPr/>
+        </p:nvSpPr>
+        <p:spPr>
+          <a:xfrm>
+            <a:off x="640080" y="6355080"/>
+            <a:ext cx="10911535" cy="274320"/>
+          </a:xfrm>
+          <a:prstGeom prst="rect">
+            <a:avLst/>
+          </a:prstGeom>
+          <a:noFill/>
+          <a:ln/>
+        </p:spPr>
+        <p:txBody>
+          <a:bodyPr wrap="square" lIns="0" tIns="0" rIns="0" bIns="0" rtlCol="0" anchor="ctr"/>
+          <a:lstStyle/>
+          <a:p>
+            <a:pPr indent="0" marL="0">
+              <a:buNone/>
+            </a:pPr>
+            <a:r>
+              <a:rPr lang="en-US" sz="1100" dirty="0">
+                <a:solidFill>
+                  <a:srgbClr val="5F6B7A"/>
+                </a:solidFill>
+                <a:latin typeface="Calibri" pitchFamily="34" charset="0"/>
+                <a:ea typeface="Calibri" pitchFamily="34" charset="-122"/>
+                <a:cs typeface="Calibri" pitchFamily="34" charset="-120"/>
+              </a:rPr>
+              <a:t>DomusFM reproduction · 20 · Gain = pretrained F1 − from-scratch F1, mean over 7 held-out homes · Red = paper's game, blue = harder game</a:t>
+            </a:r>
+            <a:endParaRPr lang="en-US" sz="1100" dirty="0"/>
+          </a:p>
+        </p:txBody>
+      </p:sp>
+    </p:spTree>
+  </p:cSld>
+  <p:clrMapOvr>
+    <a:masterClrMapping/>
+  </p:clrMapOvr>
+</p:sld>
+</file>
+
+<file path=ppt/slides/slide21.xml><?xml version="1.0" encoding="utf-8"?>
+<p:sld xmlns:a="http://schemas.openxmlformats.org/drawingml/2006/main" xmlns:r="http://schemas.openxmlformats.org/officeDocument/2006/relationships" xmlns:p="http://schemas.openxmlformats.org/presentationml/2006/main">
+  <p:cSld name="Slide 21">
+    <p:bg>
+      <p:bgPr>
+        <a:solidFill>
+          <a:srgbClr val="EEF1F5"/>
+        </a:solidFill>
+      </p:bgPr>
+    </p:bg>
+    <p:spTree>
+      <p:nvGrpSpPr>
+        <p:cNvPr id="1" name=""/>
+        <p:cNvGrpSpPr/>
+        <p:nvPr/>
+      </p:nvGrpSpPr>
+      <p:grpSpPr>
+        <a:xfrm>
+          <a:off x="0" y="0"/>
+          <a:ext cx="0" cy="0"/>
+          <a:chOff x="0" y="0"/>
+          <a:chExt cx="0" cy="0"/>
+        </a:xfrm>
+      </p:grpSpPr>
+      <p:sp>
+        <p:nvSpPr>
+          <p:cNvPr id="2" name="Text 0"/>
+          <p:cNvSpPr txBox="1"/>
+          <p:nvPr/>
+        </p:nvSpPr>
+        <p:spPr>
+          <a:xfrm>
+            <a:off x="640080" y="457200"/>
+            <a:ext cx="10911535" cy="274320"/>
+          </a:xfrm>
+          <a:prstGeom prst="rect">
+            <a:avLst/>
+          </a:prstGeom>
+          <a:noFill/>
+          <a:ln/>
+        </p:spPr>
+        <p:txBody>
+          <a:bodyPr wrap="square" lIns="0" tIns="0" rIns="0" bIns="0" rtlCol="0" anchor="ctr"/>
+          <a:lstStyle/>
+          <a:p>
+            <a:pPr indent="0" marL="0">
+              <a:buNone/>
+            </a:pPr>
+            <a:r>
+              <a:rPr lang="en-US" sz="1200" b="1" spc="200" kern="0" dirty="0">
+                <a:solidFill>
+                  <a:srgbClr val="2F6FB0"/>
+                </a:solidFill>
+                <a:latin typeface="Calibri" pitchFamily="34" charset="0"/>
+                <a:ea typeface="Calibri" pitchFamily="34" charset="-122"/>
+                <a:cs typeface="Calibri" pitchFamily="34" charset="-120"/>
+              </a:rPr>
+              <a:t>HOMEFM'S REMEDY FOR L11</a:t>
+            </a:r>
+            <a:endParaRPr lang="en-US" sz="1200" dirty="0"/>
+          </a:p>
+        </p:txBody>
+      </p:sp>
+      <p:sp>
+        <p:nvSpPr>
+          <p:cNvPr id="3" name="Text 1"/>
+          <p:cNvSpPr txBox="1"/>
+          <p:nvPr/>
+        </p:nvSpPr>
+        <p:spPr>
+          <a:xfrm>
+            <a:off x="640080" y="749808"/>
+            <a:ext cx="10911535" cy="685800"/>
+          </a:xfrm>
+          <a:prstGeom prst="rect">
+            <a:avLst/>
+          </a:prstGeom>
+          <a:noFill/>
+          <a:ln/>
+        </p:spPr>
+        <p:txBody>
+          <a:bodyPr wrap="square" lIns="0" tIns="0" rIns="0" bIns="0" rtlCol="0" anchor="ctr"/>
+          <a:lstStyle/>
+          <a:p>
+            <a:pPr indent="0" marL="0">
+              <a:buNone/>
+            </a:pPr>
+            <a:r>
+              <a:rPr lang="en-US" sz="3600" b="1" dirty="0">
+                <a:solidFill>
+                  <a:srgbClr val="14213D"/>
+                </a:solidFill>
+                <a:latin typeface="Cambria" pitchFamily="34" charset="0"/>
+                <a:ea typeface="Cambria" pitchFamily="34" charset="-122"/>
+                <a:cs typeface="Cambria" pitchFamily="34" charset="-120"/>
+              </a:rPr>
+              <a:t>Three harder practice games</a:t>
+            </a:r>
+            <a:endParaRPr lang="en-US" sz="3600" dirty="0"/>
+          </a:p>
+        </p:txBody>
+      </p:sp>
+      <p:sp>
+        <p:nvSpPr>
+          <p:cNvPr id="4" name="Shape 2"/>
+          <p:cNvSpPr/>
+          <p:nvPr/>
+        </p:nvSpPr>
+        <p:spPr>
+          <a:xfrm>
+            <a:off x="640080" y="1737360"/>
+            <a:ext cx="3454298" cy="3154680"/>
+          </a:xfrm>
+          <a:prstGeom prst="roundRect">
+            <a:avLst>
+              <a:gd name="adj" fmla="val 2899"/>
+            </a:avLst>
+          </a:prstGeom>
+          <a:solidFill>
+            <a:srgbClr val="FFFFFF"/>
+          </a:solidFill>
+          <a:ln w="9525">
+            <a:solidFill>
+              <a:srgbClr val="D5D9E0"/>
+            </a:solidFill>
+            <a:prstDash val="solid"/>
+          </a:ln>
+        </p:spPr>
+      </p:sp>
+      <p:sp>
+        <p:nvSpPr>
+          <p:cNvPr id="5" name="Shape 3"/>
+          <p:cNvSpPr/>
+          <p:nvPr/>
+        </p:nvSpPr>
+        <p:spPr>
+          <a:xfrm>
+            <a:off x="914400" y="1965960"/>
+            <a:ext cx="384048" cy="384048"/>
+          </a:xfrm>
+          <a:prstGeom prst="ellipse">
+            <a:avLst/>
+          </a:prstGeom>
+          <a:solidFill>
+            <a:srgbClr val="2F6FB0"/>
+          </a:solidFill>
+          <a:ln w="12700">
+            <a:solidFill>
+              <a:srgbClr val="2F6FB0"/>
+            </a:solidFill>
+            <a:prstDash val="solid"/>
+          </a:ln>
+        </p:spPr>
+      </p:sp>
+      <p:sp>
+        <p:nvSpPr>
+          <p:cNvPr id="6" name="Text 4"/>
+          <p:cNvSpPr txBox="1"/>
+          <p:nvPr/>
+        </p:nvSpPr>
+        <p:spPr>
+          <a:xfrm>
+            <a:off x="914400" y="1965960"/>
+            <a:ext cx="384048" cy="384048"/>
+          </a:xfrm>
+          <a:prstGeom prst="rect">
+            <a:avLst/>
+          </a:prstGeom>
+          <a:noFill/>
+          <a:ln/>
+        </p:spPr>
+        <p:txBody>
+          <a:bodyPr wrap="square" lIns="0" tIns="0" rIns="0" bIns="0" rtlCol="0" anchor="ctr"/>
+          <a:lstStyle/>
+          <a:p>
+            <a:pPr algn="ctr" indent="0" marL="0">
+              <a:buNone/>
+            </a:pPr>
+            <a:r>
+              <a:rPr lang="en-US" sz="1400" b="1" dirty="0">
+                <a:solidFill>
+                  <a:srgbClr val="FFFFFF"/>
+                </a:solidFill>
+                <a:latin typeface="Calibri" pitchFamily="34" charset="0"/>
+                <a:ea typeface="Calibri" pitchFamily="34" charset="-122"/>
+                <a:cs typeface="Calibri" pitchFamily="34" charset="-120"/>
+              </a:rPr>
+              <a:t>1</a:t>
+            </a:r>
+            <a:endParaRPr lang="en-US" sz="1400" dirty="0"/>
+          </a:p>
+        </p:txBody>
+      </p:sp>
+      <p:sp>
+        <p:nvSpPr>
+          <p:cNvPr id="7" name="Text 5"/>
+          <p:cNvSpPr txBox="1"/>
+          <p:nvPr/>
+        </p:nvSpPr>
+        <p:spPr>
+          <a:xfrm>
+            <a:off x="1417320" y="2020824"/>
+            <a:ext cx="2448458" cy="274320"/>
+          </a:xfrm>
+          <a:prstGeom prst="rect">
+            <a:avLst/>
+          </a:prstGeom>
+          <a:noFill/>
+          <a:ln/>
+        </p:spPr>
+        <p:txBody>
+          <a:bodyPr wrap="square" lIns="0" tIns="0" rIns="0" bIns="0" rtlCol="0" anchor="t"/>
+          <a:lstStyle/>
+          <a:p>
+            <a:pPr indent="0" marL="0">
+              <a:buNone/>
+            </a:pPr>
+            <a:r>
+              <a:rPr lang="en-US" sz="1200" b="1" spc="200" kern="0" dirty="0">
+                <a:solidFill>
+                  <a:srgbClr val="1F5A96"/>
+                </a:solidFill>
+                <a:latin typeface="Calibri" pitchFamily="34" charset="0"/>
+                <a:ea typeface="Calibri" pitchFamily="34" charset="-122"/>
+                <a:cs typeface="Calibri" pitchFamily="34" charset="-120"/>
+              </a:rPr>
+              <a:t>GAME 1</a:t>
+            </a:r>
+            <a:endParaRPr lang="en-US" sz="1200" dirty="0"/>
+          </a:p>
+        </p:txBody>
+      </p:sp>
+      <p:sp>
+        <p:nvSpPr>
+          <p:cNvPr id="8" name="Text 6"/>
+          <p:cNvSpPr txBox="1"/>
+          <p:nvPr/>
+        </p:nvSpPr>
+        <p:spPr>
+          <a:xfrm>
+            <a:off x="914400" y="2514600"/>
+            <a:ext cx="2905658" cy="685800"/>
+          </a:xfrm>
+          <a:prstGeom prst="rect">
+            <a:avLst/>
+          </a:prstGeom>
+          <a:noFill/>
+          <a:ln/>
+        </p:spPr>
+        <p:txBody>
+          <a:bodyPr wrap="square" lIns="0" tIns="0" rIns="0" bIns="0" rtlCol="0" anchor="t"/>
+          <a:lstStyle/>
+          <a:p>
+            <a:pPr indent="0" marL="0">
+              <a:buNone/>
+            </a:pPr>
+            <a:r>
+              <a:rPr lang="en-US" sz="1700" b="1" dirty="0">
+                <a:solidFill>
+                  <a:srgbClr val="14213D"/>
+                </a:solidFill>
+                <a:latin typeface="Calibri" pitchFamily="34" charset="0"/>
+                <a:ea typeface="Calibri" pitchFamily="34" charset="-122"/>
+                <a:cs typeface="Calibri" pitchFamily="34" charset="-120"/>
+              </a:rPr>
+              <a:t>What happens next, and when?</a:t>
+            </a:r>
+            <a:endParaRPr lang="en-US" sz="1700" dirty="0"/>
+          </a:p>
+        </p:txBody>
+      </p:sp>
+      <p:sp>
+        <p:nvSpPr>
+          <p:cNvPr id="9" name="Text 7"/>
+          <p:cNvSpPr txBox="1"/>
+          <p:nvPr/>
+        </p:nvSpPr>
+        <p:spPr>
+          <a:xfrm>
+            <a:off x="914400" y="3246120"/>
+            <a:ext cx="2905658" cy="1371600"/>
+          </a:xfrm>
+          <a:prstGeom prst="rect">
+            <a:avLst/>
+          </a:prstGeom>
+          <a:noFill/>
+          <a:ln/>
+        </p:spPr>
+        <p:txBody>
+          <a:bodyPr wrap="square" lIns="0" tIns="0" rIns="0" bIns="0" rtlCol="0" anchor="t"/>
+          <a:lstStyle/>
+          <a:p>
+            <a:pPr indent="0" marL="0">
+              <a:lnSpc>
+                <a:spcPct val="110000"/>
+              </a:lnSpc>
+              <a:buNone/>
+            </a:pPr>
+            <a:r>
+              <a:rPr lang="en-US" sz="1400" dirty="0">
+                <a:solidFill>
+                  <a:srgbClr val="3F4A5A"/>
+                </a:solidFill>
+                <a:latin typeface="Calibri" pitchFamily="34" charset="0"/>
+                <a:ea typeface="Calibri" pitchFamily="34" charset="-122"/>
+                <a:cs typeface="Calibri" pitchFamily="34" charset="-120"/>
+              </a:rPr>
+              <a:t>Predict the next event and the time until it. The future is unseen, so the model must learn routines. Also gives the surprise score (L6) and timing (L7).</a:t>
+            </a:r>
+            <a:endParaRPr lang="en-US" sz="1400" dirty="0"/>
+          </a:p>
+        </p:txBody>
+      </p:sp>
+      <p:sp>
+        <p:nvSpPr>
+          <p:cNvPr id="10" name="Shape 8"/>
+          <p:cNvSpPr/>
+          <p:nvPr/>
+        </p:nvSpPr>
+        <p:spPr>
+          <a:xfrm>
+            <a:off x="4368698" y="1737360"/>
+            <a:ext cx="3454298" cy="3154680"/>
+          </a:xfrm>
+          <a:prstGeom prst="roundRect">
+            <a:avLst>
+              <a:gd name="adj" fmla="val 2899"/>
+            </a:avLst>
+          </a:prstGeom>
+          <a:solidFill>
+            <a:srgbClr val="FFFFFF"/>
+          </a:solidFill>
+          <a:ln w="9525">
+            <a:solidFill>
+              <a:srgbClr val="D5D9E0"/>
+            </a:solidFill>
+            <a:prstDash val="solid"/>
+          </a:ln>
+        </p:spPr>
+      </p:sp>
+      <p:sp>
+        <p:nvSpPr>
+          <p:cNvPr id="11" name="Shape 9"/>
+          <p:cNvSpPr/>
+          <p:nvPr/>
+        </p:nvSpPr>
+        <p:spPr>
+          <a:xfrm>
+            <a:off x="4643018" y="1965960"/>
+            <a:ext cx="384048" cy="384048"/>
+          </a:xfrm>
+          <a:prstGeom prst="ellipse">
+            <a:avLst/>
+          </a:prstGeom>
+          <a:solidFill>
+            <a:srgbClr val="2F6FB0"/>
+          </a:solidFill>
+          <a:ln w="12700">
+            <a:solidFill>
+              <a:srgbClr val="2F6FB0"/>
+            </a:solidFill>
+            <a:prstDash val="solid"/>
+          </a:ln>
+        </p:spPr>
+      </p:sp>
+      <p:sp>
+        <p:nvSpPr>
+          <p:cNvPr id="12" name="Text 10"/>
+          <p:cNvSpPr txBox="1"/>
+          <p:nvPr/>
+        </p:nvSpPr>
+        <p:spPr>
+          <a:xfrm>
+            <a:off x="4643018" y="1965960"/>
+            <a:ext cx="384048" cy="384048"/>
+          </a:xfrm>
+          <a:prstGeom prst="rect">
+            <a:avLst/>
+          </a:prstGeom>
+          <a:noFill/>
+          <a:ln/>
+        </p:spPr>
+        <p:txBody>
+          <a:bodyPr wrap="square" lIns="0" tIns="0" rIns="0" bIns="0" rtlCol="0" anchor="ctr"/>
+          <a:lstStyle/>
+          <a:p>
+            <a:pPr algn="ctr" indent="0" marL="0">
+              <a:buNone/>
+            </a:pPr>
+            <a:r>
+              <a:rPr lang="en-US" sz="1400" b="1" dirty="0">
+                <a:solidFill>
+                  <a:srgbClr val="FFFFFF"/>
+                </a:solidFill>
+                <a:latin typeface="Calibri" pitchFamily="34" charset="0"/>
+                <a:ea typeface="Calibri" pitchFamily="34" charset="-122"/>
+                <a:cs typeface="Calibri" pitchFamily="34" charset="-120"/>
+              </a:rPr>
+              <a:t>2</a:t>
+            </a:r>
+            <a:endParaRPr lang="en-US" sz="1400" dirty="0"/>
+          </a:p>
+        </p:txBody>
+      </p:sp>
+      <p:sp>
+        <p:nvSpPr>
+          <p:cNvPr id="13" name="Text 11"/>
+          <p:cNvSpPr txBox="1"/>
+          <p:nvPr/>
+        </p:nvSpPr>
+        <p:spPr>
+          <a:xfrm>
+            <a:off x="5145938" y="2020824"/>
+            <a:ext cx="2448458" cy="274320"/>
+          </a:xfrm>
+          <a:prstGeom prst="rect">
+            <a:avLst/>
+          </a:prstGeom>
+          <a:noFill/>
+          <a:ln/>
+        </p:spPr>
+        <p:txBody>
+          <a:bodyPr wrap="square" lIns="0" tIns="0" rIns="0" bIns="0" rtlCol="0" anchor="t"/>
+          <a:lstStyle/>
+          <a:p>
+            <a:pPr indent="0" marL="0">
+              <a:buNone/>
+            </a:pPr>
+            <a:r>
+              <a:rPr lang="en-US" sz="1200" b="1" spc="200" kern="0" dirty="0">
+                <a:solidFill>
+                  <a:srgbClr val="1F5A96"/>
+                </a:solidFill>
+                <a:latin typeface="Calibri" pitchFamily="34" charset="0"/>
+                <a:ea typeface="Calibri" pitchFamily="34" charset="-122"/>
+                <a:cs typeface="Calibri" pitchFamily="34" charset="-120"/>
+              </a:rPr>
+              <a:t>GAME 2</a:t>
+            </a:r>
+            <a:endParaRPr lang="en-US" sz="1200" dirty="0"/>
+          </a:p>
+        </p:txBody>
+      </p:sp>
+      <p:sp>
+        <p:nvSpPr>
+          <p:cNvPr id="14" name="Text 12"/>
+          <p:cNvSpPr txBox="1"/>
+          <p:nvPr/>
+        </p:nvSpPr>
+        <p:spPr>
+          <a:xfrm>
+            <a:off x="4643018" y="2514600"/>
+            <a:ext cx="2905658" cy="685800"/>
+          </a:xfrm>
+          <a:prstGeom prst="rect">
+            <a:avLst/>
+          </a:prstGeom>
+          <a:noFill/>
+          <a:ln/>
+        </p:spPr>
+        <p:txBody>
+          <a:bodyPr wrap="square" lIns="0" tIns="0" rIns="0" bIns="0" rtlCol="0" anchor="t"/>
+          <a:lstStyle/>
+          <a:p>
+            <a:pPr indent="0" marL="0">
+              <a:buNone/>
+            </a:pPr>
+            <a:r>
+              <a:rPr lang="en-US" sz="1700" b="1" dirty="0">
+                <a:solidFill>
+                  <a:srgbClr val="14213D"/>
+                </a:solidFill>
+                <a:latin typeface="Calibri" pitchFamily="34" charset="0"/>
+                <a:ea typeface="Calibri" pitchFamily="34" charset="-122"/>
+                <a:cs typeface="Calibri" pitchFamily="34" charset="-120"/>
+              </a:rPr>
+              <a:t>Hide a big chunk, guess its meaning</a:t>
+            </a:r>
+            <a:endParaRPr lang="en-US" sz="1700" dirty="0"/>
+          </a:p>
+        </p:txBody>
+      </p:sp>
+      <p:sp>
+        <p:nvSpPr>
+          <p:cNvPr id="15" name="Text 13"/>
+          <p:cNvSpPr txBox="1"/>
+          <p:nvPr/>
+        </p:nvSpPr>
+        <p:spPr>
+          <a:xfrm>
+            <a:off x="4643018" y="3246120"/>
+            <a:ext cx="2905658" cy="1371600"/>
+          </a:xfrm>
+          <a:prstGeom prst="rect">
+            <a:avLst/>
+          </a:prstGeom>
+          <a:noFill/>
+          <a:ln/>
+        </p:spPr>
+        <p:txBody>
+          <a:bodyPr wrap="square" lIns="0" tIns="0" rIns="0" bIns="0" rtlCol="0" anchor="t"/>
+          <a:lstStyle/>
+          <a:p>
+            <a:pPr indent="0" marL="0">
+              <a:lnSpc>
+                <a:spcPct val="110000"/>
+              </a:lnSpc>
+              <a:buNone/>
+            </a:pPr>
+            <a:r>
+              <a:rPr lang="en-US" sz="1400" dirty="0">
+                <a:solidFill>
+                  <a:srgbClr val="3F4A5A"/>
+                </a:solidFill>
+                <a:latin typeface="Calibri" pitchFamily="34" charset="0"/>
+                <a:ea typeface="Calibri" pitchFamily="34" charset="-122"/>
+                <a:cs typeface="Calibri" pitchFamily="34" charset="-120"/>
+              </a:rPr>
+              <a:t>Hide 10 minutes, a room or a device type, and predict what it meant. No ON/OFF partner or timestamp is left to copy.</a:t>
+            </a:r>
+            <a:endParaRPr lang="en-US" sz="1400" dirty="0"/>
+          </a:p>
+        </p:txBody>
+      </p:sp>
+      <p:sp>
+        <p:nvSpPr>
+          <p:cNvPr id="16" name="Shape 14"/>
+          <p:cNvSpPr/>
+          <p:nvPr/>
+        </p:nvSpPr>
+        <p:spPr>
+          <a:xfrm>
+            <a:off x="8097317" y="1737360"/>
+            <a:ext cx="3454298" cy="3154680"/>
+          </a:xfrm>
+          <a:prstGeom prst="roundRect">
+            <a:avLst>
+              <a:gd name="adj" fmla="val 2899"/>
+            </a:avLst>
+          </a:prstGeom>
+          <a:solidFill>
+            <a:srgbClr val="FFFFFF"/>
+          </a:solidFill>
+          <a:ln w="9525">
+            <a:solidFill>
+              <a:srgbClr val="D5D9E0"/>
+            </a:solidFill>
+            <a:prstDash val="solid"/>
+          </a:ln>
+        </p:spPr>
+      </p:sp>
+      <p:sp>
+        <p:nvSpPr>
+          <p:cNvPr id="17" name="Shape 15"/>
+          <p:cNvSpPr/>
+          <p:nvPr/>
+        </p:nvSpPr>
+        <p:spPr>
+          <a:xfrm>
+            <a:off x="8371637" y="1965960"/>
+            <a:ext cx="384048" cy="384048"/>
+          </a:xfrm>
+          <a:prstGeom prst="ellipse">
+            <a:avLst/>
+          </a:prstGeom>
+          <a:solidFill>
+            <a:srgbClr val="2F6FB0"/>
+          </a:solidFill>
+          <a:ln w="12700">
+            <a:solidFill>
+              <a:srgbClr val="2F6FB0"/>
+            </a:solidFill>
+            <a:prstDash val="solid"/>
+          </a:ln>
+        </p:spPr>
+      </p:sp>
+      <p:sp>
+        <p:nvSpPr>
+          <p:cNvPr id="18" name="Text 16"/>
+          <p:cNvSpPr txBox="1"/>
+          <p:nvPr/>
+        </p:nvSpPr>
+        <p:spPr>
+          <a:xfrm>
+            <a:off x="8371637" y="1965960"/>
+            <a:ext cx="384048" cy="384048"/>
+          </a:xfrm>
+          <a:prstGeom prst="rect">
+            <a:avLst/>
+          </a:prstGeom>
+          <a:noFill/>
+          <a:ln/>
+        </p:spPr>
+        <p:txBody>
+          <a:bodyPr wrap="square" lIns="0" tIns="0" rIns="0" bIns="0" rtlCol="0" anchor="ctr"/>
+          <a:lstStyle/>
+          <a:p>
+            <a:pPr algn="ctr" indent="0" marL="0">
+              <a:buNone/>
+            </a:pPr>
+            <a:r>
+              <a:rPr lang="en-US" sz="1400" b="1" dirty="0">
+                <a:solidFill>
+                  <a:srgbClr val="FFFFFF"/>
+                </a:solidFill>
+                <a:latin typeface="Calibri" pitchFamily="34" charset="0"/>
+                <a:ea typeface="Calibri" pitchFamily="34" charset="-122"/>
+                <a:cs typeface="Calibri" pitchFamily="34" charset="-120"/>
+              </a:rPr>
+              <a:t>3</a:t>
+            </a:r>
+            <a:endParaRPr lang="en-US" sz="1400" dirty="0"/>
+          </a:p>
+        </p:txBody>
+      </p:sp>
+      <p:sp>
+        <p:nvSpPr>
+          <p:cNvPr id="19" name="Text 17"/>
+          <p:cNvSpPr txBox="1"/>
+          <p:nvPr/>
+        </p:nvSpPr>
+        <p:spPr>
+          <a:xfrm>
+            <a:off x="8874557" y="2020824"/>
+            <a:ext cx="2448458" cy="274320"/>
+          </a:xfrm>
+          <a:prstGeom prst="rect">
+            <a:avLst/>
+          </a:prstGeom>
+          <a:noFill/>
+          <a:ln/>
+        </p:spPr>
+        <p:txBody>
+          <a:bodyPr wrap="square" lIns="0" tIns="0" rIns="0" bIns="0" rtlCol="0" anchor="t"/>
+          <a:lstStyle/>
+          <a:p>
+            <a:pPr indent="0" marL="0">
+              <a:buNone/>
+            </a:pPr>
+            <a:r>
+              <a:rPr lang="en-US" sz="1200" b="1" spc="200" kern="0" dirty="0">
+                <a:solidFill>
+                  <a:srgbClr val="1F5A96"/>
+                </a:solidFill>
+                <a:latin typeface="Calibri" pitchFamily="34" charset="0"/>
+                <a:ea typeface="Calibri" pitchFamily="34" charset="-122"/>
+                <a:cs typeface="Calibri" pitchFamily="34" charset="-120"/>
+              </a:rPr>
+              <a:t>GAME 3</a:t>
+            </a:r>
+            <a:endParaRPr lang="en-US" sz="1200" dirty="0"/>
+          </a:p>
+        </p:txBody>
+      </p:sp>
+      <p:sp>
+        <p:nvSpPr>
+          <p:cNvPr id="20" name="Text 18"/>
+          <p:cNvSpPr txBox="1"/>
+          <p:nvPr/>
+        </p:nvSpPr>
+        <p:spPr>
+          <a:xfrm>
+            <a:off x="8371637" y="2514600"/>
+            <a:ext cx="2905658" cy="685800"/>
+          </a:xfrm>
+          <a:prstGeom prst="rect">
+            <a:avLst/>
+          </a:prstGeom>
+          <a:noFill/>
+          <a:ln/>
+        </p:spPr>
+        <p:txBody>
+          <a:bodyPr wrap="square" lIns="0" tIns="0" rIns="0" bIns="0" rtlCol="0" anchor="t"/>
+          <a:lstStyle/>
+          <a:p>
+            <a:pPr indent="0" marL="0">
+              <a:buNone/>
+            </a:pPr>
+            <a:r>
+              <a:rPr lang="en-US" sz="1700" b="1" dirty="0">
+                <a:solidFill>
+                  <a:srgbClr val="14213D"/>
+                </a:solidFill>
+                <a:latin typeface="Calibri" pitchFamily="34" charset="0"/>
+                <a:ea typeface="Calibri" pitchFamily="34" charset="-122"/>
+                <a:cs typeface="Calibri" pitchFamily="34" charset="-120"/>
+              </a:rPr>
+              <a:t>Match minutes with sentences</a:t>
+            </a:r>
+            <a:endParaRPr lang="en-US" sz="1700" dirty="0"/>
+          </a:p>
+        </p:txBody>
+      </p:sp>
+      <p:sp>
+        <p:nvSpPr>
+          <p:cNvPr id="21" name="Text 19"/>
+          <p:cNvSpPr txBox="1"/>
+          <p:nvPr/>
+        </p:nvSpPr>
+        <p:spPr>
+          <a:xfrm>
+            <a:off x="8371637" y="3246120"/>
+            <a:ext cx="2905658" cy="1371600"/>
+          </a:xfrm>
+          <a:prstGeom prst="rect">
+            <a:avLst/>
+          </a:prstGeom>
+          <a:noFill/>
+          <a:ln/>
+        </p:spPr>
+        <p:txBody>
+          <a:bodyPr wrap="square" lIns="0" tIns="0" rIns="0" bIns="0" rtlCol="0" anchor="t"/>
+          <a:lstStyle/>
+          <a:p>
+            <a:pPr indent="0" marL="0">
+              <a:lnSpc>
+                <a:spcPct val="110000"/>
+              </a:lnSpc>
+              <a:buNone/>
+            </a:pPr>
+            <a:r>
+              <a:rPr lang="en-US" sz="1400" dirty="0">
+                <a:solidFill>
+                  <a:srgbClr val="3F4A5A"/>
+                </a:solidFill>
+                <a:latin typeface="Calibri" pitchFamily="34" charset="0"/>
+                <a:ea typeface="Calibri" pitchFamily="34" charset="-122"/>
+                <a:cs typeface="Calibri" pitchFamily="34" charset="-120"/>
+              </a:rPr>
+              <a:t>Pair minutes with descriptions, allowing many right answers, so two nights of sleep end up together (L1, L8).</a:t>
+            </a:r>
+            <a:endParaRPr lang="en-US" sz="1400" dirty="0"/>
+          </a:p>
+        </p:txBody>
+      </p:sp>
+      <p:sp>
+        <p:nvSpPr>
+          <p:cNvPr id="22" name="Shape 20"/>
+          <p:cNvSpPr/>
+          <p:nvPr/>
+        </p:nvSpPr>
+        <p:spPr>
+          <a:xfrm>
+            <a:off x="640080" y="5120640"/>
+            <a:ext cx="10911535" cy="868680"/>
+          </a:xfrm>
+          <a:prstGeom prst="roundRect">
+            <a:avLst>
+              <a:gd name="adj" fmla="val 10526"/>
+            </a:avLst>
+          </a:prstGeom>
+          <a:solidFill>
+            <a:srgbClr val="E3ECF7"/>
+          </a:solidFill>
+          <a:ln w="12700">
+            <a:solidFill>
+              <a:srgbClr val="E3ECF7"/>
+            </a:solidFill>
+            <a:prstDash val="solid"/>
+          </a:ln>
+        </p:spPr>
+      </p:sp>
+      <p:sp>
+        <p:nvSpPr>
+          <p:cNvPr id="23" name="Text 21"/>
+          <p:cNvSpPr txBox="1"/>
+          <p:nvPr/>
+        </p:nvSpPr>
+        <p:spPr>
+          <a:xfrm>
+            <a:off x="914400" y="5189220"/>
+            <a:ext cx="10362895" cy="731520"/>
+          </a:xfrm>
+          <a:prstGeom prst="rect">
+            <a:avLst/>
+          </a:prstGeom>
+          <a:noFill/>
+          <a:ln/>
+        </p:spPr>
+        <p:txBody>
+          <a:bodyPr wrap="square" lIns="0" tIns="0" rIns="0" bIns="0" rtlCol="0" anchor="ctr"/>
+          <a:lstStyle/>
+          <a:p>
+            <a:pPr indent="0" marL="0">
+              <a:buNone/>
+            </a:pPr>
+            <a:r>
+              <a:rPr lang="en-US" sz="1500" dirty="0">
+                <a:solidFill>
+                  <a:srgbClr val="14213D"/>
+                </a:solidFill>
+                <a:latin typeface="Calibri" pitchFamily="34" charset="0"/>
+                <a:ea typeface="Calibri" pitchFamily="34" charset="-122"/>
+                <a:cs typeface="Calibri" pitchFamily="34" charset="-120"/>
+              </a:rPr>
+              <a:t>Built and tested on small data. Next: HomeFM against the fixed DomusFM on the same 77 homes. The DomusFM "fill in the blanks" change is a small version of game 2.</a:t>
+            </a:r>
+            <a:endParaRPr lang="en-US" sz="1500" dirty="0"/>
+          </a:p>
+        </p:txBody>
+      </p:sp>
+      <p:sp>
+        <p:nvSpPr>
+          <p:cNvPr id="24" name="Text 22"/>
+          <p:cNvSpPr txBox="1"/>
+          <p:nvPr/>
+        </p:nvSpPr>
+        <p:spPr>
+          <a:xfrm>
+            <a:off x="640080" y="6355080"/>
+            <a:ext cx="10911535" cy="274320"/>
+          </a:xfrm>
+          <a:prstGeom prst="rect">
+            <a:avLst/>
+          </a:prstGeom>
+          <a:noFill/>
+          <a:ln/>
+        </p:spPr>
+        <p:txBody>
+          <a:bodyPr wrap="square" lIns="0" tIns="0" rIns="0" bIns="0" rtlCol="0" anchor="ctr"/>
+          <a:lstStyle/>
+          <a:p>
+            <a:pPr indent="0" marL="0">
+              <a:buNone/>
+            </a:pPr>
+            <a:r>
+              <a:rPr lang="en-US" sz="1100" dirty="0">
+                <a:solidFill>
+                  <a:srgbClr val="5F6B7A"/>
+                </a:solidFill>
+                <a:latin typeface="Calibri" pitchFamily="34" charset="0"/>
+                <a:ea typeface="Calibri" pitchFamily="34" charset="-122"/>
+                <a:cs typeface="Calibri" pitchFamily="34" charset="-120"/>
+              </a:rPr>
+              <a:t>DomusFM reproduction · 21 · Details: docs/LIMITATIONS_AND_REMEDIES.md (L11), docs/DESIGN.md §8</a:t>
+            </a:r>
+            <a:endParaRPr lang="en-US" sz="1100" dirty="0"/>
+          </a:p>
+        </p:txBody>
+      </p:sp>
+    </p:spTree>
+  </p:cSld>
+  <p:clrMapOvr>
+    <a:masterClrMapping/>
+  </p:clrMapOvr>
+</p:sld>
+</file>
+
+<file path=ppt/slides/slide22.xml><?xml version="1.0" encoding="utf-8"?>
+<p:sld xmlns:a="http://schemas.openxmlformats.org/drawingml/2006/main" xmlns:r="http://schemas.openxmlformats.org/officeDocument/2006/relationships" xmlns:p="http://schemas.openxmlformats.org/presentationml/2006/main">
+  <p:cSld name="Slide 22">
+    <p:bg>
+      <p:bgPr>
+        <a:solidFill>
+          <a:srgbClr val="FFFFFF"/>
+        </a:solidFill>
+      </p:bgPr>
+    </p:bg>
+    <p:spTree>
+      <p:nvGrpSpPr>
+        <p:cNvPr id="1" name=""/>
+        <p:cNvGrpSpPr/>
+        <p:nvPr/>
+      </p:nvGrpSpPr>
+      <p:grpSpPr>
+        <a:xfrm>
+          <a:off x="0" y="0"/>
+          <a:ext cx="0" cy="0"/>
+          <a:chOff x="0" y="0"/>
+          <a:chExt cx="0" cy="0"/>
+        </a:xfrm>
+      </p:grpSpPr>
+      <p:sp>
+        <p:nvSpPr>
+          <p:cNvPr id="2" name="Text 0"/>
+          <p:cNvSpPr txBox="1"/>
+          <p:nvPr/>
+        </p:nvSpPr>
+        <p:spPr>
+          <a:xfrm>
+            <a:off x="640080" y="457200"/>
+            <a:ext cx="10911535" cy="274320"/>
+          </a:xfrm>
+          <a:prstGeom prst="rect">
+            <a:avLst/>
+          </a:prstGeom>
+          <a:noFill/>
+          <a:ln/>
+        </p:spPr>
+        <p:txBody>
+          <a:bodyPr wrap="square" lIns="0" tIns="0" rIns="0" bIns="0" rtlCol="0" anchor="ctr"/>
+          <a:lstStyle/>
+          <a:p>
+            <a:pPr indent="0" marL="0">
+              <a:buNone/>
+            </a:pPr>
+            <a:r>
+              <a:rPr lang="en-US" sz="1200" b="1" spc="200" kern="0" dirty="0">
+                <a:solidFill>
+                  <a:srgbClr val="2F6FB0"/>
+                </a:solidFill>
+                <a:latin typeface="Calibri" pitchFamily="34" charset="0"/>
+                <a:ea typeface="Calibri" pitchFamily="34" charset="-122"/>
+                <a:cs typeface="Calibri" pitchFamily="34" charset="-120"/>
+              </a:rPr>
               <a:t>NEXT STEPS</a:t>
             </a:r>
             <a:endParaRPr lang="en-US" sz="1200" dirty="0"/>
@@ -17988,7 +25457,7 @@
                 <a:ea typeface="Calibri" pitchFamily="34" charset="-122"/>
                 <a:cs typeface="Calibri" pitchFamily="34" charset="-120"/>
               </a:rPr>
-              <a:t>DomusFM reproduction · 17 · Configs: homefm_corpus.yaml (8.0M), homefm_corpus_384.yaml (28.6M)</a:t>
+              <a:t>DomusFM reproduction · 22 · Configs: homefm_corpus.yaml (8.0M), homefm_corpus_384.yaml (28.6M)</a:t>
             </a:r>
             <a:endParaRPr lang="en-US" sz="1100" dirty="0"/>
           </a:p>
@@ -18002,9 +25471,9 @@
 </p:sld>
 </file>
 
-<file path=ppt/slides/slide18.xml><?xml version="1.0" encoding="utf-8"?>
+<file path=ppt/slides/slide23.xml><?xml version="1.0" encoding="utf-8"?>
 <p:sld xmlns:a="http://schemas.openxmlformats.org/drawingml/2006/main" xmlns:r="http://schemas.openxmlformats.org/officeDocument/2006/relationships" xmlns:p="http://schemas.openxmlformats.org/presentationml/2006/main">
-  <p:cSld name="Slide 18">
+  <p:cSld name="Slide 23">
     <p:bg>
       <p:bgPr>
         <a:solidFill>
@@ -18407,7 +25876,7 @@
                 <a:ea typeface="Calibri" pitchFamily="34" charset="-122"/>
                 <a:cs typeface="Calibri" pitchFamily="34" charset="-120"/>
               </a:rPr>
-              <a:t>The gain is modest outside UCI B. Ablations and the HomeFM comparison come next.</a:t>
+              <a:t>HomeFM targets DomusFM's 11 limitations; its first test is to beat this fixed DomusFM.</a:t>
             </a:r>
             <a:endParaRPr lang="en-US" sz="2200" dirty="0"/>
           </a:p>
@@ -18446,429 +25915,7 @@
                 <a:ea typeface="Calibri" pitchFamily="34" charset="-122"/>
                 <a:cs typeface="Calibri" pitchFamily="34" charset="-120"/>
               </a:rPr>
-              <a:t>DomusFM reproduction · 18 · Full results: results/domusfm_corpus_fixed/</a:t>
-            </a:r>
-            <a:endParaRPr lang="en-US" sz="1100" dirty="0"/>
-          </a:p>
-        </p:txBody>
-      </p:sp>
-    </p:spTree>
-  </p:cSld>
-  <p:clrMapOvr>
-    <a:masterClrMapping/>
-  </p:clrMapOvr>
-</p:sld>
-</file>
-
-<file path=ppt/slides/slide2.xml><?xml version="1.0" encoding="utf-8"?>
-<p:sld xmlns:a="http://schemas.openxmlformats.org/drawingml/2006/main" xmlns:r="http://schemas.openxmlformats.org/officeDocument/2006/relationships" xmlns:p="http://schemas.openxmlformats.org/presentationml/2006/main">
-  <p:cSld name="Slide 2">
-    <p:bg>
-      <p:bgPr>
-        <a:solidFill>
-          <a:srgbClr val="2F6FB0"/>
-        </a:solidFill>
-      </p:bgPr>
-    </p:bg>
-    <p:spTree>
-      <p:nvGrpSpPr>
-        <p:cNvPr id="1" name=""/>
-        <p:cNvGrpSpPr/>
-        <p:nvPr/>
-      </p:nvGrpSpPr>
-      <p:grpSpPr>
-        <a:xfrm>
-          <a:off x="0" y="0"/>
-          <a:ext cx="0" cy="0"/>
-          <a:chOff x="0" y="0"/>
-          <a:chExt cx="0" cy="0"/>
-        </a:xfrm>
-      </p:grpSpPr>
-      <p:sp>
-        <p:nvSpPr>
-          <p:cNvPr id="2" name="Text 0"/>
-          <p:cNvSpPr txBox="1"/>
-          <p:nvPr/>
-        </p:nvSpPr>
-        <p:spPr>
-          <a:xfrm>
-            <a:off x="640080" y="822960"/>
-            <a:ext cx="10911535" cy="274320"/>
-          </a:xfrm>
-          <a:prstGeom prst="rect">
-            <a:avLst/>
-          </a:prstGeom>
-          <a:noFill/>
-          <a:ln/>
-        </p:spPr>
-        <p:txBody>
-          <a:bodyPr wrap="square" lIns="0" tIns="0" rIns="0" bIns="0" rtlCol="0" anchor="t"/>
-          <a:lstStyle/>
-          <a:p>
-            <a:pPr indent="0" marL="0">
-              <a:buNone/>
-            </a:pPr>
-            <a:r>
-              <a:rPr lang="en-US" sz="1300" b="1" spc="200" kern="0" dirty="0">
-                <a:solidFill>
-                  <a:srgbClr val="E3EDF8"/>
-                </a:solidFill>
-                <a:latin typeface="Calibri" pitchFamily="34" charset="0"/>
-                <a:ea typeface="Calibri" pitchFamily="34" charset="-122"/>
-                <a:cs typeface="Calibri" pitchFamily="34" charset="-120"/>
-              </a:rPr>
-              <a:t>THE SHORT VERSION</a:t>
-            </a:r>
-            <a:endParaRPr lang="en-US" sz="1300" dirty="0"/>
-          </a:p>
-        </p:txBody>
-      </p:sp>
-      <p:sp>
-        <p:nvSpPr>
-          <p:cNvPr id="3" name="Text 1"/>
-          <p:cNvSpPr txBox="1"/>
-          <p:nvPr/>
-        </p:nvSpPr>
-        <p:spPr>
-          <a:xfrm>
-            <a:off x="640080" y="1188720"/>
-            <a:ext cx="10911535" cy="1463040"/>
-          </a:xfrm>
-          <a:prstGeom prst="rect">
-            <a:avLst/>
-          </a:prstGeom>
-          <a:noFill/>
-          <a:ln/>
-        </p:spPr>
-        <p:txBody>
-          <a:bodyPr wrap="square" lIns="0" tIns="0" rIns="0" bIns="0" rtlCol="0" anchor="ctr"/>
-          <a:lstStyle/>
-          <a:p>
-            <a:pPr indent="0" marL="0">
-              <a:buNone/>
-            </a:pPr>
-            <a:r>
-              <a:rPr lang="en-US" sz="11000" b="1" dirty="0">
-                <a:solidFill>
-                  <a:srgbClr val="FFFFFF"/>
-                </a:solidFill>
-                <a:latin typeface="Cambria" pitchFamily="34" charset="0"/>
-                <a:ea typeface="Cambria" pitchFamily="34" charset="-122"/>
-                <a:cs typeface="Cambria" pitchFamily="34" charset="-120"/>
-              </a:rPr>
-              <a:t>26 of 28</a:t>
-            </a:r>
-            <a:endParaRPr lang="en-US" sz="11000" dirty="0"/>
-          </a:p>
-        </p:txBody>
-      </p:sp>
-      <p:sp>
-        <p:nvSpPr>
-          <p:cNvPr id="4" name="Text 2"/>
-          <p:cNvSpPr txBox="1"/>
-          <p:nvPr/>
-        </p:nvSpPr>
-        <p:spPr>
-          <a:xfrm>
-            <a:off x="640080" y="2788920"/>
-            <a:ext cx="9601200" cy="914400"/>
-          </a:xfrm>
-          <a:prstGeom prst="rect">
-            <a:avLst/>
-          </a:prstGeom>
-          <a:noFill/>
-          <a:ln/>
-        </p:spPr>
-        <p:txBody>
-          <a:bodyPr wrap="square" lIns="0" tIns="0" rIns="0" bIns="0" rtlCol="0" anchor="t"/>
-          <a:lstStyle/>
-          <a:p>
-            <a:pPr indent="0" marL="0">
-              <a:buNone/>
-            </a:pPr>
-            <a:r>
-              <a:rPr lang="en-US" sz="2200" dirty="0">
-                <a:solidFill>
-                  <a:srgbClr val="FFFFFF"/>
-                </a:solidFill>
-                <a:latin typeface="Calibri" pitchFamily="34" charset="0"/>
-                <a:ea typeface="Calibri" pitchFamily="34" charset="-122"/>
-                <a:cs typeface="Calibri" pitchFamily="34" charset="-120"/>
-              </a:rPr>
-              <a:t>settings where pretrained DomusFM beats the same model trained from scratch, on 7 homes it never saw during pretraining.</a:t>
-            </a:r>
-            <a:endParaRPr lang="en-US" sz="2200" dirty="0"/>
-          </a:p>
-        </p:txBody>
-      </p:sp>
-      <p:sp>
-        <p:nvSpPr>
-          <p:cNvPr id="5" name="Text 3"/>
-          <p:cNvSpPr txBox="1"/>
-          <p:nvPr/>
-        </p:nvSpPr>
-        <p:spPr>
-          <a:xfrm>
-            <a:off x="640080" y="4069080"/>
-            <a:ext cx="3108960" cy="685800"/>
-          </a:xfrm>
-          <a:prstGeom prst="rect">
-            <a:avLst/>
-          </a:prstGeom>
-          <a:noFill/>
-          <a:ln/>
-        </p:spPr>
-        <p:txBody>
-          <a:bodyPr wrap="square" lIns="0" tIns="0" rIns="0" bIns="0" rtlCol="0" anchor="ctr"/>
-          <a:lstStyle/>
-          <a:p>
-            <a:pPr indent="0" marL="0">
-              <a:buNone/>
-            </a:pPr>
-            <a:r>
-              <a:rPr lang="en-US" sz="3800" b="1" dirty="0">
-                <a:solidFill>
-                  <a:srgbClr val="FFFFFF"/>
-                </a:solidFill>
-                <a:latin typeface="Cambria" pitchFamily="34" charset="0"/>
-                <a:ea typeface="Cambria" pitchFamily="34" charset="-122"/>
-                <a:cs typeface="Cambria" pitchFamily="34" charset="-120"/>
-              </a:rPr>
-              <a:t>+0.076</a:t>
-            </a:r>
-            <a:endParaRPr lang="en-US" sz="3800" dirty="0"/>
-          </a:p>
-        </p:txBody>
-      </p:sp>
-      <p:sp>
-        <p:nvSpPr>
-          <p:cNvPr id="6" name="Text 4"/>
-          <p:cNvSpPr txBox="1"/>
-          <p:nvPr/>
-        </p:nvSpPr>
-        <p:spPr>
-          <a:xfrm>
-            <a:off x="640080" y="4800600"/>
-            <a:ext cx="3108960" cy="320040"/>
-          </a:xfrm>
-          <a:prstGeom prst="rect">
-            <a:avLst/>
-          </a:prstGeom>
-          <a:noFill/>
-          <a:ln/>
-        </p:spPr>
-        <p:txBody>
-          <a:bodyPr wrap="square" lIns="0" tIns="0" rIns="0" bIns="0" rtlCol="0" anchor="t"/>
-          <a:lstStyle/>
-          <a:p>
-            <a:pPr indent="0" marL="0">
-              <a:buNone/>
-            </a:pPr>
-            <a:r>
-              <a:rPr lang="en-US" sz="1300" dirty="0">
-                <a:solidFill>
-                  <a:srgbClr val="E3EDF8"/>
-                </a:solidFill>
-                <a:latin typeface="Calibri" pitchFamily="34" charset="0"/>
-                <a:ea typeface="Calibri" pitchFamily="34" charset="-122"/>
-                <a:cs typeface="Calibri" pitchFamily="34" charset="-120"/>
-              </a:rPr>
-              <a:t>Activity F1 gain, 5 % labels</a:t>
-            </a:r>
-            <a:endParaRPr lang="en-US" sz="1300" dirty="0"/>
-          </a:p>
-        </p:txBody>
-      </p:sp>
-      <p:sp>
-        <p:nvSpPr>
-          <p:cNvPr id="7" name="Text 5"/>
-          <p:cNvSpPr txBox="1"/>
-          <p:nvPr/>
-        </p:nvSpPr>
-        <p:spPr>
-          <a:xfrm>
-            <a:off x="3931920" y="4069080"/>
-            <a:ext cx="3108960" cy="685800"/>
-          </a:xfrm>
-          <a:prstGeom prst="rect">
-            <a:avLst/>
-          </a:prstGeom>
-          <a:noFill/>
-          <a:ln/>
-        </p:spPr>
-        <p:txBody>
-          <a:bodyPr wrap="square" lIns="0" tIns="0" rIns="0" bIns="0" rtlCol="0" anchor="ctr"/>
-          <a:lstStyle/>
-          <a:p>
-            <a:pPr indent="0" marL="0">
-              <a:buNone/>
-            </a:pPr>
-            <a:r>
-              <a:rPr lang="en-US" sz="3800" b="1" dirty="0">
-                <a:solidFill>
-                  <a:srgbClr val="FFFFFF"/>
-                </a:solidFill>
-                <a:latin typeface="Cambria" pitchFamily="34" charset="0"/>
-                <a:ea typeface="Cambria" pitchFamily="34" charset="-122"/>
-                <a:cs typeface="Cambria" pitchFamily="34" charset="-120"/>
-              </a:rPr>
-              <a:t>+0.053</a:t>
-            </a:r>
-            <a:endParaRPr lang="en-US" sz="3800" dirty="0"/>
-          </a:p>
-        </p:txBody>
-      </p:sp>
-      <p:sp>
-        <p:nvSpPr>
-          <p:cNvPr id="8" name="Text 6"/>
-          <p:cNvSpPr txBox="1"/>
-          <p:nvPr/>
-        </p:nvSpPr>
-        <p:spPr>
-          <a:xfrm>
-            <a:off x="3931920" y="4800600"/>
-            <a:ext cx="3108960" cy="320040"/>
-          </a:xfrm>
-          <a:prstGeom prst="rect">
-            <a:avLst/>
-          </a:prstGeom>
-          <a:noFill/>
-          <a:ln/>
-        </p:spPr>
-        <p:txBody>
-          <a:bodyPr wrap="square" lIns="0" tIns="0" rIns="0" bIns="0" rtlCol="0" anchor="t"/>
-          <a:lstStyle/>
-          <a:p>
-            <a:pPr indent="0" marL="0">
-              <a:buNone/>
-            </a:pPr>
-            <a:r>
-              <a:rPr lang="en-US" sz="1300" dirty="0">
-                <a:solidFill>
-                  <a:srgbClr val="E3EDF8"/>
-                </a:solidFill>
-                <a:latin typeface="Calibri" pitchFamily="34" charset="0"/>
-                <a:ea typeface="Calibri" pitchFamily="34" charset="-122"/>
-                <a:cs typeface="Calibri" pitchFamily="34" charset="-120"/>
-              </a:rPr>
-              <a:t>Next-30 F1 gain, 5 % labels</a:t>
-            </a:r>
-            <a:endParaRPr lang="en-US" sz="1300" dirty="0"/>
-          </a:p>
-        </p:txBody>
-      </p:sp>
-      <p:sp>
-        <p:nvSpPr>
-          <p:cNvPr id="9" name="Text 7"/>
-          <p:cNvSpPr txBox="1"/>
-          <p:nvPr/>
-        </p:nvSpPr>
-        <p:spPr>
-          <a:xfrm>
-            <a:off x="7223760" y="4069080"/>
-            <a:ext cx="3108960" cy="685800"/>
-          </a:xfrm>
-          <a:prstGeom prst="rect">
-            <a:avLst/>
-          </a:prstGeom>
-          <a:noFill/>
-          <a:ln/>
-        </p:spPr>
-        <p:txBody>
-          <a:bodyPr wrap="square" lIns="0" tIns="0" rIns="0" bIns="0" rtlCol="0" anchor="ctr"/>
-          <a:lstStyle/>
-          <a:p>
-            <a:pPr indent="0" marL="0">
-              <a:buNone/>
-            </a:pPr>
-            <a:r>
-              <a:rPr lang="en-US" sz="3800" b="1" dirty="0">
-                <a:solidFill>
-                  <a:srgbClr val="FFFFFF"/>
-                </a:solidFill>
-                <a:latin typeface="Cambria" pitchFamily="34" charset="0"/>
-                <a:ea typeface="Cambria" pitchFamily="34" charset="-122"/>
-                <a:cs typeface="Cambria" pitchFamily="34" charset="-120"/>
-              </a:rPr>
-              <a:t>0.70–0.82</a:t>
-            </a:r>
-            <a:endParaRPr lang="en-US" sz="3800" dirty="0"/>
-          </a:p>
-        </p:txBody>
-      </p:sp>
-      <p:sp>
-        <p:nvSpPr>
-          <p:cNvPr id="10" name="Text 8"/>
-          <p:cNvSpPr txBox="1"/>
-          <p:nvPr/>
-        </p:nvSpPr>
-        <p:spPr>
-          <a:xfrm>
-            <a:off x="7223760" y="4800600"/>
-            <a:ext cx="3108960" cy="320040"/>
-          </a:xfrm>
-          <a:prstGeom prst="rect">
-            <a:avLst/>
-          </a:prstGeom>
-          <a:noFill/>
-          <a:ln/>
-        </p:spPr>
-        <p:txBody>
-          <a:bodyPr wrap="square" lIns="0" tIns="0" rIns="0" bIns="0" rtlCol="0" anchor="t"/>
-          <a:lstStyle/>
-          <a:p>
-            <a:pPr indent="0" marL="0">
-              <a:buNone/>
-            </a:pPr>
-            <a:r>
-              <a:rPr lang="en-US" sz="1300" dirty="0">
-                <a:solidFill>
-                  <a:srgbClr val="E3EDF8"/>
-                </a:solidFill>
-                <a:latin typeface="Calibri" pitchFamily="34" charset="0"/>
-                <a:ea typeface="Calibri" pitchFamily="34" charset="-122"/>
-                <a:cs typeface="Calibri" pitchFamily="34" charset="-120"/>
-              </a:rPr>
-              <a:t>Training loss held, no collapse</a:t>
-            </a:r>
-            <a:endParaRPr lang="en-US" sz="1300" dirty="0"/>
-          </a:p>
-        </p:txBody>
-      </p:sp>
-      <p:sp>
-        <p:nvSpPr>
-          <p:cNvPr id="11" name="Text 9"/>
-          <p:cNvSpPr txBox="1"/>
-          <p:nvPr/>
-        </p:nvSpPr>
-        <p:spPr>
-          <a:xfrm>
-            <a:off x="640080" y="6355080"/>
-            <a:ext cx="10911535" cy="274320"/>
-          </a:xfrm>
-          <a:prstGeom prst="rect">
-            <a:avLst/>
-          </a:prstGeom>
-          <a:noFill/>
-          <a:ln/>
-        </p:spPr>
-        <p:txBody>
-          <a:bodyPr wrap="square" lIns="0" tIns="0" rIns="0" bIns="0" rtlCol="0" anchor="ctr"/>
-          <a:lstStyle/>
-          <a:p>
-            <a:pPr indent="0" marL="0">
-              <a:buNone/>
-            </a:pPr>
-            <a:r>
-              <a:rPr lang="en-US" sz="1100" dirty="0">
-                <a:solidFill>
-                  <a:srgbClr val="E3EDF8"/>
-                </a:solidFill>
-                <a:latin typeface="Calibri" pitchFamily="34" charset="0"/>
-                <a:ea typeface="Calibri" pitchFamily="34" charset="-122"/>
-                <a:cs typeface="Calibri" pitchFamily="34" charset="-120"/>
-              </a:rPr>
-              <a:t>DomusFM reproduction · 2</a:t>
+              <a:t>DomusFM reproduction · 23 · Full results: results/domusfm_corpus_fixed/</a:t>
             </a:r>
             <a:endParaRPr lang="en-US" sz="1100" dirty="0"/>
           </a:p>
